--- a/SATS_Bi-Monthly Infra Review_June'26.pptx
+++ b/SATS_Bi-Monthly Infra Review_June'26.pptx
@@ -5,7 +5,7 @@
     <p:sldMasterId id="2147483917" r:id="rId4"/>
   </p:sldMasterIdLst>
   <p:notesMasterIdLst>
-    <p:notesMasterId r:id="rId18"/>
+    <p:notesMasterId r:id="rId20"/>
   </p:notesMasterIdLst>
   <p:sldIdLst>
     <p:sldId id="259" r:id="rId5"/>
@@ -14,13 +14,15 @@
     <p:sldId id="282" r:id="rId8"/>
     <p:sldId id="288" r:id="rId9"/>
     <p:sldId id="271" r:id="rId10"/>
-    <p:sldId id="290" r:id="rId11"/>
-    <p:sldId id="291" r:id="rId12"/>
+    <p:sldId id="291" r:id="rId11"/>
+    <p:sldId id="290" r:id="rId12"/>
     <p:sldId id="284" r:id="rId13"/>
     <p:sldId id="289" r:id="rId14"/>
     <p:sldId id="283" r:id="rId15"/>
-    <p:sldId id="265" r:id="rId16"/>
-    <p:sldId id="260" r:id="rId17"/>
+    <p:sldId id="293" r:id="rId16"/>
+    <p:sldId id="292" r:id="rId17"/>
+    <p:sldId id="265" r:id="rId18"/>
+    <p:sldId id="260" r:id="rId19"/>
   </p:sldIdLst>
   <p:sldSz cx="16256000" cy="9144000"/>
   <p:notesSz cx="6805613" cy="9944100"/>
@@ -143,8 +145,8 @@
   <p1510:revLst>
     <p1510:client id="{3327694A-E396-7026-3B1B-8FB780442E09}" v="779" dt="2026-06-12T14:41:14.468"/>
     <p1510:client id="{37B9CC17-A357-6F82-44BD-F8B5F18543C4}" v="1223" dt="2026-06-14T04:49:41.061"/>
+    <p1510:client id="{FAD1137B-C7D9-6F0E-7D12-DAB97310393B}" v="64" dt="2026-06-12T14:55:45.746"/>
     <p1510:client id="{80482FD8-EC59-9048-D166-D899220B2751}" v="582" dt="2026-06-12T13:56:16.270"/>
-    <p1510:client id="{FAD1137B-C7D9-6F0E-7D12-DAB97310393B}" v="64" dt="2026-06-12T14:55:45.746"/>
   </p1510:revLst>
 </p1510:revInfo>
 </file>
@@ -231,7 +233,7 @@
           <a:p>
             <a:fld id="{AB5F7D0D-0392-4D41-96B6-5E6F438A3B86}" type="datetimeFigureOut">
               <a:rPr lang="en-US" smtClean="0"/>
-              <a:t>6/13/2026</a:t>
+              <a:t>6/14/2026</a:t>
             </a:fld>
             <a:endParaRPr lang="en-US"/>
           </a:p>
@@ -538,13 +540,13 @@
           <p:nvPr/>
         </p:nvPicPr>
         <p:blipFill>
-          <a:blip>
+          <a:blip r:embed="rId2">
             <a:extLst>
               <a:ext uri="{28A0092B-C50C-407E-A947-70E740481C1C}">
                 <a14:useLocalDpi xmlns:a14="http://schemas.microsoft.com/office/drawing/2010/main"/>
               </a:ext>
               <a:ext uri="{96DAC541-7B7A-43D3-8B79-37D633B846F1}">
-                <asvg:svgBlip xmlns:asvg="http://schemas.microsoft.com/office/drawing/2016/SVG/main" r:embed="rId2"/>
+                <asvg:svgBlip xmlns:asvg="http://schemas.microsoft.com/office/drawing/2016/SVG/main" r:embed="rId3"/>
               </a:ext>
             </a:extLst>
           </a:blip>
@@ -621,10 +623,10 @@
           <p:nvPr/>
         </p:nvPicPr>
         <p:blipFill>
-          <a:blip>
+          <a:blip r:embed="rId4">
             <a:extLst>
               <a:ext uri="{96DAC541-7B7A-43D3-8B79-37D633B846F1}">
-                <asvg:svgBlip xmlns:asvg="http://schemas.microsoft.com/office/drawing/2016/SVG/main" r:embed="rId3"/>
+                <asvg:svgBlip xmlns:asvg="http://schemas.microsoft.com/office/drawing/2016/SVG/main" r:embed="rId5"/>
               </a:ext>
             </a:extLst>
           </a:blip>
@@ -2011,7 +2013,7 @@
           <p:nvPr userDrawn="1"/>
         </p:nvPicPr>
         <p:blipFill>
-          <a:blip r:embed="rId4"/>
+          <a:blip r:embed="rId6"/>
           <a:stretch>
             <a:fillRect/>
           </a:stretch>
@@ -2184,13 +2186,13 @@
           <p:nvPr/>
         </p:nvPicPr>
         <p:blipFill>
-          <a:blip>
+          <a:blip r:embed="rId3">
             <a:extLst>
               <a:ext uri="{28A0092B-C50C-407E-A947-70E740481C1C}">
                 <a14:useLocalDpi xmlns:a14="http://schemas.microsoft.com/office/drawing/2010/main" val="0"/>
               </a:ext>
               <a:ext uri="{96DAC541-7B7A-43D3-8B79-37D633B846F1}">
-                <asvg:svgBlip xmlns:asvg="http://schemas.microsoft.com/office/drawing/2016/SVG/main" r:embed="rId3"/>
+                <asvg:svgBlip xmlns:asvg="http://schemas.microsoft.com/office/drawing/2016/SVG/main" r:embed="rId4"/>
               </a:ext>
             </a:extLst>
           </a:blip>
@@ -3542,7 +3544,7 @@
       <p:pic>
         <p:nvPicPr>
           <p:cNvPr id="6" name="Picture 5" descr="Icon&#10;&#10;Description automatically generated">
-            <a:hlinkClick r:id="rId4"/>
+            <a:hlinkClick r:id="rId5"/>
             <a:extLst>
               <a:ext uri="{FF2B5EF4-FFF2-40B4-BE49-F238E27FC236}">
                 <a16:creationId xmlns:a16="http://schemas.microsoft.com/office/drawing/2014/main" id="{BE38301A-7090-B735-C0A6-04074F749576}"/>
@@ -3555,7 +3557,7 @@
           <p:nvPr userDrawn="1"/>
         </p:nvPicPr>
         <p:blipFill>
-          <a:blip r:embed="rId5" cstate="screen">
+          <a:blip r:embed="rId6" cstate="screen">
             <a:extLst>
               <a:ext uri="{28A0092B-C50C-407E-A947-70E740481C1C}">
                 <a14:useLocalDpi xmlns:a14="http://schemas.microsoft.com/office/drawing/2010/main" val="0"/>
@@ -3579,7 +3581,7 @@
       <p:pic>
         <p:nvPicPr>
           <p:cNvPr id="7" name="Picture 6" descr="Icon&#10;&#10;Description automatically generated">
-            <a:hlinkClick r:id="rId6"/>
+            <a:hlinkClick r:id="rId7"/>
             <a:extLst>
               <a:ext uri="{FF2B5EF4-FFF2-40B4-BE49-F238E27FC236}">
                 <a16:creationId xmlns:a16="http://schemas.microsoft.com/office/drawing/2014/main" id="{F1FA7471-9CD5-990B-B266-F18CDD8D6192}"/>
@@ -3592,7 +3594,7 @@
           <p:nvPr userDrawn="1"/>
         </p:nvPicPr>
         <p:blipFill>
-          <a:blip r:embed="rId7" cstate="screen">
+          <a:blip r:embed="rId8" cstate="screen">
             <a:extLst>
               <a:ext uri="{28A0092B-C50C-407E-A947-70E740481C1C}">
                 <a14:useLocalDpi xmlns:a14="http://schemas.microsoft.com/office/drawing/2010/main" val="0"/>
@@ -3616,7 +3618,7 @@
       <p:pic>
         <p:nvPicPr>
           <p:cNvPr id="9" name="Picture 8">
-            <a:hlinkClick r:id="rId8"/>
+            <a:hlinkClick r:id="rId9"/>
             <a:extLst>
               <a:ext uri="{FF2B5EF4-FFF2-40B4-BE49-F238E27FC236}">
                 <a16:creationId xmlns:a16="http://schemas.microsoft.com/office/drawing/2014/main" id="{06AF63D3-F3A6-ABEB-0C03-37036CF17F1D}"/>
@@ -3629,7 +3631,7 @@
           <p:nvPr userDrawn="1"/>
         </p:nvPicPr>
         <p:blipFill>
-          <a:blip r:embed="rId9">
+          <a:blip r:embed="rId10">
             <a:extLst>
               <a:ext uri="{28A0092B-C50C-407E-A947-70E740481C1C}">
                 <a14:useLocalDpi xmlns:a14="http://schemas.microsoft.com/office/drawing/2010/main" val="0"/>
@@ -3652,7 +3654,7 @@
       <p:pic>
         <p:nvPicPr>
           <p:cNvPr id="21" name="Picture 20" descr="Logo, icon&#10;&#10;Description automatically generated">
-            <a:hlinkClick r:id="rId10"/>
+            <a:hlinkClick r:id="rId11"/>
             <a:extLst>
               <a:ext uri="{FF2B5EF4-FFF2-40B4-BE49-F238E27FC236}">
                 <a16:creationId xmlns:a16="http://schemas.microsoft.com/office/drawing/2014/main" id="{83422065-0327-FC35-414A-2BD11DEAA7F4}"/>
@@ -3665,7 +3667,7 @@
           <p:nvPr userDrawn="1"/>
         </p:nvPicPr>
         <p:blipFill>
-          <a:blip r:embed="rId11" cstate="screen">
+          <a:blip r:embed="rId12" cstate="screen">
             <a:extLst>
               <a:ext uri="{28A0092B-C50C-407E-A947-70E740481C1C}">
                 <a14:useLocalDpi xmlns:a14="http://schemas.microsoft.com/office/drawing/2010/main" val="0"/>
@@ -4403,13 +4405,13 @@
           <p:nvPr/>
         </p:nvPicPr>
         <p:blipFill>
-          <a:blip>
+          <a:blip r:embed="rId6">
             <a:extLst>
               <a:ext uri="{28A0092B-C50C-407E-A947-70E740481C1C}">
                 <a14:useLocalDpi xmlns:a14="http://schemas.microsoft.com/office/drawing/2010/main"/>
               </a:ext>
               <a:ext uri="{96DAC541-7B7A-43D3-8B79-37D633B846F1}">
-                <asvg:svgBlip xmlns:asvg="http://schemas.microsoft.com/office/drawing/2016/SVG/main" r:embed="rId6"/>
+                <asvg:svgBlip xmlns:asvg="http://schemas.microsoft.com/office/drawing/2016/SVG/main" r:embed="rId7"/>
               </a:ext>
             </a:extLst>
           </a:blip>
@@ -5834,10 +5836,10 @@
           <p:nvPr/>
         </p:nvPicPr>
         <p:blipFill>
-          <a:blip>
+          <a:blip r:embed="rId8">
             <a:extLst>
               <a:ext uri="{96DAC541-7B7A-43D3-8B79-37D633B846F1}">
-                <asvg:svgBlip xmlns:asvg="http://schemas.microsoft.com/office/drawing/2016/SVG/main" r:embed="rId7"/>
+                <asvg:svgBlip xmlns:asvg="http://schemas.microsoft.com/office/drawing/2016/SVG/main" r:embed="rId9"/>
               </a:ext>
             </a:extLst>
           </a:blip>
@@ -6165,7 +6167,7 @@
           <p:nvPr userDrawn="1"/>
         </p:nvPicPr>
         <p:blipFill>
-          <a:blip r:embed="rId8"/>
+          <a:blip r:embed="rId10"/>
           <a:stretch>
             <a:fillRect/>
           </a:stretch>
@@ -6618,7 +6620,7 @@
         </p:nvSpPr>
         <p:spPr>
           <a:xfrm>
-            <a:off x="270825" y="245677"/>
+            <a:off x="270825" y="208099"/>
             <a:ext cx="15504000" cy="936096"/>
           </a:xfrm>
         </p:spPr>
@@ -6631,19 +6633,8 @@
                 <a:ea typeface="Tahoma"/>
                 <a:cs typeface="Tahoma"/>
               </a:rPr>
-              <a:t>Enabli</a:t>
-            </a:r>
-            <a:r>
-              <a:rPr lang="en-US" sz="4250">
-                <a:ea typeface="Tahoma"/>
-                <a:cs typeface="Tahoma"/>
-              </a:rPr>
-              <a:t>ng HTTPS for AAT-HKG</a:t>
-            </a:r>
-            <a:endParaRPr lang="en-US" sz="4250" dirty="0">
-              <a:ea typeface="Tahoma"/>
-              <a:cs typeface="Tahoma"/>
-            </a:endParaRPr>
+              <a:t>COSYS+ PROD HTTPS FQDN URLs Rollout for AAT</a:t>
+            </a:r>
           </a:p>
         </p:txBody>
       </p:sp>
@@ -6695,13 +6686,13 @@
               <a:buChar char="•"/>
             </a:pPr>
             <a:r>
-              <a:rPr lang="en-US" sz="2000" b="1">
+              <a:rPr lang="en-US" sz="2000" b="1" dirty="0">
                 <a:ea typeface="+mn-lt"/>
                 <a:cs typeface="+mn-lt"/>
               </a:rPr>
               <a:t>Resolution &amp; Next Steps:</a:t>
             </a:r>
-            <a:endParaRPr lang="en-US" sz="2000" b="1">
+            <a:endParaRPr lang="en-US" sz="2000" b="1" dirty="0">
               <a:ea typeface="Tahoma"/>
               <a:cs typeface="Tahoma"/>
             </a:endParaRPr>
@@ -6717,39 +6708,23 @@
                 <a:ea typeface="Tahoma"/>
                 <a:cs typeface="Tahoma"/>
               </a:rPr>
-              <a:t>Issue was resolved after adding IP-Based exception </a:t>
-            </a:r>
-            <a:r>
-              <a:rPr lang="en-US" sz="2000">
-                <a:latin typeface="Tahoma"/>
-                <a:ea typeface="Tahoma"/>
-                <a:cs typeface="Tahoma"/>
-              </a:rPr>
-              <a:t>in WAF</a:t>
-            </a:r>
+              <a:t>Issue was resolved after adding IP-Based exception in WAF rules as per Microsoft recommendation.</a:t>
+            </a:r>
+          </a:p>
+          <a:p>
+            <a:pPr marL="800100" indent="-342900">
+              <a:buFont typeface="Arial"/>
+              <a:buChar char="•"/>
+            </a:pPr>
             <a:r>
               <a:rPr lang="en-US" sz="2000" dirty="0">
                 <a:latin typeface="Tahoma"/>
                 <a:ea typeface="Tahoma"/>
                 <a:cs typeface="Tahoma"/>
               </a:rPr>
-              <a:t> rules as per Microsoft recommendation.</a:t>
-            </a:r>
-          </a:p>
-          <a:p>
-            <a:pPr marL="800100" indent="-342900">
-              <a:buFont typeface="Arial"/>
-              <a:buChar char="•"/>
-            </a:pPr>
-            <a:r>
-              <a:rPr lang="en-US" sz="2000">
-                <a:latin typeface="Tahoma"/>
-                <a:ea typeface="Tahoma"/>
-                <a:cs typeface="Tahoma"/>
-              </a:rPr>
               <a:t>Due to impact duration, customer temporarily rolled back to HTTP.</a:t>
             </a:r>
-            <a:endParaRPr lang="en-US">
+            <a:endParaRPr lang="en-US" dirty="0">
               <a:ea typeface="Tahoma"/>
               <a:cs typeface="Tahoma"/>
             </a:endParaRPr>
@@ -6767,17 +6742,7 @@
                 <a:ea typeface="+mn-lt"/>
                 <a:cs typeface="+mn-lt"/>
               </a:rPr>
-              <a:t>Cross-checked again the </a:t>
-            </a:r>
-            <a:r>
-              <a:rPr lang="en-US" sz="2000">
-                <a:solidFill>
-                  <a:srgbClr val="505050"/>
-                </a:solidFill>
-                <a:ea typeface="+mn-lt"/>
-                <a:cs typeface="+mn-lt"/>
-              </a:rPr>
-              <a:t>next day and found no Blockage from WAF in last 12 hours.</a:t>
+              <a:t>Cross-checked again the next day and found no Blockage from WAF in last 12 hours.</a:t>
             </a:r>
           </a:p>
           <a:p>
@@ -6793,10 +6758,10 @@
               <a:buChar char="•"/>
             </a:pPr>
             <a:r>
-              <a:rPr lang="en-US" sz="2000" b="1"/>
+              <a:rPr lang="en-US" sz="2000" b="1" dirty="0"/>
               <a:t>Future Rollout Plan:</a:t>
             </a:r>
-            <a:endParaRPr lang="en-US" sz="2000">
+            <a:endParaRPr lang="en-US" sz="2000" dirty="0">
               <a:ea typeface="Tahoma"/>
               <a:cs typeface="Tahoma"/>
             </a:endParaRPr>
@@ -6807,18 +6772,11 @@
               <a:buChar char="•"/>
             </a:pPr>
             <a:r>
-              <a:rPr lang="en-US" sz="2000">
-                <a:ea typeface="+mn-lt"/>
-                <a:cs typeface="+mn-lt"/>
-              </a:rPr>
-              <a:t>Reattempt HTTPS rollout using a phased approach (starting with a limited user base) or</a:t>
-            </a:r>
-            <a:r>
               <a:rPr lang="en-US" sz="2000" dirty="0">
                 <a:ea typeface="+mn-lt"/>
                 <a:cs typeface="+mn-lt"/>
               </a:rPr>
-              <a:t> maintain both HTTP and HTTPS in parallel until HTTPS is fully validated and stable.</a:t>
+              <a:t>Reattempt HTTPS rollout using a phased approach (starting with a limited user base) or maintain both HTTP and HTTPS in parallel until HTTPS is fully validated and stable.</a:t>
             </a:r>
           </a:p>
           <a:p>
@@ -6827,12 +6785,12 @@
               <a:buChar char="•"/>
             </a:pPr>
             <a:r>
-              <a:rPr lang="en-US" sz="2000">
+              <a:rPr lang="en-US" sz="2000" dirty="0">
                 <a:latin typeface="Tahoma"/>
                 <a:ea typeface="Tahoma"/>
                 <a:cs typeface="Tahoma"/>
               </a:rPr>
-              <a:t>Ensure WAF rules are pre-tested in blocking mode before go-live.</a:t>
+              <a:t>Ensure WAF rules are pre-tested in prevention mode before go-live.</a:t>
             </a:r>
           </a:p>
           <a:p>
@@ -6841,7 +6799,7 @@
               <a:buChar char="•"/>
             </a:pPr>
             <a:r>
-              <a:rPr lang="en-US" sz="2000">
+              <a:rPr lang="en-US" sz="2000" dirty="0">
                 <a:latin typeface="Tahoma"/>
                 <a:ea typeface="Tahoma"/>
                 <a:cs typeface="Tahoma"/>
@@ -6855,7 +6813,7 @@
               <a:buChar char="•"/>
             </a:pPr>
             <a:r>
-              <a:rPr lang="en-US" sz="2000">
+              <a:rPr lang="en-US" sz="2000" dirty="0">
                 <a:latin typeface="Tahoma"/>
                 <a:ea typeface="Tahoma"/>
                 <a:cs typeface="Tahoma"/>
@@ -6977,7 +6935,7 @@
         <p:spPr>
           <a:xfrm>
             <a:off x="231069" y="1161894"/>
-            <a:ext cx="15714350" cy="6555641"/>
+            <a:ext cx="15714350" cy="7309693"/>
           </a:xfrm>
           <a:prstGeom prst="rect">
             <a:avLst/>
@@ -7015,49 +6973,23 @@
                 <a:ea typeface="+mn-lt"/>
                 <a:cs typeface="+mn-lt"/>
               </a:rPr>
-              <a:t>As per the recent request AAT require Site-to-Site Connection along with Express Route Connectivity from Azure COSYS+ Environment. </a:t>
-            </a:r>
-          </a:p>
-          <a:p>
-            <a:pPr marL="342900" indent="-342900">
-              <a:buFont typeface="Wingdings"/>
-              <a:buChar char="q"/>
-            </a:pPr>
+              <a:t>As per recent communication by SATS Cybersecurity team regarding TLS handshake security requirements, we have checked both of our sites(</a:t>
+            </a:r>
+            <a:r>
+              <a:rPr lang="en-US" sz="2000" i="1" u="sng" dirty="0">
+                <a:latin typeface="Tahoma" panose="020B0604030504040204" pitchFamily="34" charset="0"/>
+                <a:ea typeface="+mn-lt"/>
+                <a:cs typeface="+mn-lt"/>
+              </a:rPr>
+              <a:t>satscargo.com &amp; cargo.aat.com.hk</a:t>
+            </a:r>
             <a:r>
               <a:rPr lang="en-US" sz="2000" dirty="0">
                 <a:latin typeface="Tahoma" panose="020B0604030504040204" pitchFamily="34" charset="0"/>
                 <a:ea typeface="+mn-lt"/>
                 <a:cs typeface="+mn-lt"/>
               </a:rPr>
-              <a:t>Logically longer defined IP Ranges takes more route precedence instead of Azure Service (ExpressRoute or Site-to-Site). </a:t>
-            </a:r>
-          </a:p>
-          <a:p>
-            <a:pPr marL="342900" indent="-342900">
-              <a:buFont typeface="Wingdings"/>
-              <a:buChar char="q"/>
-            </a:pPr>
-            <a:r>
-              <a:rPr lang="en-US" sz="2000" dirty="0">
-                <a:latin typeface="Tahoma" panose="020B0604030504040204" pitchFamily="34" charset="0"/>
-                <a:ea typeface="+mn-lt"/>
-                <a:cs typeface="+mn-lt"/>
-              </a:rPr>
-              <a:t>Generally Site-to-Site considered as slower compared to ExpressRoute. </a:t>
-            </a:r>
-          </a:p>
-          <a:p>
-            <a:pPr marL="342900" indent="-342900">
-              <a:buFont typeface="Wingdings"/>
-              <a:buChar char="q"/>
-            </a:pPr>
-            <a:r>
-              <a:rPr lang="en-US" sz="2000" dirty="0">
-                <a:latin typeface="Tahoma" panose="020B0604030504040204" pitchFamily="34" charset="0"/>
-                <a:ea typeface="+mn-lt"/>
-                <a:cs typeface="+mn-lt"/>
-              </a:rPr>
-              <a:t>Hence, we can setup Site-to-Site Tunnel and it can be considered as backup Tunnel.</a:t>
+              <a:t>) where we have found the below findings.</a:t>
             </a:r>
           </a:p>
           <a:p>
@@ -7072,23 +7004,39 @@
             </a:endParaRPr>
           </a:p>
           <a:p>
-            <a:pPr marL="342900" indent="-342900">
+            <a:pPr marL="800100" lvl="1" indent="-342900">
               <a:buFont typeface="Wingdings"/>
               <a:buChar char="q"/>
             </a:pPr>
             <a:r>
-              <a:rPr lang="en-US" sz="2000" b="1" u="sng" dirty="0">
+              <a:rPr lang="en-US" sz="2000" dirty="0">
                 <a:latin typeface="Tahoma" panose="020B0604030504040204" pitchFamily="34" charset="0"/>
                 <a:ea typeface="+mn-lt"/>
                 <a:cs typeface="+mn-lt"/>
               </a:rPr>
-              <a:t>General Technical Aspects : </a:t>
+              <a:t>PROD1(</a:t>
+            </a:r>
+            <a:r>
+              <a:rPr lang="en-US" sz="2000" i="1" u="sng" dirty="0">
+                <a:latin typeface="Tahoma" panose="020B0604030504040204" pitchFamily="34" charset="0"/>
+                <a:ea typeface="+mn-lt"/>
+                <a:cs typeface="+mn-lt"/>
+              </a:rPr>
+              <a:t>satscargo.com</a:t>
+            </a:r>
+            <a:r>
+              <a:rPr lang="en-US" sz="2000" dirty="0">
+                <a:latin typeface="Tahoma" panose="020B0604030504040204" pitchFamily="34" charset="0"/>
+                <a:ea typeface="+mn-lt"/>
+                <a:cs typeface="+mn-lt"/>
+              </a:rPr>
+              <a:t>) – The SSL policy attached to the Application Gateway is a legacy policy that includes older, RSA-based Cipher Suites which is the primary reason for the B rating on this URL, as it lacks Forward Secrecy support.</a:t>
             </a:r>
           </a:p>
           <a:p>
             <a:pPr marL="800100" lvl="1" indent="-342900">
-              <a:buFont typeface="Arial" panose="020B0604020202020204" pitchFamily="34" charset="0"/>
-              <a:buChar char="•"/>
+              <a:buFont typeface="Wingdings"/>
+              <a:buChar char="q"/>
             </a:pPr>
             <a:endParaRPr lang="en-US" sz="2000" dirty="0">
               <a:latin typeface="Tahoma" panose="020B0604030504040204" pitchFamily="34" charset="0"/>
@@ -7098,119 +7046,102 @@
           </a:p>
           <a:p>
             <a:pPr marL="800100" lvl="1" indent="-342900">
+              <a:buFont typeface="Wingdings" panose="05000000000000000000" pitchFamily="2" charset="2"/>
+              <a:buChar char="q"/>
+            </a:pPr>
+            <a:r>
+              <a:rPr lang="en-US" sz="2000" b="1" dirty="0"/>
+              <a:t>PROD1 – Recommendation</a:t>
+            </a:r>
+            <a:r>
+              <a:rPr lang="en-US" sz="2000" dirty="0"/>
+              <a:t>:</a:t>
+            </a:r>
+          </a:p>
+          <a:p>
+            <a:pPr lvl="1"/>
+            <a:endParaRPr lang="en-US" sz="900" dirty="0"/>
+          </a:p>
+          <a:p>
+            <a:pPr marL="1257300" lvl="2" indent="-342900">
               <a:buFont typeface="Arial" panose="020B0604020202020204" pitchFamily="34" charset="0"/>
               <a:buChar char="•"/>
             </a:pPr>
             <a:r>
-              <a:rPr lang="en-US" sz="2000" dirty="0">
-                <a:latin typeface="Tahoma" panose="020B0604030504040204" pitchFamily="34" charset="0"/>
-                <a:ea typeface="+mn-lt"/>
-                <a:cs typeface="+mn-lt"/>
-              </a:rPr>
-              <a:t>Changes requires from Azure end:</a:t>
+              <a:rPr lang="en-US" sz="2000" dirty="0"/>
+              <a:t>Upgrade the SSL policy to the newer version to enable support for modern Cipher Suites and Forward Secrecy.</a:t>
             </a:r>
           </a:p>
           <a:p>
             <a:pPr marL="1257300" lvl="2" indent="-342900">
-              <a:buFont typeface="Courier New" panose="02070309020205020404" pitchFamily="49" charset="0"/>
-              <a:buChar char="o"/>
-            </a:pPr>
-            <a:r>
-              <a:rPr lang="en-US" sz="2000" dirty="0">
-                <a:latin typeface="Tahoma" panose="020B0604030504040204" pitchFamily="34" charset="0"/>
-                <a:ea typeface="+mn-lt"/>
-                <a:cs typeface="+mn-lt"/>
-              </a:rPr>
-              <a:t>Current Coforge-IMS team will require access on AAT-HKG subscription on which Expressroute circuit with AAT was deployed. Post that Coforge-IMS will be able to comment on the required technical changes.</a:t>
-            </a:r>
-          </a:p>
-          <a:p>
-            <a:pPr lvl="2"/>
-            <a:endParaRPr lang="en-US" sz="2000" dirty="0">
-              <a:latin typeface="Tahoma" panose="020B0604030504040204" pitchFamily="34" charset="0"/>
-              <a:ea typeface="+mn-lt"/>
-              <a:cs typeface="+mn-lt"/>
-            </a:endParaRPr>
-          </a:p>
-          <a:p>
-            <a:pPr marL="800100" lvl="1" indent="-342900">
               <a:buFont typeface="Arial" panose="020B0604020202020204" pitchFamily="34" charset="0"/>
               <a:buChar char="•"/>
             </a:pPr>
             <a:r>
-              <a:rPr lang="en-US" sz="2000" dirty="0">
-                <a:latin typeface="Tahoma" panose="020B0604030504040204" pitchFamily="34" charset="0"/>
-                <a:ea typeface="+mn-lt"/>
-                <a:cs typeface="+mn-lt"/>
-              </a:rPr>
-              <a:t>Changes require from AAT On-premise : </a:t>
+              <a:rPr lang="en-US" sz="2000" dirty="0"/>
+              <a:t>However, the current policy already includes the latest Cipher Suites, most requests are still negotiating using the older ones. Hence, Cloud-IMS needs to coordinate with the Application Team to confirm readiness before proceeding, as the new policy will remove support for the older Cipher Suites entirely.</a:t>
             </a:r>
           </a:p>
           <a:p>
             <a:pPr marL="1257300" lvl="2" indent="-342900">
-              <a:buFont typeface="Courier New" panose="02070309020205020404" pitchFamily="49" charset="0"/>
-              <a:buChar char="o"/>
-            </a:pPr>
-            <a:r>
-              <a:rPr lang="en-US" sz="2000" dirty="0">
-                <a:latin typeface="Tahoma" panose="020B0604030504040204" pitchFamily="34" charset="0"/>
-                <a:ea typeface="+mn-lt"/>
-                <a:cs typeface="+mn-lt"/>
-              </a:rPr>
-              <a:t>Higher Local preference for ExpressRoute.</a:t>
-            </a:r>
+              <a:buFont typeface="Arial" panose="020B0604020202020204" pitchFamily="34" charset="0"/>
+              <a:buChar char="•"/>
+            </a:pPr>
+            <a:endParaRPr lang="en-US" sz="2000" dirty="0"/>
           </a:p>
           <a:p>
             <a:pPr marL="1257300" lvl="2" indent="-342900">
-              <a:buFont typeface="Courier New" panose="02070309020205020404" pitchFamily="49" charset="0"/>
-              <a:buChar char="o"/>
-            </a:pPr>
-            <a:r>
-              <a:rPr lang="en-US" sz="2000" dirty="0">
-                <a:latin typeface="Tahoma" panose="020B0604030504040204" pitchFamily="34" charset="0"/>
-                <a:ea typeface="+mn-lt"/>
-                <a:cs typeface="+mn-lt"/>
-              </a:rPr>
-              <a:t>Lower Local preference for Site-to-Site Connectivity. </a:t>
-            </a:r>
-          </a:p>
-          <a:p>
-            <a:pPr marL="342900" indent="-342900">
-              <a:buFont typeface="Wingdings"/>
-              <a:buChar char="q"/>
-            </a:pPr>
-            <a:endParaRPr lang="en-US" sz="2000" dirty="0">
-              <a:latin typeface="Tahoma" panose="020B0604030504040204" pitchFamily="34" charset="0"/>
-              <a:ea typeface="+mn-lt"/>
-              <a:cs typeface="+mn-lt"/>
-            </a:endParaRPr>
-          </a:p>
-          <a:p>
-            <a:pPr marL="342900" indent="-342900">
-              <a:buFont typeface="Wingdings"/>
-              <a:buChar char="q"/>
-            </a:pPr>
-            <a:r>
-              <a:rPr lang="en-US" sz="2000" b="1" u="sng" dirty="0">
-                <a:latin typeface="Tahoma" panose="020B0604030504040204" pitchFamily="34" charset="0"/>
-                <a:ea typeface="+mn-lt"/>
-                <a:cs typeface="+mn-lt"/>
-              </a:rPr>
-              <a:t>Cost Perspective </a:t>
-            </a:r>
-            <a:r>
-              <a:rPr lang="en-US" sz="2000" dirty="0">
-                <a:latin typeface="Tahoma" panose="020B0604030504040204" pitchFamily="34" charset="0"/>
-                <a:ea typeface="+mn-lt"/>
-                <a:cs typeface="+mn-lt"/>
-              </a:rPr>
-              <a:t>: Since it is a PaaS service hence, Microsoft will charge as per the hosted tunnels and Coforge-IMS support team do not have any feasibility to turn-on/turn-off the tunnel.  </a:t>
-            </a:r>
-          </a:p>
-          <a:p>
-            <a:pPr marL="342900" indent="-342900">
-              <a:buFont typeface="Wingdings"/>
-              <a:buChar char="q"/>
+              <a:buFont typeface="Arial" panose="020B0604020202020204" pitchFamily="34" charset="0"/>
+              <a:buChar char="•"/>
+            </a:pPr>
+            <a:endParaRPr lang="en-US" sz="2000" dirty="0"/>
+          </a:p>
+          <a:p>
+            <a:pPr marL="1257300" lvl="2" indent="-342900">
+              <a:buFont typeface="Arial" panose="020B0604020202020204" pitchFamily="34" charset="0"/>
+              <a:buChar char="•"/>
+            </a:pPr>
+            <a:endParaRPr lang="en-US" sz="2000" dirty="0"/>
+          </a:p>
+          <a:p>
+            <a:pPr marL="1257300" lvl="2" indent="-342900">
+              <a:buFont typeface="Arial" panose="020B0604020202020204" pitchFamily="34" charset="0"/>
+              <a:buChar char="•"/>
+            </a:pPr>
+            <a:endParaRPr lang="en-US" sz="2000" dirty="0"/>
+          </a:p>
+          <a:p>
+            <a:pPr marL="1257300" lvl="2" indent="-342900">
+              <a:buFont typeface="Arial" panose="020B0604020202020204" pitchFamily="34" charset="0"/>
+              <a:buChar char="•"/>
+            </a:pPr>
+            <a:endParaRPr lang="en-US" sz="2000" dirty="0"/>
+          </a:p>
+          <a:p>
+            <a:pPr marL="1257300" lvl="2" indent="-342900">
+              <a:buFont typeface="Arial" panose="020B0604020202020204" pitchFamily="34" charset="0"/>
+              <a:buChar char="•"/>
+            </a:pPr>
+            <a:endParaRPr lang="en-US" sz="2000" dirty="0"/>
+          </a:p>
+          <a:p>
+            <a:pPr marL="1257300" lvl="2" indent="-342900">
+              <a:buFont typeface="Arial" panose="020B0604020202020204" pitchFamily="34" charset="0"/>
+              <a:buChar char="•"/>
+            </a:pPr>
+            <a:endParaRPr lang="en-US" sz="2000" dirty="0"/>
+          </a:p>
+          <a:p>
+            <a:pPr marL="1257300" lvl="2" indent="-342900">
+              <a:buFont typeface="Arial" panose="020B0604020202020204" pitchFamily="34" charset="0"/>
+              <a:buChar char="•"/>
+            </a:pPr>
+            <a:endParaRPr lang="en-US" sz="2000" dirty="0"/>
+          </a:p>
+          <a:p>
+            <a:pPr marL="1257300" lvl="2" indent="-342900">
+              <a:buFont typeface="Arial" panose="020B0604020202020204" pitchFamily="34" charset="0"/>
+              <a:buChar char="•"/>
             </a:pPr>
             <a:endParaRPr lang="en-US" sz="2000" dirty="0">
               <a:latin typeface="Tahoma" panose="020B0604030504040204" pitchFamily="34" charset="0"/>
@@ -7256,6 +7187,800 @@
 </file>
 
 <file path=ppt/slides/slide12.xml><?xml version="1.0" encoding="utf-8"?>
+<p:sld xmlns:a="http://schemas.openxmlformats.org/drawingml/2006/main" xmlns:r="http://schemas.openxmlformats.org/officeDocument/2006/relationships" xmlns:p="http://schemas.openxmlformats.org/presentationml/2006/main">
+  <p:cSld>
+    <p:spTree>
+      <p:nvGrpSpPr>
+        <p:cNvPr id="1" name="">
+          <a:extLst>
+            <a:ext uri="{FF2B5EF4-FFF2-40B4-BE49-F238E27FC236}">
+              <a16:creationId xmlns:a16="http://schemas.microsoft.com/office/drawing/2014/main" id="{4595D832-C3DF-A16B-019A-6C0BAAFD625E}"/>
+            </a:ext>
+          </a:extLst>
+        </p:cNvPr>
+        <p:cNvGrpSpPr/>
+        <p:nvPr/>
+      </p:nvGrpSpPr>
+      <p:grpSpPr>
+        <a:xfrm>
+          <a:off x="0" y="0"/>
+          <a:ext cx="0" cy="0"/>
+          <a:chOff x="0" y="0"/>
+          <a:chExt cx="0" cy="0"/>
+        </a:xfrm>
+      </p:grpSpPr>
+      <p:sp>
+        <p:nvSpPr>
+          <p:cNvPr id="4" name="Title 3">
+            <a:extLst>
+              <a:ext uri="{FF2B5EF4-FFF2-40B4-BE49-F238E27FC236}">
+                <a16:creationId xmlns:a16="http://schemas.microsoft.com/office/drawing/2014/main" id="{0880D16C-988E-7499-C000-E478AA784F15}"/>
+              </a:ext>
+            </a:extLst>
+          </p:cNvPr>
+          <p:cNvSpPr>
+            <a:spLocks noGrp="1"/>
+          </p:cNvSpPr>
+          <p:nvPr>
+            <p:ph type="title"/>
+          </p:nvPr>
+        </p:nvSpPr>
+        <p:spPr>
+          <a:xfrm>
+            <a:off x="241797" y="245676"/>
+            <a:ext cx="15533028" cy="752685"/>
+          </a:xfrm>
+        </p:spPr>
+        <p:txBody>
+          <a:bodyPr/>
+          <a:lstStyle/>
+          <a:p>
+            <a:r>
+              <a:rPr lang="en-US" sz="4250" dirty="0">
+                <a:ea typeface="Tahoma"/>
+                <a:cs typeface="Tahoma"/>
+              </a:rPr>
+              <a:t>COSYS+ TLS Security </a:t>
+            </a:r>
+            <a:r>
+              <a:rPr lang="en-US" sz="4250" dirty="0" err="1">
+                <a:ea typeface="Tahoma"/>
+                <a:cs typeface="Tahoma"/>
+              </a:rPr>
+              <a:t>Complian</a:t>
+            </a:r>
+            <a:r>
+              <a:rPr lang="en-US" sz="4250" dirty="0">
+                <a:ea typeface="Tahoma"/>
+                <a:cs typeface="Tahoma"/>
+              </a:rPr>
+              <a:t>ce</a:t>
+            </a:r>
+          </a:p>
+        </p:txBody>
+      </p:sp>
+      <p:sp>
+        <p:nvSpPr>
+          <p:cNvPr id="2" name="TextBox 1">
+            <a:extLst>
+              <a:ext uri="{FF2B5EF4-FFF2-40B4-BE49-F238E27FC236}">
+                <a16:creationId xmlns:a16="http://schemas.microsoft.com/office/drawing/2014/main" id="{1F96543C-4C29-3CC6-28ED-094A5D800F1C}"/>
+              </a:ext>
+            </a:extLst>
+          </p:cNvPr>
+          <p:cNvSpPr txBox="1"/>
+          <p:nvPr/>
+        </p:nvSpPr>
+        <p:spPr>
+          <a:xfrm>
+            <a:off x="231069" y="1161894"/>
+            <a:ext cx="15714350" cy="7171194"/>
+          </a:xfrm>
+          <a:prstGeom prst="rect">
+            <a:avLst/>
+          </a:prstGeom>
+          <a:noFill/>
+          <a:ln w="12700" cmpd="dbl">
+            <a:solidFill>
+              <a:schemeClr val="tx1"/>
+            </a:solidFill>
+          </a:ln>
+        </p:spPr>
+        <p:txBody>
+          <a:bodyPr wrap="square" lIns="91440" tIns="45720" rIns="91440" bIns="45720" rtlCol="0" anchor="t">
+            <a:spAutoFit/>
+          </a:bodyPr>
+          <a:lstStyle/>
+          <a:p>
+            <a:pPr marL="342900" indent="-342900">
+              <a:buFont typeface="Wingdings"/>
+              <a:buChar char="q"/>
+            </a:pPr>
+            <a:endParaRPr lang="en-US" sz="2000" dirty="0">
+              <a:ea typeface="+mn-lt"/>
+              <a:cs typeface="+mn-lt"/>
+            </a:endParaRPr>
+          </a:p>
+          <a:p>
+            <a:pPr marL="800100" lvl="1" indent="-342900">
+              <a:buFont typeface="Wingdings"/>
+              <a:buChar char="q"/>
+            </a:pPr>
+            <a:r>
+              <a:rPr lang="en-US" sz="2000" dirty="0">
+                <a:latin typeface="Tahoma" panose="020B0604030504040204" pitchFamily="34" charset="0"/>
+                <a:ea typeface="+mn-lt"/>
+                <a:cs typeface="+mn-lt"/>
+              </a:rPr>
+              <a:t>As per recent communication by SATS Cybersecurity team regarding TLS handshake security requirements, we have checked both of our sites(</a:t>
+            </a:r>
+            <a:r>
+              <a:rPr lang="en-US" sz="2000" i="1" u="sng" dirty="0">
+                <a:latin typeface="Tahoma" panose="020B0604030504040204" pitchFamily="34" charset="0"/>
+                <a:ea typeface="+mn-lt"/>
+                <a:cs typeface="+mn-lt"/>
+              </a:rPr>
+              <a:t>satscargo.com &amp; cargo.aat.com.hk</a:t>
+            </a:r>
+            <a:r>
+              <a:rPr lang="en-US" sz="2000" dirty="0">
+                <a:latin typeface="Tahoma" panose="020B0604030504040204" pitchFamily="34" charset="0"/>
+                <a:ea typeface="+mn-lt"/>
+                <a:cs typeface="+mn-lt"/>
+              </a:rPr>
+              <a:t>) where we have found the below findings.</a:t>
+            </a:r>
+          </a:p>
+          <a:p>
+            <a:pPr marL="800100" lvl="1" indent="-342900">
+              <a:buFont typeface="Wingdings"/>
+              <a:buChar char="q"/>
+            </a:pPr>
+            <a:endParaRPr lang="en-US" sz="2000" dirty="0">
+              <a:latin typeface="Tahoma" panose="020B0604030504040204" pitchFamily="34" charset="0"/>
+              <a:ea typeface="+mn-lt"/>
+              <a:cs typeface="+mn-lt"/>
+            </a:endParaRPr>
+          </a:p>
+          <a:p>
+            <a:pPr marL="800100" lvl="1" indent="-342900">
+              <a:buFont typeface="Wingdings"/>
+              <a:buChar char="q"/>
+            </a:pPr>
+            <a:endParaRPr lang="en-US" sz="2000" dirty="0">
+              <a:latin typeface="Tahoma" panose="020B0604030504040204" pitchFamily="34" charset="0"/>
+              <a:ea typeface="+mn-lt"/>
+              <a:cs typeface="+mn-lt"/>
+            </a:endParaRPr>
+          </a:p>
+          <a:p>
+            <a:pPr marL="800100" lvl="1" indent="-342900">
+              <a:buFont typeface="Wingdings"/>
+              <a:buChar char="q"/>
+            </a:pPr>
+            <a:endParaRPr lang="en-US" sz="2000" dirty="0">
+              <a:latin typeface="Tahoma" panose="020B0604030504040204" pitchFamily="34" charset="0"/>
+              <a:ea typeface="+mn-lt"/>
+              <a:cs typeface="+mn-lt"/>
+            </a:endParaRPr>
+          </a:p>
+          <a:p>
+            <a:pPr marL="800100" lvl="1" indent="-342900">
+              <a:buFont typeface="Wingdings"/>
+              <a:buChar char="q"/>
+            </a:pPr>
+            <a:endParaRPr lang="en-US" sz="2000" dirty="0">
+              <a:latin typeface="Tahoma" panose="020B0604030504040204" pitchFamily="34" charset="0"/>
+              <a:ea typeface="+mn-lt"/>
+              <a:cs typeface="+mn-lt"/>
+            </a:endParaRPr>
+          </a:p>
+          <a:p>
+            <a:pPr marL="800100" lvl="1" indent="-342900">
+              <a:buFont typeface="Wingdings"/>
+              <a:buChar char="q"/>
+            </a:pPr>
+            <a:endParaRPr lang="en-US" sz="2000" dirty="0">
+              <a:latin typeface="Tahoma" panose="020B0604030504040204" pitchFamily="34" charset="0"/>
+              <a:ea typeface="+mn-lt"/>
+              <a:cs typeface="+mn-lt"/>
+            </a:endParaRPr>
+          </a:p>
+          <a:p>
+            <a:pPr marL="800100" lvl="1" indent="-342900">
+              <a:buFont typeface="Wingdings"/>
+              <a:buChar char="q"/>
+            </a:pPr>
+            <a:endParaRPr lang="en-US" sz="2000" dirty="0">
+              <a:latin typeface="Tahoma" panose="020B0604030504040204" pitchFamily="34" charset="0"/>
+              <a:ea typeface="+mn-lt"/>
+              <a:cs typeface="+mn-lt"/>
+            </a:endParaRPr>
+          </a:p>
+          <a:p>
+            <a:pPr marL="800100" lvl="1" indent="-342900">
+              <a:buFont typeface="Wingdings"/>
+              <a:buChar char="q"/>
+            </a:pPr>
+            <a:endParaRPr lang="en-US" sz="2000" dirty="0">
+              <a:latin typeface="Tahoma" panose="020B0604030504040204" pitchFamily="34" charset="0"/>
+              <a:ea typeface="+mn-lt"/>
+              <a:cs typeface="+mn-lt"/>
+            </a:endParaRPr>
+          </a:p>
+          <a:p>
+            <a:pPr marL="800100" lvl="1" indent="-342900">
+              <a:buFont typeface="Wingdings"/>
+              <a:buChar char="q"/>
+            </a:pPr>
+            <a:endParaRPr lang="en-US" sz="2000" dirty="0">
+              <a:latin typeface="Tahoma" panose="020B0604030504040204" pitchFamily="34" charset="0"/>
+              <a:ea typeface="+mn-lt"/>
+              <a:cs typeface="+mn-lt"/>
+            </a:endParaRPr>
+          </a:p>
+          <a:p>
+            <a:pPr marL="800100" lvl="1" indent="-342900">
+              <a:buFont typeface="Wingdings"/>
+              <a:buChar char="q"/>
+            </a:pPr>
+            <a:endParaRPr lang="en-US" sz="2000" dirty="0">
+              <a:latin typeface="Tahoma" panose="020B0604030504040204" pitchFamily="34" charset="0"/>
+              <a:ea typeface="+mn-lt"/>
+              <a:cs typeface="+mn-lt"/>
+            </a:endParaRPr>
+          </a:p>
+          <a:p>
+            <a:pPr lvl="1"/>
+            <a:endParaRPr lang="en-US" sz="2000" dirty="0"/>
+          </a:p>
+          <a:p>
+            <a:pPr marL="1257300" lvl="2" indent="-342900">
+              <a:buFont typeface="Arial" panose="020B0604020202020204" pitchFamily="34" charset="0"/>
+              <a:buChar char="•"/>
+            </a:pPr>
+            <a:endParaRPr lang="en-US" sz="2000" dirty="0"/>
+          </a:p>
+          <a:p>
+            <a:pPr marL="1257300" lvl="2" indent="-342900">
+              <a:buFont typeface="Arial" panose="020B0604020202020204" pitchFamily="34" charset="0"/>
+              <a:buChar char="•"/>
+            </a:pPr>
+            <a:endParaRPr lang="en-US" sz="2000" dirty="0"/>
+          </a:p>
+          <a:p>
+            <a:pPr marL="1257300" lvl="2" indent="-342900">
+              <a:buFont typeface="Arial" panose="020B0604020202020204" pitchFamily="34" charset="0"/>
+              <a:buChar char="•"/>
+            </a:pPr>
+            <a:endParaRPr lang="en-US" sz="2000" dirty="0"/>
+          </a:p>
+          <a:p>
+            <a:pPr marL="1257300" lvl="2" indent="-342900">
+              <a:buFont typeface="Arial" panose="020B0604020202020204" pitchFamily="34" charset="0"/>
+              <a:buChar char="•"/>
+            </a:pPr>
+            <a:endParaRPr lang="en-US" sz="2000" dirty="0"/>
+          </a:p>
+          <a:p>
+            <a:pPr marL="1257300" lvl="2" indent="-342900">
+              <a:buFont typeface="Arial" panose="020B0604020202020204" pitchFamily="34" charset="0"/>
+              <a:buChar char="•"/>
+            </a:pPr>
+            <a:endParaRPr lang="en-US" sz="2000" dirty="0"/>
+          </a:p>
+          <a:p>
+            <a:pPr marL="1257300" lvl="2" indent="-342900">
+              <a:buFont typeface="Arial" panose="020B0604020202020204" pitchFamily="34" charset="0"/>
+              <a:buChar char="•"/>
+            </a:pPr>
+            <a:endParaRPr lang="en-US" sz="2000" dirty="0"/>
+          </a:p>
+          <a:p>
+            <a:pPr marL="1257300" lvl="2" indent="-342900">
+              <a:buFont typeface="Arial" panose="020B0604020202020204" pitchFamily="34" charset="0"/>
+              <a:buChar char="•"/>
+            </a:pPr>
+            <a:endParaRPr lang="en-US" sz="2000" dirty="0"/>
+          </a:p>
+          <a:p>
+            <a:pPr marL="1257300" lvl="2" indent="-342900">
+              <a:buFont typeface="Arial" panose="020B0604020202020204" pitchFamily="34" charset="0"/>
+              <a:buChar char="•"/>
+            </a:pPr>
+            <a:endParaRPr lang="en-US" sz="2000" dirty="0">
+              <a:latin typeface="Tahoma" panose="020B0604030504040204" pitchFamily="34" charset="0"/>
+              <a:ea typeface="+mn-lt"/>
+              <a:cs typeface="+mn-lt"/>
+            </a:endParaRPr>
+          </a:p>
+          <a:p>
+            <a:pPr marL="342900" indent="-342900">
+              <a:buFont typeface="Wingdings"/>
+              <a:buChar char="q"/>
+            </a:pPr>
+            <a:endParaRPr lang="en-US" sz="2000" dirty="0">
+              <a:latin typeface="Tahoma" panose="020B0604030504040204" pitchFamily="34" charset="0"/>
+              <a:ea typeface="+mn-lt"/>
+              <a:cs typeface="+mn-lt"/>
+            </a:endParaRPr>
+          </a:p>
+          <a:p>
+            <a:pPr marL="342900" indent="-342900">
+              <a:buFont typeface="Wingdings"/>
+              <a:buChar char="q"/>
+            </a:pPr>
+            <a:endParaRPr lang="en-US" sz="2000" dirty="0">
+              <a:latin typeface="Tahoma" panose="020B0604030504040204" pitchFamily="34" charset="0"/>
+              <a:ea typeface="Tahoma" panose="020B0604030504040204" pitchFamily="34" charset="0"/>
+              <a:cs typeface="Tahoma" panose="020B0604030504040204" pitchFamily="34" charset="0"/>
+            </a:endParaRPr>
+          </a:p>
+        </p:txBody>
+      </p:sp>
+      <p:pic>
+        <p:nvPicPr>
+          <p:cNvPr id="7" name="Picture 6">
+            <a:extLst>
+              <a:ext uri="{FF2B5EF4-FFF2-40B4-BE49-F238E27FC236}">
+                <a16:creationId xmlns:a16="http://schemas.microsoft.com/office/drawing/2014/main" id="{E90F0403-86AA-4BCB-A88F-D4023D955035}"/>
+              </a:ext>
+            </a:extLst>
+          </p:cNvPr>
+          <p:cNvPicPr>
+            <a:picLocks noChangeAspect="1"/>
+          </p:cNvPicPr>
+          <p:nvPr/>
+        </p:nvPicPr>
+        <p:blipFill>
+          <a:blip r:embed="rId2"/>
+          <a:stretch>
+            <a:fillRect/>
+          </a:stretch>
+        </p:blipFill>
+        <p:spPr>
+          <a:xfrm>
+            <a:off x="1164361" y="2345373"/>
+            <a:ext cx="13866871" cy="5859175"/>
+          </a:xfrm>
+          <a:prstGeom prst="rect">
+            <a:avLst/>
+          </a:prstGeom>
+          <a:ln>
+            <a:solidFill>
+              <a:schemeClr val="tx2"/>
+            </a:solidFill>
+          </a:ln>
+        </p:spPr>
+      </p:pic>
+    </p:spTree>
+    <p:extLst>
+      <p:ext uri="{BB962C8B-B14F-4D97-AF65-F5344CB8AC3E}">
+        <p14:creationId xmlns:p14="http://schemas.microsoft.com/office/powerpoint/2010/main" val="376920038"/>
+      </p:ext>
+    </p:extLst>
+  </p:cSld>
+  <p:clrMapOvr>
+    <a:masterClrMapping/>
+  </p:clrMapOvr>
+</p:sld>
+</file>
+
+<file path=ppt/slides/slide13.xml><?xml version="1.0" encoding="utf-8"?>
+<p:sld xmlns:a="http://schemas.openxmlformats.org/drawingml/2006/main" xmlns:r="http://schemas.openxmlformats.org/officeDocument/2006/relationships" xmlns:p="http://schemas.openxmlformats.org/presentationml/2006/main">
+  <p:cSld>
+    <p:spTree>
+      <p:nvGrpSpPr>
+        <p:cNvPr id="1" name="">
+          <a:extLst>
+            <a:ext uri="{FF2B5EF4-FFF2-40B4-BE49-F238E27FC236}">
+              <a16:creationId xmlns:a16="http://schemas.microsoft.com/office/drawing/2014/main" id="{4595D832-C3DF-A16B-019A-6C0BAAFD625E}"/>
+            </a:ext>
+          </a:extLst>
+        </p:cNvPr>
+        <p:cNvGrpSpPr/>
+        <p:nvPr/>
+      </p:nvGrpSpPr>
+      <p:grpSpPr>
+        <a:xfrm>
+          <a:off x="0" y="0"/>
+          <a:ext cx="0" cy="0"/>
+          <a:chOff x="0" y="0"/>
+          <a:chExt cx="0" cy="0"/>
+        </a:xfrm>
+      </p:grpSpPr>
+      <p:sp>
+        <p:nvSpPr>
+          <p:cNvPr id="4" name="Title 3">
+            <a:extLst>
+              <a:ext uri="{FF2B5EF4-FFF2-40B4-BE49-F238E27FC236}">
+                <a16:creationId xmlns:a16="http://schemas.microsoft.com/office/drawing/2014/main" id="{0880D16C-988E-7499-C000-E478AA784F15}"/>
+              </a:ext>
+            </a:extLst>
+          </p:cNvPr>
+          <p:cNvSpPr>
+            <a:spLocks noGrp="1"/>
+          </p:cNvSpPr>
+          <p:nvPr>
+            <p:ph type="title"/>
+          </p:nvPr>
+        </p:nvSpPr>
+        <p:spPr>
+          <a:xfrm>
+            <a:off x="241797" y="245676"/>
+            <a:ext cx="15533028" cy="752685"/>
+          </a:xfrm>
+        </p:spPr>
+        <p:txBody>
+          <a:bodyPr/>
+          <a:lstStyle/>
+          <a:p>
+            <a:r>
+              <a:rPr lang="en-US" sz="4250" dirty="0">
+                <a:ea typeface="Tahoma"/>
+                <a:cs typeface="Tahoma"/>
+              </a:rPr>
+              <a:t>COSYS+ TLS Security </a:t>
+            </a:r>
+            <a:r>
+              <a:rPr lang="en-US" sz="4250" dirty="0" err="1">
+                <a:ea typeface="Tahoma"/>
+                <a:cs typeface="Tahoma"/>
+              </a:rPr>
+              <a:t>Complian</a:t>
+            </a:r>
+            <a:r>
+              <a:rPr lang="en-US" sz="4250" dirty="0">
+                <a:ea typeface="Tahoma"/>
+                <a:cs typeface="Tahoma"/>
+              </a:rPr>
+              <a:t>ce</a:t>
+            </a:r>
+          </a:p>
+        </p:txBody>
+      </p:sp>
+      <p:sp>
+        <p:nvSpPr>
+          <p:cNvPr id="2" name="TextBox 1">
+            <a:extLst>
+              <a:ext uri="{FF2B5EF4-FFF2-40B4-BE49-F238E27FC236}">
+                <a16:creationId xmlns:a16="http://schemas.microsoft.com/office/drawing/2014/main" id="{1F96543C-4C29-3CC6-28ED-094A5D800F1C}"/>
+              </a:ext>
+            </a:extLst>
+          </p:cNvPr>
+          <p:cNvSpPr txBox="1"/>
+          <p:nvPr/>
+        </p:nvSpPr>
+        <p:spPr>
+          <a:xfrm>
+            <a:off x="231069" y="1161894"/>
+            <a:ext cx="15714350" cy="7309693"/>
+          </a:xfrm>
+          <a:prstGeom prst="rect">
+            <a:avLst/>
+          </a:prstGeom>
+          <a:noFill/>
+          <a:ln w="12700" cmpd="dbl">
+            <a:solidFill>
+              <a:schemeClr val="tx1"/>
+            </a:solidFill>
+          </a:ln>
+        </p:spPr>
+        <p:txBody>
+          <a:bodyPr wrap="square" lIns="91440" tIns="45720" rIns="91440" bIns="45720" rtlCol="0" anchor="t">
+            <a:spAutoFit/>
+          </a:bodyPr>
+          <a:lstStyle/>
+          <a:p>
+            <a:pPr marL="800100" lvl="1" indent="-342900">
+              <a:buFont typeface="Wingdings" panose="05000000000000000000" pitchFamily="2" charset="2"/>
+              <a:buChar char="q"/>
+            </a:pPr>
+            <a:r>
+              <a:rPr lang="en-US" sz="2000" dirty="0">
+                <a:latin typeface="Tahoma" panose="020B0604030504040204" pitchFamily="34" charset="0"/>
+                <a:ea typeface="+mn-lt"/>
+                <a:cs typeface="+mn-lt"/>
+              </a:rPr>
+              <a:t>PROD2(</a:t>
+            </a:r>
+            <a:r>
+              <a:rPr lang="en-US" sz="2000" i="1" u="sng" dirty="0">
+                <a:latin typeface="Tahoma" panose="020B0604030504040204" pitchFamily="34" charset="0"/>
+                <a:ea typeface="+mn-lt"/>
+                <a:cs typeface="+mn-lt"/>
+              </a:rPr>
+              <a:t>cargo.aat.com.hk</a:t>
+            </a:r>
+            <a:r>
+              <a:rPr lang="en-US" sz="2000" dirty="0">
+                <a:latin typeface="Tahoma" panose="020B0604030504040204" pitchFamily="34" charset="0"/>
+                <a:ea typeface="+mn-lt"/>
+                <a:cs typeface="+mn-lt"/>
+              </a:rPr>
+              <a:t>) – Intermediate CA certificate provided by the Certificate Authority is missing because of which we are getting the B rating for this URL. </a:t>
+            </a:r>
+          </a:p>
+          <a:p>
+            <a:pPr marL="800100" lvl="1" indent="-342900">
+              <a:buFont typeface="Wingdings" panose="05000000000000000000" pitchFamily="2" charset="2"/>
+              <a:buChar char="q"/>
+            </a:pPr>
+            <a:endParaRPr lang="en-US" sz="2000" dirty="0">
+              <a:latin typeface="Tahoma" panose="020B0604030504040204" pitchFamily="34" charset="0"/>
+              <a:ea typeface="+mn-lt"/>
+              <a:cs typeface="+mn-lt"/>
+            </a:endParaRPr>
+          </a:p>
+          <a:p>
+            <a:pPr marL="800100" lvl="1" indent="-342900">
+              <a:buFont typeface="Wingdings" panose="05000000000000000000" pitchFamily="2" charset="2"/>
+              <a:buChar char="q"/>
+            </a:pPr>
+            <a:r>
+              <a:rPr lang="en-US" sz="2000" b="1" dirty="0"/>
+              <a:t>PROD2 – Recommendation</a:t>
+            </a:r>
+            <a:r>
+              <a:rPr lang="en-US" sz="2000" dirty="0"/>
+              <a:t>:</a:t>
+            </a:r>
+          </a:p>
+          <a:p>
+            <a:pPr marL="800100" lvl="1" indent="-342900">
+              <a:buFont typeface="Wingdings" panose="05000000000000000000" pitchFamily="2" charset="2"/>
+              <a:buChar char="q"/>
+            </a:pPr>
+            <a:endParaRPr lang="en-US" sz="900" dirty="0"/>
+          </a:p>
+          <a:p>
+            <a:pPr marL="1257300" lvl="2" indent="-342900">
+              <a:buFont typeface="Arial" panose="020B0604020202020204" pitchFamily="34" charset="0"/>
+              <a:buChar char="•"/>
+            </a:pPr>
+            <a:r>
+              <a:rPr lang="en-US" sz="2000" dirty="0"/>
+              <a:t>A full certificate bundle (Server + Intermediate + Root) will be requested from AAT and  the complete bundle needs to be uploaded to resolve the issue.</a:t>
+            </a:r>
+          </a:p>
+          <a:p>
+            <a:pPr marL="1257300" lvl="2" indent="-342900">
+              <a:buFont typeface="Arial" panose="020B0604020202020204" pitchFamily="34" charset="0"/>
+              <a:buChar char="•"/>
+            </a:pPr>
+            <a:endParaRPr lang="en-US" sz="2000" dirty="0">
+              <a:latin typeface="Tahoma" panose="020B0604030504040204" pitchFamily="34" charset="0"/>
+              <a:ea typeface="+mn-lt"/>
+              <a:cs typeface="+mn-lt"/>
+            </a:endParaRPr>
+          </a:p>
+          <a:p>
+            <a:pPr marL="1257300" lvl="2" indent="-342900">
+              <a:buFont typeface="Arial" panose="020B0604020202020204" pitchFamily="34" charset="0"/>
+              <a:buChar char="•"/>
+            </a:pPr>
+            <a:endParaRPr lang="en-US" sz="2000" dirty="0">
+              <a:latin typeface="Tahoma" panose="020B0604030504040204" pitchFamily="34" charset="0"/>
+              <a:ea typeface="+mn-lt"/>
+              <a:cs typeface="+mn-lt"/>
+            </a:endParaRPr>
+          </a:p>
+          <a:p>
+            <a:pPr marL="342900" indent="-342900">
+              <a:buFont typeface="Wingdings"/>
+              <a:buChar char="q"/>
+            </a:pPr>
+            <a:endParaRPr lang="en-US" sz="2000" dirty="0">
+              <a:latin typeface="Tahoma" panose="020B0604030504040204" pitchFamily="34" charset="0"/>
+              <a:ea typeface="+mn-lt"/>
+              <a:cs typeface="+mn-lt"/>
+            </a:endParaRPr>
+          </a:p>
+          <a:p>
+            <a:pPr marL="342900" indent="-342900">
+              <a:buFont typeface="Wingdings"/>
+              <a:buChar char="q"/>
+            </a:pPr>
+            <a:endParaRPr lang="en-US" sz="2000" dirty="0">
+              <a:latin typeface="Tahoma" panose="020B0604030504040204" pitchFamily="34" charset="0"/>
+              <a:ea typeface="+mn-lt"/>
+              <a:cs typeface="+mn-lt"/>
+            </a:endParaRPr>
+          </a:p>
+          <a:p>
+            <a:pPr marL="342900" indent="-342900">
+              <a:buFont typeface="Wingdings"/>
+              <a:buChar char="q"/>
+            </a:pPr>
+            <a:endParaRPr lang="en-US" sz="2000" dirty="0">
+              <a:latin typeface="Tahoma" panose="020B0604030504040204" pitchFamily="34" charset="0"/>
+              <a:ea typeface="+mn-lt"/>
+              <a:cs typeface="+mn-lt"/>
+            </a:endParaRPr>
+          </a:p>
+          <a:p>
+            <a:pPr marL="342900" indent="-342900">
+              <a:buFont typeface="Wingdings"/>
+              <a:buChar char="q"/>
+            </a:pPr>
+            <a:endParaRPr lang="en-US" sz="2000" dirty="0">
+              <a:latin typeface="Tahoma" panose="020B0604030504040204" pitchFamily="34" charset="0"/>
+              <a:ea typeface="+mn-lt"/>
+              <a:cs typeface="+mn-lt"/>
+            </a:endParaRPr>
+          </a:p>
+          <a:p>
+            <a:pPr marL="342900" indent="-342900">
+              <a:buFont typeface="Wingdings"/>
+              <a:buChar char="q"/>
+            </a:pPr>
+            <a:endParaRPr lang="en-US" sz="2000" dirty="0">
+              <a:latin typeface="Tahoma" panose="020B0604030504040204" pitchFamily="34" charset="0"/>
+              <a:ea typeface="+mn-lt"/>
+              <a:cs typeface="+mn-lt"/>
+            </a:endParaRPr>
+          </a:p>
+          <a:p>
+            <a:pPr marL="342900" indent="-342900">
+              <a:buFont typeface="Wingdings"/>
+              <a:buChar char="q"/>
+            </a:pPr>
+            <a:endParaRPr lang="en-US" sz="2000" dirty="0">
+              <a:latin typeface="Tahoma" panose="020B0604030504040204" pitchFamily="34" charset="0"/>
+              <a:ea typeface="+mn-lt"/>
+              <a:cs typeface="+mn-lt"/>
+            </a:endParaRPr>
+          </a:p>
+          <a:p>
+            <a:pPr marL="342900" indent="-342900">
+              <a:buFont typeface="Wingdings"/>
+              <a:buChar char="q"/>
+            </a:pPr>
+            <a:endParaRPr lang="en-US" sz="2000" dirty="0">
+              <a:latin typeface="Tahoma" panose="020B0604030504040204" pitchFamily="34" charset="0"/>
+              <a:ea typeface="+mn-lt"/>
+              <a:cs typeface="+mn-lt"/>
+            </a:endParaRPr>
+          </a:p>
+          <a:p>
+            <a:pPr marL="342900" indent="-342900">
+              <a:buFont typeface="Wingdings"/>
+              <a:buChar char="q"/>
+            </a:pPr>
+            <a:endParaRPr lang="en-US" sz="2000" dirty="0">
+              <a:latin typeface="Tahoma" panose="020B0604030504040204" pitchFamily="34" charset="0"/>
+              <a:ea typeface="+mn-lt"/>
+              <a:cs typeface="+mn-lt"/>
+            </a:endParaRPr>
+          </a:p>
+          <a:p>
+            <a:pPr marL="342900" indent="-342900">
+              <a:buFont typeface="Wingdings"/>
+              <a:buChar char="q"/>
+            </a:pPr>
+            <a:endParaRPr lang="en-US" sz="2000" dirty="0">
+              <a:latin typeface="Tahoma" panose="020B0604030504040204" pitchFamily="34" charset="0"/>
+              <a:ea typeface="+mn-lt"/>
+              <a:cs typeface="+mn-lt"/>
+            </a:endParaRPr>
+          </a:p>
+          <a:p>
+            <a:pPr marL="342900" indent="-342900">
+              <a:buFont typeface="Wingdings"/>
+              <a:buChar char="q"/>
+            </a:pPr>
+            <a:endParaRPr lang="en-US" sz="2000" dirty="0">
+              <a:latin typeface="Tahoma" panose="020B0604030504040204" pitchFamily="34" charset="0"/>
+              <a:ea typeface="+mn-lt"/>
+              <a:cs typeface="+mn-lt"/>
+            </a:endParaRPr>
+          </a:p>
+          <a:p>
+            <a:pPr marL="342900" indent="-342900">
+              <a:buFont typeface="Wingdings"/>
+              <a:buChar char="q"/>
+            </a:pPr>
+            <a:endParaRPr lang="en-US" sz="2000" dirty="0">
+              <a:latin typeface="Tahoma" panose="020B0604030504040204" pitchFamily="34" charset="0"/>
+              <a:ea typeface="+mn-lt"/>
+              <a:cs typeface="+mn-lt"/>
+            </a:endParaRPr>
+          </a:p>
+          <a:p>
+            <a:pPr marL="342900" indent="-342900">
+              <a:buFont typeface="Wingdings"/>
+              <a:buChar char="q"/>
+            </a:pPr>
+            <a:endParaRPr lang="en-US" sz="2000" dirty="0">
+              <a:latin typeface="Tahoma" panose="020B0604030504040204" pitchFamily="34" charset="0"/>
+              <a:ea typeface="+mn-lt"/>
+              <a:cs typeface="+mn-lt"/>
+            </a:endParaRPr>
+          </a:p>
+          <a:p>
+            <a:pPr marL="342900" indent="-342900">
+              <a:buFont typeface="Wingdings"/>
+              <a:buChar char="q"/>
+            </a:pPr>
+            <a:endParaRPr lang="en-US" sz="2000" dirty="0">
+              <a:latin typeface="Tahoma" panose="020B0604030504040204" pitchFamily="34" charset="0"/>
+              <a:ea typeface="+mn-lt"/>
+              <a:cs typeface="+mn-lt"/>
+            </a:endParaRPr>
+          </a:p>
+          <a:p>
+            <a:pPr marL="342900" indent="-342900">
+              <a:buFont typeface="Wingdings"/>
+              <a:buChar char="q"/>
+            </a:pPr>
+            <a:endParaRPr lang="en-US" sz="2000" dirty="0">
+              <a:latin typeface="Tahoma" panose="020B0604030504040204" pitchFamily="34" charset="0"/>
+              <a:ea typeface="+mn-lt"/>
+              <a:cs typeface="+mn-lt"/>
+            </a:endParaRPr>
+          </a:p>
+          <a:p>
+            <a:pPr marL="342900" indent="-342900">
+              <a:buFont typeface="Wingdings"/>
+              <a:buChar char="q"/>
+            </a:pPr>
+            <a:endParaRPr lang="en-US" sz="2000" dirty="0">
+              <a:latin typeface="Tahoma" panose="020B0604030504040204" pitchFamily="34" charset="0"/>
+              <a:ea typeface="Tahoma" panose="020B0604030504040204" pitchFamily="34" charset="0"/>
+              <a:cs typeface="Tahoma" panose="020B0604030504040204" pitchFamily="34" charset="0"/>
+            </a:endParaRPr>
+          </a:p>
+        </p:txBody>
+      </p:sp>
+      <p:pic>
+        <p:nvPicPr>
+          <p:cNvPr id="5" name="Picture 4">
+            <a:extLst>
+              <a:ext uri="{FF2B5EF4-FFF2-40B4-BE49-F238E27FC236}">
+                <a16:creationId xmlns:a16="http://schemas.microsoft.com/office/drawing/2014/main" id="{A032ED44-1E7E-4B66-99DF-F43F0A8FC264}"/>
+              </a:ext>
+            </a:extLst>
+          </p:cNvPr>
+          <p:cNvPicPr>
+            <a:picLocks noChangeAspect="1"/>
+          </p:cNvPicPr>
+          <p:nvPr/>
+        </p:nvPicPr>
+        <p:blipFill>
+          <a:blip r:embed="rId2"/>
+          <a:stretch>
+            <a:fillRect/>
+          </a:stretch>
+        </p:blipFill>
+        <p:spPr>
+          <a:xfrm>
+            <a:off x="1596771" y="3285257"/>
+            <a:ext cx="11593136" cy="5057077"/>
+          </a:xfrm>
+          <a:prstGeom prst="rect">
+            <a:avLst/>
+          </a:prstGeom>
+          <a:ln>
+            <a:solidFill>
+              <a:schemeClr val="tx2"/>
+            </a:solidFill>
+          </a:ln>
+        </p:spPr>
+      </p:pic>
+    </p:spTree>
+    <p:extLst>
+      <p:ext uri="{BB962C8B-B14F-4D97-AF65-F5344CB8AC3E}">
+        <p14:creationId xmlns:p14="http://schemas.microsoft.com/office/powerpoint/2010/main" val="1316565385"/>
+      </p:ext>
+    </p:extLst>
+  </p:cSld>
+  <p:clrMapOvr>
+    <a:masterClrMapping/>
+  </p:clrMapOvr>
+</p:sld>
+</file>
+
+<file path=ppt/slides/slide14.xml><?xml version="1.0" encoding="utf-8"?>
 <p:sld xmlns:a="http://schemas.openxmlformats.org/drawingml/2006/main" xmlns:r="http://schemas.openxmlformats.org/officeDocument/2006/relationships" xmlns:p="http://schemas.openxmlformats.org/presentationml/2006/main">
   <p:cSld>
     <p:spTree>
@@ -7383,7 +8108,7 @@
 </p:sld>
 </file>
 
-<file path=ppt/slides/slide13.xml><?xml version="1.0" encoding="utf-8"?>
+<file path=ppt/slides/slide15.xml><?xml version="1.0" encoding="utf-8"?>
 <p:sld xmlns:a="http://schemas.openxmlformats.org/drawingml/2006/main" xmlns:r="http://schemas.openxmlformats.org/officeDocument/2006/relationships" xmlns:p="http://schemas.openxmlformats.org/presentationml/2006/main">
   <p:cSld>
     <p:spTree>
@@ -7671,7 +8396,7 @@
           <p:nvPr>
             <p:extLst>
               <p:ext uri="{D42A27DB-BD31-4B8C-83A1-F6EECF244321}">
-                <p14:modId xmlns:p14="http://schemas.microsoft.com/office/powerpoint/2010/main" val="1462266050"/>
+                <p14:modId xmlns:p14="http://schemas.microsoft.com/office/powerpoint/2010/main" val="3239919613"/>
               </p:ext>
             </p:extLst>
           </p:nvPr>
@@ -7862,18 +8587,9 @@
                         <a:buNone/>
                       </a:pPr>
                       <a:r>
-                        <a:rPr lang="en-US" sz="2000" b="0" i="0" u="none" strike="noStrike" kern="1200" noProof="0">
-                          <a:solidFill>
-                            <a:srgbClr val="505050"/>
-                          </a:solidFill>
-                          <a:effectLst/>
-                          <a:latin typeface="Tahoma"/>
-                          <a:ea typeface="Tahoma"/>
-                          <a:cs typeface="Tahoma"/>
-                        </a:rPr>
-                        <a:t>Provisioning of NAT Gateway</a:t>
+                        <a:rPr lang="en-US" sz="2000" dirty="0"/>
+                        <a:t>Provisioning of NAT Gateway in COSYS+ Infrastructure</a:t>
                       </a:r>
-                      <a:endParaRPr lang="en-US" sz="2000"/>
                     </a:p>
                   </a:txBody>
                   <a:tcPr marL="121920" marR="121920" marT="60959" marB="60959" anchor="ctr">
@@ -7965,18 +8681,13 @@
                         <a:buNone/>
                       </a:pPr>
                       <a:r>
-                        <a:rPr lang="en-US" sz="2000" b="0" i="0" u="none" strike="noStrike" kern="1200" noProof="0">
-                          <a:solidFill>
-                            <a:srgbClr val="505050"/>
-                          </a:solidFill>
-                          <a:effectLst/>
-                          <a:latin typeface="Tahoma"/>
+                        <a:rPr lang="en-US" sz="2000" dirty="0">
                           <a:ea typeface="Tahoma"/>
                           <a:cs typeface="Tahoma"/>
                         </a:rPr>
-                        <a:t>Enabling HTTPS for SAUDI (All Tenants)</a:t>
+                        <a:t>COSYS+ PROD HTTPS FQDN URLs Rollout for SAUDI</a:t>
                       </a:r>
-                      <a:endParaRPr lang="en-US" sz="2000"/>
+                      <a:endParaRPr lang="en-US" sz="2000" dirty="0"/>
                     </a:p>
                   </a:txBody>
                   <a:tcPr marL="121920" marR="121920" marT="60959" marB="60959" anchor="ctr">
@@ -8068,17 +8779,13 @@
                         <a:buNone/>
                       </a:pPr>
                       <a:r>
-                        <a:rPr lang="en-US" sz="2000" b="0" i="0" u="none" strike="noStrike" noProof="0">
-                          <a:solidFill>
-                            <a:srgbClr val="505050"/>
-                          </a:solidFill>
-                          <a:latin typeface="Tahoma"/>
+                        <a:rPr lang="en-US" sz="2000" dirty="0">
                           <a:ea typeface="Tahoma"/>
                           <a:cs typeface="Tahoma"/>
                         </a:rPr>
-                        <a:t>Enabling HTTPS for AAT</a:t>
+                        <a:t>COSYS+ PROD HTTPS FQDN URLs Rollout for AAT</a:t>
                       </a:r>
-                      <a:endParaRPr lang="en-US"/>
+                      <a:endParaRPr lang="en-US" dirty="0"/>
                     </a:p>
                   </a:txBody>
                   <a:tcPr marL="121920" marR="121920" marT="60959" marB="60959" anchor="ctr">
@@ -8321,7 +9028,7 @@
                         <a:buNone/>
                       </a:pPr>
                       <a:r>
-                        <a:rPr lang="en-SG" sz="2000" b="0" i="0" u="none" strike="noStrike" kern="1200" baseline="0" noProof="0">
+                        <a:rPr lang="en-SG" sz="2000" b="0" i="0" u="none" strike="noStrike" kern="1200" baseline="0" noProof="0" dirty="0">
                           <a:solidFill>
                             <a:srgbClr val="505050"/>
                           </a:solidFill>
@@ -8331,7 +9038,7 @@
                         </a:rPr>
                         <a:t>Azure Service(s) Retirement</a:t>
                       </a:r>
-                      <a:endParaRPr lang="en-US" sz="2000"/>
+                      <a:endParaRPr lang="en-US" sz="2000" dirty="0"/>
                     </a:p>
                   </a:txBody>
                   <a:tcPr marL="121920" marR="121920" marT="60959" marB="60959" anchor="ctr">
@@ -8496,32 +9203,24 @@
                 <a:ea typeface="Tahoma"/>
                 <a:cs typeface="Tahoma"/>
               </a:rPr>
-              <a:t>Manage Engine Plugin Installa</a:t>
-            </a:r>
-            <a:r>
-              <a:rPr lang="en-US" sz="2000" b="1">
+              <a:t>Manage Engine Plugin Installation in COSYS+ Environment:</a:t>
+            </a:r>
+          </a:p>
+          <a:p>
+            <a:pPr marL="800100" lvl="1" indent="-342900">
+              <a:buFont typeface="Arial" panose="05000000000000000000" pitchFamily="2" charset="2"/>
+              <a:buChar char="•"/>
+            </a:pPr>
+            <a:r>
+              <a:rPr lang="en-US" sz="2000" dirty="0">
                 <a:latin typeface="Tahoma"/>
                 <a:ea typeface="Tahoma"/>
                 <a:cs typeface="Tahoma"/>
               </a:rPr>
-              <a:t>tion in COSYS+ Environment:</a:t>
-            </a:r>
-          </a:p>
-          <a:p>
-            <a:pPr marL="800100" lvl="1" indent="-342900">
-              <a:buFont typeface="Arial" panose="05000000000000000000" pitchFamily="2" charset="2"/>
-              <a:buChar char="•"/>
-            </a:pPr>
-            <a:r>
-              <a:rPr lang="en-US" sz="2000">
-                <a:latin typeface="Tahoma"/>
-                <a:ea typeface="Tahoma"/>
-                <a:cs typeface="Tahoma"/>
-              </a:rPr>
               <a:t>JVM Plugin in UAT &amp; PROD </a:t>
             </a:r>
             <a:r>
-              <a:rPr lang="en-US" sz="2000" b="1">
+              <a:rPr lang="en-US" sz="2000" b="1" dirty="0">
                 <a:solidFill>
                   <a:srgbClr val="00B050"/>
                 </a:solidFill>
@@ -8531,7 +9230,7 @@
               </a:rPr>
               <a:t>– Completed.</a:t>
             </a:r>
-            <a:endParaRPr lang="en-US" b="1">
+            <a:endParaRPr lang="en-US" b="1" dirty="0">
               <a:solidFill>
                 <a:srgbClr val="00B050"/>
               </a:solidFill>
@@ -8545,7 +9244,7 @@
               <a:buChar char="•"/>
             </a:pPr>
             <a:r>
-              <a:rPr lang="en-US" sz="2000">
+              <a:rPr lang="en-US" sz="2000" dirty="0">
                 <a:latin typeface="Tahoma"/>
                 <a:ea typeface="Tahoma"/>
                 <a:cs typeface="Tahoma"/>
@@ -8553,7 +9252,7 @@
               <a:t>AMQ Plugin in UAT &amp; PROD </a:t>
             </a:r>
             <a:r>
-              <a:rPr lang="en-US" sz="2000" b="1">
+              <a:rPr lang="en-US" sz="2000" b="1" dirty="0">
                 <a:solidFill>
                   <a:srgbClr val="00B050"/>
                 </a:solidFill>
@@ -8563,7 +9262,7 @@
               </a:rPr>
               <a:t>– Completed.</a:t>
             </a:r>
-            <a:endParaRPr lang="en-US">
+            <a:endParaRPr lang="en-US" dirty="0">
               <a:ea typeface="Tahoma"/>
               <a:cs typeface="Tahoma"/>
             </a:endParaRPr>
@@ -8574,7 +9273,7 @@
               <a:buChar char="•"/>
             </a:pPr>
             <a:r>
-              <a:rPr lang="en-US" sz="2000">
+              <a:rPr lang="en-US" sz="2000" dirty="0">
                 <a:latin typeface="Tahoma"/>
                 <a:ea typeface="Tahoma"/>
                 <a:cs typeface="Tahoma"/>
@@ -8582,7 +9281,7 @@
               <a:t>Artemis AMQ Plugin Test in UAT </a:t>
             </a:r>
             <a:r>
-              <a:rPr lang="en-US" sz="2000" b="1">
+              <a:rPr lang="en-US" sz="2000" b="1" dirty="0">
                 <a:solidFill>
                   <a:srgbClr val="00B050"/>
                 </a:solidFill>
@@ -8593,7 +9292,7 @@
               <a:t>– </a:t>
             </a:r>
             <a:r>
-              <a:rPr lang="en-US" sz="2000" b="1">
+              <a:rPr lang="en-US" sz="2000" b="1" dirty="0">
                 <a:solidFill>
                   <a:srgbClr val="00B050"/>
                 </a:solidFill>
@@ -8603,7 +9302,7 @@
               </a:rPr>
               <a:t>Completed.</a:t>
             </a:r>
-            <a:endParaRPr lang="en-US">
+            <a:endParaRPr lang="en-US" dirty="0">
               <a:solidFill>
                 <a:srgbClr val="505050"/>
               </a:solidFill>
@@ -8660,7 +9359,7 @@
                 <a:ea typeface="+mn-lt"/>
                 <a:cs typeface="+mn-lt"/>
               </a:rPr>
-              <a:t>OpsRamp</a:t>
+              <a:t>Opsramp</a:t>
             </a:r>
             <a:r>
               <a:rPr lang="en-US" sz="2000" dirty="0">
@@ -8700,21 +9399,21 @@
               <a:buChar char="q"/>
             </a:pPr>
             <a:r>
-              <a:rPr lang="en-US" sz="2000" b="1">
+              <a:rPr lang="en-US" sz="2000" b="1" dirty="0">
                 <a:ea typeface="+mn-lt"/>
                 <a:cs typeface="+mn-lt"/>
               </a:rPr>
               <a:t>Realignment of resources as per Resource Groups – </a:t>
             </a:r>
             <a:r>
-              <a:rPr lang="en-US" sz="2000">
+              <a:rPr lang="en-US" sz="2000" dirty="0">
                 <a:ea typeface="+mn-lt"/>
                 <a:cs typeface="+mn-lt"/>
               </a:rPr>
               <a:t>Cloud-IMS has planned this activity to be executed in multiple phases due to resource movement dependencies. The phased implementation plan will be shared with the SATS team for review and approval </a:t>
             </a:r>
             <a:r>
-              <a:rPr lang="en-US" sz="2000" b="1">
+              <a:rPr lang="en-US" sz="2000" b="1" dirty="0">
                 <a:solidFill>
                   <a:schemeClr val="accent2"/>
                 </a:solidFill>
@@ -8744,7 +9443,7 @@
               <a:buChar char="q"/>
             </a:pPr>
             <a:r>
-              <a:rPr lang="en-US" sz="2000" b="1">
+              <a:rPr lang="en-US" sz="2000" b="1" dirty="0">
                 <a:ea typeface="+mn-lt"/>
                 <a:cs typeface="+mn-lt"/>
               </a:rPr>
@@ -8761,14 +9460,14 @@
               <a:t> </a:t>
             </a:r>
             <a:r>
-              <a:rPr lang="en-US" sz="2000">
+              <a:rPr lang="en-US" sz="2000" dirty="0">
                 <a:ea typeface="+mn-lt"/>
                 <a:cs typeface="+mn-lt"/>
               </a:rPr>
               <a:t>As per the application team's request, Cloud-IMS has successfully decommissioned the servers. </a:t>
             </a:r>
             <a:r>
-              <a:rPr lang="en-US" sz="2000" b="1">
+              <a:rPr lang="en-US" sz="2000" b="1" dirty="0">
                 <a:solidFill>
                   <a:srgbClr val="00B050"/>
                 </a:solidFill>
@@ -8797,21 +9496,21 @@
               <a:buChar char="q"/>
             </a:pPr>
             <a:r>
-              <a:rPr lang="en-US" sz="2000" b="1">
+              <a:rPr lang="en-US" sz="2000" b="1" dirty="0">
                 <a:ea typeface="+mn-lt"/>
                 <a:cs typeface="+mn-lt"/>
               </a:rPr>
               <a:t>COSYS+ WARA Report – </a:t>
             </a:r>
             <a:r>
-              <a:rPr lang="en-US" sz="2000">
+              <a:rPr lang="en-US" sz="2000" dirty="0">
                 <a:ea typeface="+mn-lt"/>
                 <a:cs typeface="+mn-lt"/>
               </a:rPr>
               <a:t>Cloud-IMS received the COSYS+ WARA report from the SATS team for recommendation inputs. The required inputs have been successfully added and shared with the SATS team </a:t>
             </a:r>
             <a:r>
-              <a:rPr lang="en-US" sz="2000" b="1">
+              <a:rPr lang="en-US" sz="2000" b="1" dirty="0">
                 <a:solidFill>
                   <a:srgbClr val="00B050"/>
                 </a:solidFill>
@@ -8820,13 +9519,6 @@
               </a:rPr>
               <a:t>– Completed.</a:t>
             </a:r>
-            <a:endParaRPr lang="en-US" sz="2000" b="1" dirty="0">
-              <a:solidFill>
-                <a:srgbClr val="00B050"/>
-              </a:solidFill>
-              <a:ea typeface="+mn-lt"/>
-              <a:cs typeface="+mn-lt"/>
-            </a:endParaRPr>
           </a:p>
         </p:txBody>
       </p:sp>
@@ -9294,7 +9986,7 @@
               <a:buChar char="q"/>
             </a:pPr>
             <a:r>
-              <a:rPr lang="en-US" sz="2000" b="1">
+              <a:rPr lang="en-US" sz="2000" b="1" dirty="0">
                 <a:solidFill>
                   <a:srgbClr val="505050"/>
                 </a:solidFill>
@@ -9304,14 +9996,14 @@
               <a:t>Enhancement</a:t>
             </a:r>
             <a:r>
-              <a:rPr lang="en-US" sz="2000" b="1">
+              <a:rPr lang="en-US" sz="2000" b="1" dirty="0">
                 <a:ea typeface="+mn-lt"/>
                 <a:cs typeface="+mn-lt"/>
               </a:rPr>
               <a:t> of Printer &amp; JVM Plugins in Manage Engine – </a:t>
             </a:r>
             <a:r>
-              <a:rPr lang="en-US" sz="2000">
+              <a:rPr lang="en-US" sz="2000" dirty="0">
                 <a:ea typeface="+mn-lt"/>
                 <a:cs typeface="+mn-lt"/>
               </a:rPr>
@@ -9328,7 +10020,7 @@
               <a:t> </a:t>
             </a:r>
             <a:r>
-              <a:rPr lang="en-US" sz="2000" b="1">
+              <a:rPr lang="en-US" sz="2000" b="1" dirty="0">
                 <a:solidFill>
                   <a:srgbClr val="00B050"/>
                 </a:solidFill>
@@ -9337,7 +10029,7 @@
               </a:rPr>
               <a:t>– Completed.</a:t>
             </a:r>
-            <a:endParaRPr lang="en-US">
+            <a:endParaRPr lang="en-US" dirty="0">
               <a:solidFill>
                 <a:srgbClr val="505050"/>
               </a:solidFill>
@@ -9365,7 +10057,7 @@
               <a:buChar char="q"/>
             </a:pPr>
             <a:r>
-              <a:rPr lang="en-US" sz="2000" b="1">
+              <a:rPr lang="en-US" sz="2000" b="1" dirty="0">
                 <a:ea typeface="+mn-lt"/>
                 <a:cs typeface="+mn-lt"/>
               </a:rPr>
@@ -9374,35 +10066,35 @@
           </a:p>
           <a:p>
             <a:pPr marL="800100" lvl="1" indent="-342900">
-              <a:buFont typeface="Courier New" panose="05000000000000000000" pitchFamily="2" charset="2"/>
-              <a:buChar char="o"/>
-            </a:pPr>
-            <a:r>
-              <a:rPr lang="en-US" sz="2000" b="1">
+              <a:buFont typeface="Arial" panose="020B0604020202020204" pitchFamily="34" charset="0"/>
+              <a:buChar char="•"/>
+            </a:pPr>
+            <a:r>
+              <a:rPr lang="en-US" sz="2000" b="1" dirty="0">
                 <a:ea typeface="+mn-lt"/>
                 <a:cs typeface="+mn-lt"/>
               </a:rPr>
               <a:t>NON-PROD Environment: </a:t>
             </a:r>
-            <a:endParaRPr lang="en-US">
+            <a:endParaRPr lang="en-US" dirty="0">
               <a:ea typeface="Tahoma"/>
               <a:cs typeface="Tahoma"/>
             </a:endParaRPr>
           </a:p>
           <a:p>
             <a:pPr marL="1257300" lvl="2" indent="-342900">
-              <a:buFont typeface="Arial" panose="05000000000000000000" pitchFamily="2" charset="2"/>
-              <a:buChar char="•"/>
-            </a:pPr>
-            <a:r>
-              <a:rPr lang="en-US" sz="2000">
+              <a:buFont typeface="Courier New" panose="02070309020205020404" pitchFamily="49" charset="0"/>
+              <a:buChar char="o"/>
+            </a:pPr>
+            <a:r>
+              <a:rPr lang="en-US" sz="2000" dirty="0">
                 <a:ea typeface="+mn-lt"/>
                 <a:cs typeface="+mn-lt"/>
               </a:rPr>
               <a:t>Cloud-IMS has successfully created the Site-to-Site tunnels for GTR MY </a:t>
             </a:r>
             <a:r>
-              <a:rPr lang="en-US" sz="2000" b="1">
+              <a:rPr lang="en-US" sz="2000" b="1" dirty="0">
                 <a:solidFill>
                   <a:srgbClr val="00B050"/>
                 </a:solidFill>
@@ -9411,7 +10103,7 @@
               </a:rPr>
               <a:t>– Completed.</a:t>
             </a:r>
-            <a:endParaRPr lang="en-US" sz="2000" b="1">
+            <a:endParaRPr lang="en-US" sz="2000" b="1" dirty="0">
               <a:solidFill>
                 <a:srgbClr val="00B050"/>
               </a:solidFill>
@@ -9421,18 +10113,18 @@
           </a:p>
           <a:p>
             <a:pPr marL="1257300" lvl="2" indent="-342900">
-              <a:buFont typeface="Arial" panose="05000000000000000000" pitchFamily="2" charset="2"/>
-              <a:buChar char="•"/>
-            </a:pPr>
-            <a:r>
-              <a:rPr lang="en-US" sz="2000">
+              <a:buFont typeface="Courier New" panose="02070309020205020404" pitchFamily="49" charset="0"/>
+              <a:buChar char="o"/>
+            </a:pPr>
+            <a:r>
+              <a:rPr lang="en-US" sz="2000" dirty="0">
                 <a:ea typeface="+mn-lt"/>
                 <a:cs typeface="+mn-lt"/>
               </a:rPr>
               <a:t>Two VMs (ESB &amp; SITA) have also been provisioned successfully </a:t>
             </a:r>
             <a:r>
-              <a:rPr lang="en-US" sz="2000" b="1">
+              <a:rPr lang="en-US" sz="2000" b="1" dirty="0">
                 <a:solidFill>
                   <a:srgbClr val="00B050"/>
                 </a:solidFill>
@@ -9441,25 +10133,25 @@
               </a:rPr>
               <a:t>– Completed.</a:t>
             </a:r>
-            <a:endParaRPr lang="en-US" sz="2000">
+            <a:endParaRPr lang="en-US" sz="2000" dirty="0">
               <a:ea typeface="Tahoma"/>
               <a:cs typeface="Tahoma"/>
             </a:endParaRPr>
           </a:p>
           <a:p>
             <a:pPr marL="1257300" lvl="2" indent="-342900">
-              <a:buFont typeface="Arial" panose="05000000000000000000" pitchFamily="2" charset="2"/>
-              <a:buChar char="•"/>
-            </a:pPr>
-            <a:r>
-              <a:rPr lang="en-US" sz="2000">
+              <a:buFont typeface="Courier New" panose="02070309020205020404" pitchFamily="49" charset="0"/>
+              <a:buChar char="o"/>
+            </a:pPr>
+            <a:r>
+              <a:rPr lang="en-US" sz="2000" dirty="0">
                 <a:ea typeface="+mn-lt"/>
                 <a:cs typeface="+mn-lt"/>
               </a:rPr>
               <a:t>Cloud-IMS has successfully configured the Load Balancer for NON-PROD environment </a:t>
             </a:r>
             <a:r>
-              <a:rPr lang="en-US" sz="2000" b="1">
+              <a:rPr lang="en-US" sz="2000" b="1" dirty="0">
                 <a:solidFill>
                   <a:srgbClr val="00B050"/>
                 </a:solidFill>
@@ -9468,25 +10160,25 @@
               </a:rPr>
               <a:t>– Completed.</a:t>
             </a:r>
-            <a:endParaRPr lang="en-US" sz="2000">
+            <a:endParaRPr lang="en-US" sz="2000" dirty="0">
               <a:ea typeface="Tahoma"/>
               <a:cs typeface="Tahoma"/>
             </a:endParaRPr>
           </a:p>
           <a:p>
             <a:pPr marL="1257300" lvl="2" indent="-342900">
-              <a:buFont typeface="Arial" panose="05000000000000000000" pitchFamily="2" charset="2"/>
-              <a:buChar char="•"/>
-            </a:pPr>
-            <a:r>
-              <a:rPr lang="en-US" sz="2000">
+              <a:buFont typeface="Courier New" panose="02070309020205020404" pitchFamily="49" charset="0"/>
+              <a:buChar char="o"/>
+            </a:pPr>
+            <a:r>
+              <a:rPr lang="en-US" sz="2000" dirty="0">
                 <a:ea typeface="+mn-lt"/>
                 <a:cs typeface="+mn-lt"/>
               </a:rPr>
               <a:t>Cloud-IMS have successfully configured FQDNs for accessing NON-PROD (STG &amp; UAT) environments </a:t>
             </a:r>
             <a:r>
-              <a:rPr lang="en-US" sz="2000" b="1">
+              <a:rPr lang="en-US" sz="2000" b="1" dirty="0">
                 <a:solidFill>
                   <a:srgbClr val="00B050"/>
                 </a:solidFill>
@@ -9495,52 +10187,52 @@
               </a:rPr>
               <a:t>– Completed.</a:t>
             </a:r>
-            <a:endParaRPr lang="en-US">
-              <a:ea typeface="Tahoma"/>
-              <a:cs typeface="Tahoma"/>
-            </a:endParaRPr>
-          </a:p>
-          <a:p>
-            <a:pPr marL="342900" indent="-342900">
-              <a:buFont typeface="Wingdings" panose="05000000000000000000" pitchFamily="2" charset="2"/>
-              <a:buChar char="q"/>
-            </a:pPr>
             <a:endParaRPr lang="en-US" dirty="0">
               <a:ea typeface="Tahoma"/>
               <a:cs typeface="Tahoma"/>
             </a:endParaRPr>
           </a:p>
           <a:p>
-            <a:pPr marL="800100" lvl="1" indent="-342900">
-              <a:buFont typeface="Courier New" panose="05000000000000000000" pitchFamily="2" charset="2"/>
-              <a:buChar char="o"/>
-            </a:pPr>
-            <a:r>
-              <a:rPr lang="en-US" sz="2000" b="1">
-                <a:ea typeface="+mn-lt"/>
-                <a:cs typeface="+mn-lt"/>
-              </a:rPr>
-              <a:t>PROD Environment:</a:t>
-            </a:r>
-            <a:endParaRPr lang="en-US">
+            <a:pPr marL="342900" indent="-342900">
+              <a:buFont typeface="Wingdings" panose="05000000000000000000" pitchFamily="2" charset="2"/>
+              <a:buChar char="q"/>
+            </a:pPr>
+            <a:endParaRPr lang="en-US" dirty="0">
               <a:ea typeface="Tahoma"/>
               <a:cs typeface="Tahoma"/>
             </a:endParaRPr>
           </a:p>
           <a:p>
-            <a:pPr marL="1257300" lvl="2" indent="-342900">
-              <a:buFont typeface="Arial" panose="05000000000000000000" pitchFamily="2" charset="2"/>
+            <a:pPr marL="800100" lvl="1" indent="-342900">
+              <a:buFont typeface="Arial" panose="020B0604020202020204" pitchFamily="34" charset="0"/>
               <a:buChar char="•"/>
             </a:pPr>
             <a:r>
-              <a:rPr lang="en-US" sz="2000">
+              <a:rPr lang="en-US" sz="2000" b="1" dirty="0">
                 <a:ea typeface="+mn-lt"/>
                 <a:cs typeface="+mn-lt"/>
               </a:rPr>
+              <a:t>PROD Environment:</a:t>
+            </a:r>
+            <a:endParaRPr lang="en-US" dirty="0">
+              <a:ea typeface="Tahoma"/>
+              <a:cs typeface="Tahoma"/>
+            </a:endParaRPr>
+          </a:p>
+          <a:p>
+            <a:pPr marL="1257300" lvl="2" indent="-342900">
+              <a:buFont typeface="Courier New" panose="02070309020205020404" pitchFamily="49" charset="0"/>
+              <a:buChar char="o"/>
+            </a:pPr>
+            <a:r>
+              <a:rPr lang="en-US" sz="2000" dirty="0">
+                <a:ea typeface="+mn-lt"/>
+                <a:cs typeface="+mn-lt"/>
+              </a:rPr>
               <a:t>Cloud-IMS has successfully created the Site-to-Site tunnels for GTR MY </a:t>
             </a:r>
             <a:r>
-              <a:rPr lang="en-US" sz="2000" b="1">
+              <a:rPr lang="en-US" sz="2000" b="1" dirty="0">
                 <a:solidFill>
                   <a:srgbClr val="00B050"/>
                 </a:solidFill>
@@ -9549,25 +10241,25 @@
               </a:rPr>
               <a:t>– Completed.</a:t>
             </a:r>
-            <a:endParaRPr lang="en-US" sz="2000">
+            <a:endParaRPr lang="en-US" sz="2000" dirty="0">
               <a:ea typeface="Tahoma"/>
               <a:cs typeface="Tahoma"/>
             </a:endParaRPr>
           </a:p>
           <a:p>
             <a:pPr marL="1257300" lvl="2" indent="-342900">
-              <a:buFont typeface="Arial" panose="05000000000000000000" pitchFamily="2" charset="2"/>
-              <a:buChar char="•"/>
-            </a:pPr>
-            <a:r>
-              <a:rPr lang="en-US" sz="2000">
+              <a:buFont typeface="Courier New" panose="02070309020205020404" pitchFamily="49" charset="0"/>
+              <a:buChar char="o"/>
+            </a:pPr>
+            <a:r>
+              <a:rPr lang="en-US" sz="2000" dirty="0">
                 <a:ea typeface="+mn-lt"/>
                 <a:cs typeface="+mn-lt"/>
               </a:rPr>
               <a:t>Cloud-IMS have successfully configured FQDNs for accessing PROD environment </a:t>
             </a:r>
             <a:r>
-              <a:rPr lang="en-US" sz="2000" b="1">
+              <a:rPr lang="en-US" sz="2000" b="1" dirty="0">
                 <a:solidFill>
                   <a:srgbClr val="00B050"/>
                 </a:solidFill>
@@ -9576,25 +10268,25 @@
               </a:rPr>
               <a:t>– Completed.</a:t>
             </a:r>
-            <a:endParaRPr lang="en-US" sz="2000">
+            <a:endParaRPr lang="en-US" sz="2000" dirty="0">
               <a:ea typeface="Tahoma"/>
               <a:cs typeface="Tahoma"/>
             </a:endParaRPr>
           </a:p>
           <a:p>
             <a:pPr marL="1257300" lvl="2" indent="-342900">
-              <a:buFont typeface="Arial" panose="05000000000000000000" pitchFamily="2" charset="2"/>
-              <a:buChar char="•"/>
-            </a:pPr>
-            <a:r>
-              <a:rPr lang="en-US" sz="2000">
+              <a:buFont typeface="Courier New" panose="02070309020205020404" pitchFamily="49" charset="0"/>
+              <a:buChar char="o"/>
+            </a:pPr>
+            <a:r>
+              <a:rPr lang="en-US" sz="2000" dirty="0">
                 <a:ea typeface="+mn-lt"/>
                 <a:cs typeface="+mn-lt"/>
               </a:rPr>
               <a:t>Provisioning of SQL database </a:t>
             </a:r>
             <a:r>
-              <a:rPr lang="en-US" sz="2000" b="1">
+              <a:rPr lang="en-US" sz="2000" b="1" dirty="0">
                 <a:solidFill>
                   <a:srgbClr val="00B050"/>
                 </a:solidFill>
@@ -9603,7 +10295,7 @@
               </a:rPr>
               <a:t>– Completed.</a:t>
             </a:r>
-            <a:endParaRPr lang="en-US" sz="2000" b="1">
+            <a:endParaRPr lang="en-US" sz="2000" b="1" dirty="0">
               <a:solidFill>
                 <a:srgbClr val="00B050"/>
               </a:solidFill>
@@ -9613,18 +10305,18 @@
           </a:p>
           <a:p>
             <a:pPr marL="1257300" lvl="2" indent="-342900">
-              <a:buFont typeface="Arial" panose="05000000000000000000" pitchFamily="2" charset="2"/>
-              <a:buChar char="•"/>
-            </a:pPr>
-            <a:r>
-              <a:rPr lang="en-US" sz="2000">
+              <a:buFont typeface="Courier New" panose="02070309020205020404" pitchFamily="49" charset="0"/>
+              <a:buChar char="o"/>
+            </a:pPr>
+            <a:r>
+              <a:rPr lang="en-US" sz="2000" dirty="0">
                 <a:ea typeface="+mn-lt"/>
                 <a:cs typeface="+mn-lt"/>
               </a:rPr>
               <a:t>Provisioning of ESB &amp; SITA VMs </a:t>
             </a:r>
             <a:r>
-              <a:rPr lang="en-US" sz="2000" b="1">
+              <a:rPr lang="en-US" sz="2000" b="1" dirty="0">
                 <a:solidFill>
                   <a:schemeClr val="accent2"/>
                 </a:solidFill>
@@ -9633,25 +10325,25 @@
               </a:rPr>
               <a:t>– In-Progress.</a:t>
             </a:r>
-            <a:endParaRPr lang="en-US" sz="2000">
+            <a:endParaRPr lang="en-US" sz="2000" dirty="0">
               <a:ea typeface="Tahoma"/>
               <a:cs typeface="Tahoma"/>
             </a:endParaRPr>
           </a:p>
           <a:p>
             <a:pPr marL="1257300" lvl="2" indent="-342900">
-              <a:buFont typeface="Arial" panose="05000000000000000000" pitchFamily="2" charset="2"/>
-              <a:buChar char="•"/>
-            </a:pPr>
-            <a:r>
-              <a:rPr lang="en-US" sz="2000">
+              <a:buFont typeface="Courier New" panose="02070309020205020404" pitchFamily="49" charset="0"/>
+              <a:buChar char="o"/>
+            </a:pPr>
+            <a:r>
+              <a:rPr lang="en-US" sz="2000" dirty="0">
                 <a:ea typeface="+mn-lt"/>
                 <a:cs typeface="+mn-lt"/>
               </a:rPr>
               <a:t>Provisioning of Load balancer </a:t>
             </a:r>
             <a:r>
-              <a:rPr lang="en-US" sz="2000" b="1">
+              <a:rPr lang="en-US" sz="2000" b="1" dirty="0">
                 <a:solidFill>
                   <a:srgbClr val="00B050"/>
                 </a:solidFill>
@@ -9660,7 +10352,7 @@
               </a:rPr>
               <a:t>– Completed.</a:t>
             </a:r>
-            <a:endParaRPr lang="en-US" sz="2000">
+            <a:endParaRPr lang="en-US" sz="2000" dirty="0">
               <a:solidFill>
                 <a:srgbClr val="505050"/>
               </a:solidFill>
@@ -9722,10 +10414,10 @@
           <a:lstStyle/>
           <a:p>
             <a:r>
-              <a:rPr lang="en-US" sz="4250"/>
-              <a:t>Provisioning of NAT Gateway</a:t>
-            </a:r>
-            <a:endParaRPr lang="en-US" sz="4300">
+              <a:rPr lang="en-US" sz="4000" dirty="0"/>
+              <a:t>Provisioning of NAT Gateway in COSYS+ Infrastructure</a:t>
+            </a:r>
+            <a:endParaRPr lang="en-US" sz="4300" dirty="0">
               <a:ea typeface="Tahoma"/>
               <a:cs typeface="Tahoma"/>
             </a:endParaRPr>
@@ -9770,7 +10462,7 @@
               <a:buChar char="q"/>
             </a:pPr>
             <a:r>
-              <a:rPr lang="en-US" sz="2000" b="1">
+              <a:rPr lang="en-US" sz="2000" b="1" dirty="0">
                 <a:solidFill>
                   <a:srgbClr val="505050"/>
                 </a:solidFill>
@@ -9780,7 +10472,7 @@
               <a:t>Implementation of a NAT Gateway in COSYS+ Infrastructure – </a:t>
             </a:r>
             <a:r>
-              <a:rPr lang="en-US" sz="2000">
+              <a:rPr lang="en-US" sz="2000" dirty="0">
                 <a:solidFill>
                   <a:srgbClr val="505050"/>
                 </a:solidFill>
@@ -9790,11 +10482,11 @@
               <a:t>Cloud-IMS has received approval for the NAT Gateway implementation, however, approval for the activity schedule/phase in which the implementation will be carried out is still pending </a:t>
             </a:r>
             <a:r>
-              <a:rPr lang="en-US" sz="2000" b="1">
+              <a:rPr lang="en-US" sz="2000" b="1" dirty="0">
                 <a:solidFill>
                   <a:schemeClr val="accent1">
-                    <a:lumMod val="49000"/>
-                    <a:lumOff val="51000"/>
+                    <a:lumMod val="75000"/>
+                    <a:lumOff val="25000"/>
                   </a:schemeClr>
                 </a:solidFill>
                 <a:ea typeface="+mn-lt"/>
@@ -9802,21 +10494,11 @@
               </a:rPr>
               <a:t>– Awaiting Implementation Schedule Approval</a:t>
             </a:r>
-            <a:endParaRPr lang="en-US" b="1">
-              <a:solidFill>
-                <a:schemeClr val="accent1">
-                  <a:lumMod val="49000"/>
-                  <a:lumOff val="51000"/>
-                </a:schemeClr>
-              </a:solidFill>
-              <a:ea typeface="Tahoma"/>
-              <a:cs typeface="Tahoma"/>
-            </a:endParaRPr>
-          </a:p>
-          <a:p>
-            <a:pPr marL="800100" lvl="1" indent="-342900">
-              <a:buFont typeface="Arial" panose="020B0604020202020204" pitchFamily="34" charset="0"/>
-              <a:buChar char="•"/>
+          </a:p>
+          <a:p>
+            <a:pPr marL="342900" indent="-342900">
+              <a:buFont typeface="Wingdings"/>
+              <a:buChar char="q"/>
             </a:pPr>
             <a:endParaRPr lang="en-US" sz="2000" dirty="0">
               <a:latin typeface="Tahoma" panose="020B0604030504040204" pitchFamily="34" charset="0"/>
@@ -10041,7 +10723,7 @@
           <p:nvPr>
             <p:extLst>
               <p:ext uri="{D42A27DB-BD31-4B8C-83A1-F6EECF244321}">
-                <p14:modId xmlns:p14="http://schemas.microsoft.com/office/powerpoint/2010/main" val="642516042"/>
+                <p14:modId xmlns:p14="http://schemas.microsoft.com/office/powerpoint/2010/main" val="3622794679"/>
               </p:ext>
             </p:extLst>
           </p:nvPr>
@@ -10103,7 +10785,7 @@
                         <a:buNone/>
                       </a:pPr>
                       <a:r>
-                        <a:rPr lang="en-US" sz="2000" b="1" i="0" u="none" strike="noStrike" baseline="0" noProof="0">
+                        <a:rPr lang="en-US" sz="2000" b="1" i="0" u="none" strike="noStrike" baseline="0" noProof="0" dirty="0">
                           <a:solidFill>
                             <a:srgbClr val="FFFFFF"/>
                           </a:solidFill>
@@ -10113,10 +10795,47 @@
                         </a:rPr>
                         <a:t>Proposed Nat Gateway</a:t>
                       </a:r>
-                      <a:endParaRPr lang="en-US" sz="2000"/>
+                      <a:endParaRPr lang="en-US" sz="2000" dirty="0"/>
                     </a:p>
                   </a:txBody>
-                  <a:tcPr anchor="ctr"/>
+                  <a:tcPr anchor="ctr">
+                    <a:lnL w="12700" cap="flat" cmpd="sng" algn="ctr">
+                      <a:solidFill>
+                        <a:schemeClr val="bg1"/>
+                      </a:solidFill>
+                      <a:prstDash val="solid"/>
+                      <a:round/>
+                      <a:headEnd type="none" w="med" len="med"/>
+                      <a:tailEnd type="none" w="med" len="med"/>
+                    </a:lnL>
+                    <a:lnR w="12700" cap="flat" cmpd="sng" algn="ctr">
+                      <a:solidFill>
+                        <a:schemeClr val="bg1"/>
+                      </a:solidFill>
+                      <a:prstDash val="solid"/>
+                      <a:round/>
+                      <a:headEnd type="none" w="med" len="med"/>
+                      <a:tailEnd type="none" w="med" len="med"/>
+                    </a:lnR>
+                    <a:lnT w="12700" cap="flat" cmpd="sng" algn="ctr">
+                      <a:solidFill>
+                        <a:schemeClr val="bg1"/>
+                      </a:solidFill>
+                      <a:prstDash val="solid"/>
+                      <a:round/>
+                      <a:headEnd type="none" w="med" len="med"/>
+                      <a:tailEnd type="none" w="med" len="med"/>
+                    </a:lnT>
+                    <a:lnB w="12700" cap="flat" cmpd="sng" algn="ctr">
+                      <a:solidFill>
+                        <a:schemeClr val="bg1"/>
+                      </a:solidFill>
+                      <a:prstDash val="solid"/>
+                      <a:round/>
+                      <a:headEnd type="none" w="med" len="med"/>
+                      <a:tailEnd type="none" w="med" len="med"/>
+                    </a:lnB>
+                  </a:tcPr>
                 </a:tc>
                 <a:tc rowSpan="2">
                   <a:txBody>
@@ -10125,12 +10844,49 @@
                     <a:p>
                       <a:pPr algn="ctr"/>
                       <a:r>
-                        <a:rPr lang="en-US" sz="2000"/>
+                        <a:rPr lang="en-US" sz="2000" dirty="0"/>
                         <a:t>Environment</a:t>
                       </a:r>
                     </a:p>
                   </a:txBody>
-                  <a:tcPr anchor="ctr"/>
+                  <a:tcPr anchor="ctr">
+                    <a:lnL w="12700" cap="flat" cmpd="sng" algn="ctr">
+                      <a:solidFill>
+                        <a:schemeClr val="bg1"/>
+                      </a:solidFill>
+                      <a:prstDash val="solid"/>
+                      <a:round/>
+                      <a:headEnd type="none" w="med" len="med"/>
+                      <a:tailEnd type="none" w="med" len="med"/>
+                    </a:lnL>
+                    <a:lnR w="12700" cap="flat" cmpd="sng" algn="ctr">
+                      <a:solidFill>
+                        <a:schemeClr val="bg1"/>
+                      </a:solidFill>
+                      <a:prstDash val="solid"/>
+                      <a:round/>
+                      <a:headEnd type="none" w="med" len="med"/>
+                      <a:tailEnd type="none" w="med" len="med"/>
+                    </a:lnR>
+                    <a:lnT w="12700" cap="flat" cmpd="sng" algn="ctr">
+                      <a:solidFill>
+                        <a:schemeClr val="bg1"/>
+                      </a:solidFill>
+                      <a:prstDash val="solid"/>
+                      <a:round/>
+                      <a:headEnd type="none" w="med" len="med"/>
+                      <a:tailEnd type="none" w="med" len="med"/>
+                    </a:lnT>
+                    <a:lnB w="12700" cap="flat" cmpd="sng" algn="ctr">
+                      <a:solidFill>
+                        <a:schemeClr val="bg1"/>
+                      </a:solidFill>
+                      <a:prstDash val="solid"/>
+                      <a:round/>
+                      <a:headEnd type="none" w="med" len="med"/>
+                      <a:tailEnd type="none" w="med" len="med"/>
+                    </a:lnB>
+                  </a:tcPr>
                 </a:tc>
                 <a:tc rowSpan="2">
                   <a:txBody>
@@ -10139,12 +10895,49 @@
                     <a:p>
                       <a:pPr algn="ctr"/>
                       <a:r>
-                        <a:rPr lang="en-US" sz="2000"/>
+                        <a:rPr lang="en-US" sz="2000" dirty="0"/>
                         <a:t>Phase</a:t>
                       </a:r>
                     </a:p>
                   </a:txBody>
-                  <a:tcPr anchor="ctr"/>
+                  <a:tcPr anchor="ctr">
+                    <a:lnL w="12700" cap="flat" cmpd="sng" algn="ctr">
+                      <a:solidFill>
+                        <a:schemeClr val="bg1"/>
+                      </a:solidFill>
+                      <a:prstDash val="solid"/>
+                      <a:round/>
+                      <a:headEnd type="none" w="med" len="med"/>
+                      <a:tailEnd type="none" w="med" len="med"/>
+                    </a:lnL>
+                    <a:lnR w="12700" cap="flat" cmpd="sng" algn="ctr">
+                      <a:solidFill>
+                        <a:schemeClr val="bg1"/>
+                      </a:solidFill>
+                      <a:prstDash val="solid"/>
+                      <a:round/>
+                      <a:headEnd type="none" w="med" len="med"/>
+                      <a:tailEnd type="none" w="med" len="med"/>
+                    </a:lnR>
+                    <a:lnT w="12700" cap="flat" cmpd="sng" algn="ctr">
+                      <a:solidFill>
+                        <a:schemeClr val="bg1"/>
+                      </a:solidFill>
+                      <a:prstDash val="solid"/>
+                      <a:round/>
+                      <a:headEnd type="none" w="med" len="med"/>
+                      <a:tailEnd type="none" w="med" len="med"/>
+                    </a:lnT>
+                    <a:lnB w="12700" cap="flat" cmpd="sng" algn="ctr">
+                      <a:solidFill>
+                        <a:schemeClr val="bg1"/>
+                      </a:solidFill>
+                      <a:prstDash val="solid"/>
+                      <a:round/>
+                      <a:headEnd type="none" w="med" len="med"/>
+                      <a:tailEnd type="none" w="med" len="med"/>
+                    </a:lnB>
+                  </a:tcPr>
                 </a:tc>
                 <a:tc gridSpan="2">
                   <a:txBody>
@@ -10158,7 +10951,44 @@
                       </a:r>
                     </a:p>
                   </a:txBody>
-                  <a:tcPr anchor="ctr"/>
+                  <a:tcPr anchor="ctr">
+                    <a:lnL w="12700" cap="flat" cmpd="sng" algn="ctr">
+                      <a:solidFill>
+                        <a:schemeClr val="bg1"/>
+                      </a:solidFill>
+                      <a:prstDash val="solid"/>
+                      <a:round/>
+                      <a:headEnd type="none" w="med" len="med"/>
+                      <a:tailEnd type="none" w="med" len="med"/>
+                    </a:lnL>
+                    <a:lnR w="12700" cap="flat" cmpd="sng" algn="ctr">
+                      <a:solidFill>
+                        <a:schemeClr val="bg1"/>
+                      </a:solidFill>
+                      <a:prstDash val="solid"/>
+                      <a:round/>
+                      <a:headEnd type="none" w="med" len="med"/>
+                      <a:tailEnd type="none" w="med" len="med"/>
+                    </a:lnR>
+                    <a:lnT w="12700" cap="flat" cmpd="sng" algn="ctr">
+                      <a:solidFill>
+                        <a:schemeClr val="bg1"/>
+                      </a:solidFill>
+                      <a:prstDash val="solid"/>
+                      <a:round/>
+                      <a:headEnd type="none" w="med" len="med"/>
+                      <a:tailEnd type="none" w="med" len="med"/>
+                    </a:lnT>
+                    <a:lnB w="12700" cap="flat" cmpd="sng" algn="ctr">
+                      <a:solidFill>
+                        <a:schemeClr val="bg1"/>
+                      </a:solidFill>
+                      <a:prstDash val="solid"/>
+                      <a:round/>
+                      <a:headEnd type="none" w="med" len="med"/>
+                      <a:tailEnd type="none" w="med" len="med"/>
+                    </a:lnB>
+                  </a:tcPr>
                 </a:tc>
                 <a:tc hMerge="1">
                   <a:txBody>
@@ -10214,7 +11044,7 @@
                     <a:p>
                       <a:pPr algn="ctr"/>
                       <a:r>
-                        <a:rPr lang="en-US" sz="2000" b="1">
+                        <a:rPr lang="en-US" sz="2000" b="1" dirty="0">
                           <a:solidFill>
                             <a:schemeClr val="bg1"/>
                           </a:solidFill>
@@ -10224,6 +11054,42 @@
                     </a:p>
                   </a:txBody>
                   <a:tcPr anchor="ctr">
+                    <a:lnL w="12700" cap="flat" cmpd="sng" algn="ctr">
+                      <a:solidFill>
+                        <a:schemeClr val="bg1"/>
+                      </a:solidFill>
+                      <a:prstDash val="solid"/>
+                      <a:round/>
+                      <a:headEnd type="none" w="med" len="med"/>
+                      <a:tailEnd type="none" w="med" len="med"/>
+                    </a:lnL>
+                    <a:lnR w="12700" cap="flat" cmpd="sng" algn="ctr">
+                      <a:solidFill>
+                        <a:schemeClr val="bg1"/>
+                      </a:solidFill>
+                      <a:prstDash val="solid"/>
+                      <a:round/>
+                      <a:headEnd type="none" w="med" len="med"/>
+                      <a:tailEnd type="none" w="med" len="med"/>
+                    </a:lnR>
+                    <a:lnT w="12700" cap="flat" cmpd="sng" algn="ctr">
+                      <a:solidFill>
+                        <a:schemeClr val="bg1"/>
+                      </a:solidFill>
+                      <a:prstDash val="solid"/>
+                      <a:round/>
+                      <a:headEnd type="none" w="med" len="med"/>
+                      <a:tailEnd type="none" w="med" len="med"/>
+                    </a:lnT>
+                    <a:lnB w="12700" cap="flat" cmpd="sng" algn="ctr">
+                      <a:solidFill>
+                        <a:schemeClr val="bg1"/>
+                      </a:solidFill>
+                      <a:prstDash val="solid"/>
+                      <a:round/>
+                      <a:headEnd type="none" w="med" len="med"/>
+                      <a:tailEnd type="none" w="med" len="med"/>
+                    </a:lnB>
                     <a:solidFill>
                       <a:schemeClr val="accent1"/>
                     </a:solidFill>
@@ -10236,7 +11102,7 @@
                     <a:p>
                       <a:pPr algn="ctr"/>
                       <a:r>
-                        <a:rPr lang="en-US" sz="2000" b="1">
+                        <a:rPr lang="en-US" sz="2000" b="1" dirty="0">
                           <a:solidFill>
                             <a:schemeClr val="bg1"/>
                           </a:solidFill>
@@ -10246,6 +11112,42 @@
                     </a:p>
                   </a:txBody>
                   <a:tcPr anchor="ctr">
+                    <a:lnL w="12700" cap="flat" cmpd="sng" algn="ctr">
+                      <a:solidFill>
+                        <a:schemeClr val="bg1"/>
+                      </a:solidFill>
+                      <a:prstDash val="solid"/>
+                      <a:round/>
+                      <a:headEnd type="none" w="med" len="med"/>
+                      <a:tailEnd type="none" w="med" len="med"/>
+                    </a:lnL>
+                    <a:lnR w="12700" cap="flat" cmpd="sng" algn="ctr">
+                      <a:solidFill>
+                        <a:schemeClr val="bg1"/>
+                      </a:solidFill>
+                      <a:prstDash val="solid"/>
+                      <a:round/>
+                      <a:headEnd type="none" w="med" len="med"/>
+                      <a:tailEnd type="none" w="med" len="med"/>
+                    </a:lnR>
+                    <a:lnT w="12700" cap="flat" cmpd="sng" algn="ctr">
+                      <a:solidFill>
+                        <a:schemeClr val="bg1"/>
+                      </a:solidFill>
+                      <a:prstDash val="solid"/>
+                      <a:round/>
+                      <a:headEnd type="none" w="med" len="med"/>
+                      <a:tailEnd type="none" w="med" len="med"/>
+                    </a:lnT>
+                    <a:lnB w="12700" cap="flat" cmpd="sng" algn="ctr">
+                      <a:solidFill>
+                        <a:schemeClr val="bg1"/>
+                      </a:solidFill>
+                      <a:prstDash val="solid"/>
+                      <a:round/>
+                      <a:headEnd type="none" w="med" len="med"/>
+                      <a:tailEnd type="none" w="med" len="med"/>
+                    </a:lnB>
                     <a:solidFill>
                       <a:schemeClr val="accent1"/>
                     </a:solidFill>
@@ -10267,7 +11169,7 @@
                         <a:buNone/>
                       </a:pPr>
                       <a:r>
-                        <a:rPr lang="en-US" sz="2000" b="1" i="0" u="none" strike="noStrike" baseline="0" noProof="0">
+                        <a:rPr lang="en-US" sz="2000" b="1" i="0" u="none" strike="noStrike" baseline="0" noProof="0" dirty="0">
                           <a:solidFill>
                             <a:srgbClr val="FFFFFF"/>
                           </a:solidFill>
@@ -10277,17 +11179,18 @@
                         </a:rPr>
                         <a:t>NON-PROD</a:t>
                       </a:r>
-                      <a:endParaRPr lang="en-US" sz="2000" b="1" i="0" u="none" strike="noStrike" baseline="0" noProof="0" dirty="0">
-                        <a:solidFill>
-                          <a:srgbClr val="FFFFFF"/>
-                        </a:solidFill>
-                        <a:latin typeface="Tahoma"/>
-                        <a:ea typeface="Tahoma"/>
-                        <a:cs typeface="Tahoma"/>
-                      </a:endParaRPr>
                     </a:p>
                   </a:txBody>
                   <a:tcPr anchor="ctr">
+                    <a:lnT w="12700" cap="flat" cmpd="sng" algn="ctr">
+                      <a:solidFill>
+                        <a:schemeClr val="bg1"/>
+                      </a:solidFill>
+                      <a:prstDash val="solid"/>
+                      <a:round/>
+                      <a:headEnd type="none" w="med" len="med"/>
+                      <a:tailEnd type="none" w="med" len="med"/>
+                    </a:lnT>
                     <a:solidFill>
                       <a:schemeClr val="accent1"/>
                     </a:solidFill>
@@ -11409,7 +12312,7 @@
                         <a:buNone/>
                       </a:pPr>
                       <a:r>
-                        <a:rPr lang="en-US" sz="1800">
+                        <a:rPr lang="en-US" sz="1800" dirty="0">
                           <a:solidFill>
                             <a:schemeClr val="tx1">
                               <a:lumMod val="49000"/>
@@ -11418,13 +12321,6 @@
                         </a:rPr>
                         <a:t>Phase-7</a:t>
                       </a:r>
-                      <a:endParaRPr lang="en-US" sz="1800" dirty="0">
-                        <a:solidFill>
-                          <a:schemeClr val="tx1">
-                            <a:lumMod val="49000"/>
-                          </a:schemeClr>
-                        </a:solidFill>
-                      </a:endParaRPr>
                     </a:p>
                   </a:txBody>
                   <a:tcPr anchor="ctr"/>
@@ -11457,7 +12353,7 @@
                         <a:buNone/>
                       </a:pPr>
                       <a:r>
-                        <a:rPr lang="en-US" sz="1800" b="0" i="0" u="none" strike="noStrike" noProof="0">
+                        <a:rPr lang="en-US" sz="1800" b="0" i="0" u="none" strike="noStrike" noProof="0" dirty="0">
                           <a:solidFill>
                             <a:schemeClr val="tx1">
                               <a:lumMod val="49000"/>
@@ -11508,6 +12404,1120 @@
   <p:cSld>
     <p:spTree>
       <p:nvGrpSpPr>
+        <p:cNvPr id="1" name=""/>
+        <p:cNvGrpSpPr/>
+        <p:nvPr/>
+      </p:nvGrpSpPr>
+      <p:grpSpPr>
+        <a:xfrm>
+          <a:off x="0" y="0"/>
+          <a:ext cx="0" cy="0"/>
+          <a:chOff x="0" y="0"/>
+          <a:chExt cx="0" cy="0"/>
+        </a:xfrm>
+      </p:grpSpPr>
+      <p:sp>
+        <p:nvSpPr>
+          <p:cNvPr id="4" name="Title 3">
+            <a:extLst>
+              <a:ext uri="{FF2B5EF4-FFF2-40B4-BE49-F238E27FC236}">
+                <a16:creationId xmlns:a16="http://schemas.microsoft.com/office/drawing/2014/main" id="{DC6573F4-7B5B-C916-3431-214579A3E0F0}"/>
+              </a:ext>
+            </a:extLst>
+          </p:cNvPr>
+          <p:cNvSpPr>
+            <a:spLocks noGrp="1"/>
+          </p:cNvSpPr>
+          <p:nvPr>
+            <p:ph type="title"/>
+          </p:nvPr>
+        </p:nvSpPr>
+        <p:spPr/>
+        <p:txBody>
+          <a:bodyPr/>
+          <a:lstStyle/>
+          <a:p>
+            <a:r>
+              <a:rPr lang="en-US" sz="4000" dirty="0"/>
+              <a:t>Provisioning of NAT Gateway in COSYS+ Infrastructure</a:t>
+            </a:r>
+            <a:endParaRPr lang="en-US" sz="4300" dirty="0">
+              <a:ea typeface="Tahoma"/>
+              <a:cs typeface="Tahoma"/>
+            </a:endParaRPr>
+          </a:p>
+        </p:txBody>
+      </p:sp>
+      <p:sp>
+        <p:nvSpPr>
+          <p:cNvPr id="2" name="TextBox 1">
+            <a:extLst>
+              <a:ext uri="{FF2B5EF4-FFF2-40B4-BE49-F238E27FC236}">
+                <a16:creationId xmlns:a16="http://schemas.microsoft.com/office/drawing/2014/main" id="{07E3DD20-BDF1-38BE-E111-01060DE3B3BB}"/>
+              </a:ext>
+            </a:extLst>
+          </p:cNvPr>
+          <p:cNvSpPr txBox="1"/>
+          <p:nvPr/>
+        </p:nvSpPr>
+        <p:spPr>
+          <a:xfrm>
+            <a:off x="270825" y="1181772"/>
+            <a:ext cx="15303879" cy="6863417"/>
+          </a:xfrm>
+          <a:prstGeom prst="rect">
+            <a:avLst/>
+          </a:prstGeom>
+          <a:noFill/>
+          <a:ln w="12700" cmpd="dbl">
+            <a:solidFill>
+              <a:schemeClr val="tx1"/>
+            </a:solidFill>
+          </a:ln>
+        </p:spPr>
+        <p:txBody>
+          <a:bodyPr wrap="square" lIns="91440" tIns="45720" rIns="91440" bIns="45720" rtlCol="0" anchor="t">
+            <a:spAutoFit/>
+          </a:bodyPr>
+          <a:lstStyle/>
+          <a:p>
+            <a:pPr marL="342900" indent="-342900">
+              <a:buFont typeface="Wingdings"/>
+              <a:buChar char="q"/>
+            </a:pPr>
+            <a:r>
+              <a:rPr lang="en-US" sz="2000" dirty="0">
+                <a:solidFill>
+                  <a:srgbClr val="505050"/>
+                </a:solidFill>
+                <a:ea typeface="+mn-lt"/>
+                <a:cs typeface="+mn-lt"/>
+              </a:rPr>
+              <a:t>Post successful implementation of NAT Gateway, Cloud-IMS will proceed with the decommission of the existing NAT infrastructure for both NON-PROD &amp; PROD environment. </a:t>
+            </a:r>
+            <a:endParaRPr lang="en-US" sz="2000" b="1" dirty="0">
+              <a:solidFill>
+                <a:schemeClr val="accent1">
+                  <a:lumMod val="75000"/>
+                  <a:lumOff val="25000"/>
+                </a:schemeClr>
+              </a:solidFill>
+              <a:ea typeface="+mn-lt"/>
+              <a:cs typeface="+mn-lt"/>
+            </a:endParaRPr>
+          </a:p>
+          <a:p>
+            <a:endParaRPr lang="en-US" sz="2000" dirty="0">
+              <a:latin typeface="Tahoma" panose="020B0604030504040204" pitchFamily="34" charset="0"/>
+              <a:ea typeface="Tahoma" panose="020B0604030504040204" pitchFamily="34" charset="0"/>
+              <a:cs typeface="Tahoma" panose="020B0604030504040204" pitchFamily="34" charset="0"/>
+            </a:endParaRPr>
+          </a:p>
+          <a:p>
+            <a:pPr marL="800100" lvl="1" indent="-342900">
+              <a:buFont typeface="Arial" panose="020B0604020202020204" pitchFamily="34" charset="0"/>
+              <a:buChar char="•"/>
+            </a:pPr>
+            <a:endParaRPr lang="en-US" sz="2000" dirty="0">
+              <a:latin typeface="Tahoma" panose="020B0604030504040204" pitchFamily="34" charset="0"/>
+              <a:ea typeface="Tahoma" panose="020B0604030504040204" pitchFamily="34" charset="0"/>
+              <a:cs typeface="Tahoma" panose="020B0604030504040204" pitchFamily="34" charset="0"/>
+            </a:endParaRPr>
+          </a:p>
+          <a:p>
+            <a:pPr marL="800100" lvl="1" indent="-342900">
+              <a:buFont typeface="Arial" panose="020B0604020202020204" pitchFamily="34" charset="0"/>
+              <a:buChar char="•"/>
+            </a:pPr>
+            <a:endParaRPr lang="en-US" sz="2000" dirty="0">
+              <a:latin typeface="Tahoma" panose="020B0604030504040204" pitchFamily="34" charset="0"/>
+              <a:ea typeface="Tahoma" panose="020B0604030504040204" pitchFamily="34" charset="0"/>
+              <a:cs typeface="Tahoma" panose="020B0604030504040204" pitchFamily="34" charset="0"/>
+            </a:endParaRPr>
+          </a:p>
+          <a:p>
+            <a:pPr marL="800100" lvl="1" indent="-342900">
+              <a:buFont typeface="Arial" panose="020B0604020202020204" pitchFamily="34" charset="0"/>
+              <a:buChar char="•"/>
+            </a:pPr>
+            <a:endParaRPr lang="en-US" sz="2000" dirty="0">
+              <a:latin typeface="Tahoma" panose="020B0604030504040204" pitchFamily="34" charset="0"/>
+              <a:ea typeface="Tahoma" panose="020B0604030504040204" pitchFamily="34" charset="0"/>
+              <a:cs typeface="Tahoma" panose="020B0604030504040204" pitchFamily="34" charset="0"/>
+            </a:endParaRPr>
+          </a:p>
+          <a:p>
+            <a:pPr marL="800100" lvl="1" indent="-342900">
+              <a:buFont typeface="Arial" panose="020B0604020202020204" pitchFamily="34" charset="0"/>
+              <a:buChar char="•"/>
+            </a:pPr>
+            <a:endParaRPr lang="en-US" sz="2000" dirty="0">
+              <a:latin typeface="Tahoma" panose="020B0604030504040204" pitchFamily="34" charset="0"/>
+              <a:ea typeface="Tahoma" panose="020B0604030504040204" pitchFamily="34" charset="0"/>
+              <a:cs typeface="Tahoma" panose="020B0604030504040204" pitchFamily="34" charset="0"/>
+            </a:endParaRPr>
+          </a:p>
+          <a:p>
+            <a:pPr marL="800100" lvl="1" indent="-342900">
+              <a:buFont typeface="Arial" panose="020B0604020202020204" pitchFamily="34" charset="0"/>
+              <a:buChar char="•"/>
+            </a:pPr>
+            <a:endParaRPr lang="en-US" sz="2000" dirty="0">
+              <a:latin typeface="Tahoma" panose="020B0604030504040204" pitchFamily="34" charset="0"/>
+              <a:ea typeface="Tahoma" panose="020B0604030504040204" pitchFamily="34" charset="0"/>
+              <a:cs typeface="Tahoma" panose="020B0604030504040204" pitchFamily="34" charset="0"/>
+            </a:endParaRPr>
+          </a:p>
+          <a:p>
+            <a:pPr marL="800100" lvl="1" indent="-342900">
+              <a:buFont typeface="Arial" panose="020B0604020202020204" pitchFamily="34" charset="0"/>
+              <a:buChar char="•"/>
+            </a:pPr>
+            <a:endParaRPr lang="en-US" sz="2000" dirty="0">
+              <a:latin typeface="Tahoma" panose="020B0604030504040204" pitchFamily="34" charset="0"/>
+              <a:ea typeface="Tahoma" panose="020B0604030504040204" pitchFamily="34" charset="0"/>
+              <a:cs typeface="Tahoma" panose="020B0604030504040204" pitchFamily="34" charset="0"/>
+            </a:endParaRPr>
+          </a:p>
+          <a:p>
+            <a:pPr marL="800100" lvl="1" indent="-342900">
+              <a:buFont typeface="Arial" panose="020B0604020202020204" pitchFamily="34" charset="0"/>
+              <a:buChar char="•"/>
+            </a:pPr>
+            <a:endParaRPr lang="en-US" sz="2000" dirty="0">
+              <a:latin typeface="Tahoma" panose="020B0604030504040204" pitchFamily="34" charset="0"/>
+              <a:ea typeface="Tahoma" panose="020B0604030504040204" pitchFamily="34" charset="0"/>
+              <a:cs typeface="Tahoma" panose="020B0604030504040204" pitchFamily="34" charset="0"/>
+            </a:endParaRPr>
+          </a:p>
+          <a:p>
+            <a:pPr marL="800100" lvl="1" indent="-342900">
+              <a:buFont typeface="Arial" panose="020B0604020202020204" pitchFamily="34" charset="0"/>
+              <a:buChar char="•"/>
+            </a:pPr>
+            <a:endParaRPr lang="en-US" sz="2000" dirty="0">
+              <a:latin typeface="Tahoma" panose="020B0604030504040204" pitchFamily="34" charset="0"/>
+              <a:ea typeface="Tahoma" panose="020B0604030504040204" pitchFamily="34" charset="0"/>
+              <a:cs typeface="Tahoma" panose="020B0604030504040204" pitchFamily="34" charset="0"/>
+            </a:endParaRPr>
+          </a:p>
+          <a:p>
+            <a:pPr marL="800100" lvl="1" indent="-342900">
+              <a:buFont typeface="Arial" panose="020B0604020202020204" pitchFamily="34" charset="0"/>
+              <a:buChar char="•"/>
+            </a:pPr>
+            <a:endParaRPr lang="en-US" sz="2000" dirty="0">
+              <a:latin typeface="Tahoma" panose="020B0604030504040204" pitchFamily="34" charset="0"/>
+              <a:ea typeface="Tahoma" panose="020B0604030504040204" pitchFamily="34" charset="0"/>
+              <a:cs typeface="Tahoma" panose="020B0604030504040204" pitchFamily="34" charset="0"/>
+            </a:endParaRPr>
+          </a:p>
+          <a:p>
+            <a:pPr marL="800100" lvl="1" indent="-342900">
+              <a:buFont typeface="Arial" panose="020B0604020202020204" pitchFamily="34" charset="0"/>
+              <a:buChar char="•"/>
+            </a:pPr>
+            <a:endParaRPr lang="en-US" sz="2000" dirty="0">
+              <a:latin typeface="Tahoma" panose="020B0604030504040204" pitchFamily="34" charset="0"/>
+              <a:ea typeface="Tahoma" panose="020B0604030504040204" pitchFamily="34" charset="0"/>
+              <a:cs typeface="Tahoma" panose="020B0604030504040204" pitchFamily="34" charset="0"/>
+            </a:endParaRPr>
+          </a:p>
+          <a:p>
+            <a:pPr lvl="1"/>
+            <a:endParaRPr lang="en-US" sz="2000" dirty="0">
+              <a:latin typeface="Tahoma" panose="020B0604030504040204" pitchFamily="34" charset="0"/>
+              <a:ea typeface="Tahoma" panose="020B0604030504040204" pitchFamily="34" charset="0"/>
+              <a:cs typeface="Tahoma" panose="020B0604030504040204" pitchFamily="34" charset="0"/>
+            </a:endParaRPr>
+          </a:p>
+          <a:p>
+            <a:pPr lvl="1"/>
+            <a:endParaRPr lang="en-US" sz="2000" dirty="0">
+              <a:latin typeface="Tahoma" panose="020B0604030504040204" pitchFamily="34" charset="0"/>
+              <a:ea typeface="Tahoma" panose="020B0604030504040204" pitchFamily="34" charset="0"/>
+              <a:cs typeface="Tahoma" panose="020B0604030504040204" pitchFamily="34" charset="0"/>
+            </a:endParaRPr>
+          </a:p>
+          <a:p>
+            <a:pPr marL="800100" lvl="1" indent="-342900">
+              <a:buFont typeface="Arial" panose="020B0604020202020204" pitchFamily="34" charset="0"/>
+              <a:buChar char="•"/>
+            </a:pPr>
+            <a:endParaRPr lang="en-US" sz="2000" dirty="0">
+              <a:latin typeface="Tahoma" panose="020B0604030504040204" pitchFamily="34" charset="0"/>
+              <a:ea typeface="Tahoma" panose="020B0604030504040204" pitchFamily="34" charset="0"/>
+              <a:cs typeface="Tahoma" panose="020B0604030504040204" pitchFamily="34" charset="0"/>
+            </a:endParaRPr>
+          </a:p>
+          <a:p>
+            <a:pPr marL="800100" lvl="1" indent="-342900">
+              <a:buFont typeface="Arial" panose="020B0604020202020204" pitchFamily="34" charset="0"/>
+              <a:buChar char="•"/>
+            </a:pPr>
+            <a:endParaRPr lang="en-US" sz="2000" dirty="0">
+              <a:latin typeface="Tahoma" panose="020B0604030504040204" pitchFamily="34" charset="0"/>
+              <a:ea typeface="Tahoma" panose="020B0604030504040204" pitchFamily="34" charset="0"/>
+              <a:cs typeface="Tahoma" panose="020B0604030504040204" pitchFamily="34" charset="0"/>
+            </a:endParaRPr>
+          </a:p>
+          <a:p>
+            <a:pPr marL="800100" lvl="1" indent="-342900">
+              <a:buFont typeface="Arial" panose="020B0604020202020204" pitchFamily="34" charset="0"/>
+              <a:buChar char="•"/>
+            </a:pPr>
+            <a:endParaRPr lang="en-US" sz="2000" dirty="0">
+              <a:latin typeface="Tahoma" panose="020B0604030504040204" pitchFamily="34" charset="0"/>
+              <a:ea typeface="Tahoma" panose="020B0604030504040204" pitchFamily="34" charset="0"/>
+              <a:cs typeface="Tahoma" panose="020B0604030504040204" pitchFamily="34" charset="0"/>
+            </a:endParaRPr>
+          </a:p>
+          <a:p>
+            <a:pPr lvl="1"/>
+            <a:endParaRPr lang="en-US" sz="2000" dirty="0">
+              <a:latin typeface="Tahoma" panose="020B0604030504040204" pitchFamily="34" charset="0"/>
+              <a:ea typeface="Tahoma" panose="020B0604030504040204" pitchFamily="34" charset="0"/>
+              <a:cs typeface="Tahoma" panose="020B0604030504040204" pitchFamily="34" charset="0"/>
+            </a:endParaRPr>
+          </a:p>
+          <a:p>
+            <a:pPr marL="800100" lvl="1" indent="-342900">
+              <a:buFont typeface="Arial" panose="020B0604020202020204" pitchFamily="34" charset="0"/>
+              <a:buChar char="•"/>
+            </a:pPr>
+            <a:endParaRPr lang="en-US" sz="2000" dirty="0">
+              <a:latin typeface="Tahoma" panose="020B0604030504040204" pitchFamily="34" charset="0"/>
+              <a:ea typeface="Tahoma" panose="020B0604030504040204" pitchFamily="34" charset="0"/>
+              <a:cs typeface="Tahoma" panose="020B0604030504040204" pitchFamily="34" charset="0"/>
+            </a:endParaRPr>
+          </a:p>
+          <a:p>
+            <a:pPr marL="800100" lvl="1" indent="-342900">
+              <a:buFont typeface="Arial" panose="020B0604020202020204" pitchFamily="34" charset="0"/>
+              <a:buChar char="•"/>
+            </a:pPr>
+            <a:endParaRPr lang="en-US" sz="2000" dirty="0">
+              <a:latin typeface="Tahoma" panose="020B0604030504040204" pitchFamily="34" charset="0"/>
+              <a:ea typeface="Tahoma" panose="020B0604030504040204" pitchFamily="34" charset="0"/>
+              <a:cs typeface="Tahoma" panose="020B0604030504040204" pitchFamily="34" charset="0"/>
+            </a:endParaRPr>
+          </a:p>
+          <a:p>
+            <a:pPr marL="800100" lvl="1" indent="-342900">
+              <a:buFont typeface="Arial" panose="020B0604020202020204" pitchFamily="34" charset="0"/>
+              <a:buChar char="•"/>
+            </a:pPr>
+            <a:endParaRPr lang="en-US" sz="2000" dirty="0">
+              <a:latin typeface="Tahoma" panose="020B0604030504040204" pitchFamily="34" charset="0"/>
+              <a:ea typeface="Tahoma" panose="020B0604030504040204" pitchFamily="34" charset="0"/>
+              <a:cs typeface="Tahoma" panose="020B0604030504040204" pitchFamily="34" charset="0"/>
+            </a:endParaRPr>
+          </a:p>
+        </p:txBody>
+      </p:sp>
+      <p:graphicFrame>
+        <p:nvGraphicFramePr>
+          <p:cNvPr id="3" name="Table 2">
+            <a:extLst>
+              <a:ext uri="{FF2B5EF4-FFF2-40B4-BE49-F238E27FC236}">
+                <a16:creationId xmlns:a16="http://schemas.microsoft.com/office/drawing/2014/main" id="{8A69E16B-4237-384F-FBE1-456D86A5D640}"/>
+              </a:ext>
+            </a:extLst>
+          </p:cNvPr>
+          <p:cNvGraphicFramePr>
+            <a:graphicFrameLocks noGrp="1"/>
+          </p:cNvGraphicFramePr>
+          <p:nvPr>
+            <p:extLst>
+              <p:ext uri="{D42A27DB-BD31-4B8C-83A1-F6EECF244321}">
+                <p14:modId xmlns:p14="http://schemas.microsoft.com/office/powerpoint/2010/main" val="1171254302"/>
+              </p:ext>
+            </p:extLst>
+          </p:nvPr>
+        </p:nvGraphicFramePr>
+        <p:xfrm>
+          <a:off x="763673" y="2117887"/>
+          <a:ext cx="14493028" cy="2291460"/>
+        </p:xfrm>
+        <a:graphic>
+          <a:graphicData uri="http://schemas.openxmlformats.org/drawingml/2006/table">
+            <a:tbl>
+              <a:tblPr firstRow="1" bandRow="1">
+                <a:tableStyleId>{5C22544A-7EE6-4342-B048-85BDC9FD1C3A}</a:tableStyleId>
+              </a:tblPr>
+              <a:tblGrid>
+                <a:gridCol w="3623257">
+                  <a:extLst>
+                    <a:ext uri="{9D8B030D-6E8A-4147-A177-3AD203B41FA5}">
+                      <a16:colId xmlns:a16="http://schemas.microsoft.com/office/drawing/2014/main" val="702169564"/>
+                    </a:ext>
+                  </a:extLst>
+                </a:gridCol>
+                <a:gridCol w="3015952">
+                  <a:extLst>
+                    <a:ext uri="{9D8B030D-6E8A-4147-A177-3AD203B41FA5}">
+                      <a16:colId xmlns:a16="http://schemas.microsoft.com/office/drawing/2014/main" val="2932625726"/>
+                    </a:ext>
+                  </a:extLst>
+                </a:gridCol>
+                <a:gridCol w="3394554">
+                  <a:extLst>
+                    <a:ext uri="{9D8B030D-6E8A-4147-A177-3AD203B41FA5}">
+                      <a16:colId xmlns:a16="http://schemas.microsoft.com/office/drawing/2014/main" val="3718566942"/>
+                    </a:ext>
+                  </a:extLst>
+                </a:gridCol>
+                <a:gridCol w="4459265">
+                  <a:extLst>
+                    <a:ext uri="{9D8B030D-6E8A-4147-A177-3AD203B41FA5}">
+                      <a16:colId xmlns:a16="http://schemas.microsoft.com/office/drawing/2014/main" val="2265157843"/>
+                    </a:ext>
+                  </a:extLst>
+                </a:gridCol>
+              </a:tblGrid>
+              <a:tr h="395113">
+                <a:tc>
+                  <a:txBody>
+                    <a:bodyPr/>
+                    <a:lstStyle/>
+                    <a:p>
+                      <a:pPr lvl="0" algn="ctr">
+                        <a:buNone/>
+                      </a:pPr>
+                      <a:r>
+                        <a:rPr lang="en-US" sz="2000" b="1" i="0" u="none" strike="noStrike" baseline="0" noProof="0" dirty="0">
+                          <a:solidFill>
+                            <a:srgbClr val="FFFFFF"/>
+                          </a:solidFill>
+                          <a:latin typeface="Tahoma"/>
+                          <a:ea typeface="Tahoma"/>
+                          <a:cs typeface="Tahoma"/>
+                        </a:rPr>
+                        <a:t>VM Name</a:t>
+                      </a:r>
+                      <a:endParaRPr lang="en-US" sz="2000" dirty="0"/>
+                    </a:p>
+                  </a:txBody>
+                  <a:tcPr anchor="ctr">
+                    <a:lnL w="12700" cap="flat" cmpd="sng" algn="ctr">
+                      <a:solidFill>
+                        <a:schemeClr val="bg1"/>
+                      </a:solidFill>
+                      <a:prstDash val="solid"/>
+                      <a:round/>
+                      <a:headEnd type="none" w="med" len="med"/>
+                      <a:tailEnd type="none" w="med" len="med"/>
+                    </a:lnL>
+                    <a:lnR w="12700" cap="flat" cmpd="sng" algn="ctr">
+                      <a:solidFill>
+                        <a:schemeClr val="bg1"/>
+                      </a:solidFill>
+                      <a:prstDash val="solid"/>
+                      <a:round/>
+                      <a:headEnd type="none" w="med" len="med"/>
+                      <a:tailEnd type="none" w="med" len="med"/>
+                    </a:lnR>
+                    <a:lnT w="12700" cap="flat" cmpd="sng" algn="ctr">
+                      <a:solidFill>
+                        <a:schemeClr val="bg1"/>
+                      </a:solidFill>
+                      <a:prstDash val="solid"/>
+                      <a:round/>
+                      <a:headEnd type="none" w="med" len="med"/>
+                      <a:tailEnd type="none" w="med" len="med"/>
+                    </a:lnT>
+                    <a:lnB w="12700" cap="flat" cmpd="sng" algn="ctr">
+                      <a:solidFill>
+                        <a:schemeClr val="bg1"/>
+                      </a:solidFill>
+                      <a:prstDash val="solid"/>
+                      <a:round/>
+                      <a:headEnd type="none" w="med" len="med"/>
+                      <a:tailEnd type="none" w="med" len="med"/>
+                    </a:lnB>
+                  </a:tcPr>
+                </a:tc>
+                <a:tc>
+                  <a:txBody>
+                    <a:bodyPr/>
+                    <a:lstStyle/>
+                    <a:p>
+                      <a:pPr lvl="0" algn="ctr">
+                        <a:buNone/>
+                      </a:pPr>
+                      <a:r>
+                        <a:rPr lang="en-US" sz="2000" dirty="0"/>
+                        <a:t>Private IP</a:t>
+                      </a:r>
+                    </a:p>
+                  </a:txBody>
+                  <a:tcPr anchor="ctr">
+                    <a:lnL w="12700" cap="flat" cmpd="sng" algn="ctr">
+                      <a:solidFill>
+                        <a:schemeClr val="bg1"/>
+                      </a:solidFill>
+                      <a:prstDash val="solid"/>
+                      <a:round/>
+                      <a:headEnd type="none" w="med" len="med"/>
+                      <a:tailEnd type="none" w="med" len="med"/>
+                    </a:lnL>
+                    <a:lnR w="12700" cap="flat" cmpd="sng" algn="ctr">
+                      <a:solidFill>
+                        <a:schemeClr val="bg1"/>
+                      </a:solidFill>
+                      <a:prstDash val="solid"/>
+                      <a:round/>
+                      <a:headEnd type="none" w="med" len="med"/>
+                      <a:tailEnd type="none" w="med" len="med"/>
+                    </a:lnR>
+                    <a:lnT w="12700" cap="flat" cmpd="sng" algn="ctr">
+                      <a:solidFill>
+                        <a:schemeClr val="bg1"/>
+                      </a:solidFill>
+                      <a:prstDash val="solid"/>
+                      <a:round/>
+                      <a:headEnd type="none" w="med" len="med"/>
+                      <a:tailEnd type="none" w="med" len="med"/>
+                    </a:lnT>
+                    <a:lnB w="12700" cap="flat" cmpd="sng" algn="ctr">
+                      <a:solidFill>
+                        <a:schemeClr val="bg1"/>
+                      </a:solidFill>
+                      <a:prstDash val="solid"/>
+                      <a:round/>
+                      <a:headEnd type="none" w="med" len="med"/>
+                      <a:tailEnd type="none" w="med" len="med"/>
+                    </a:lnB>
+                  </a:tcPr>
+                </a:tc>
+                <a:tc>
+                  <a:txBody>
+                    <a:bodyPr/>
+                    <a:lstStyle/>
+                    <a:p>
+                      <a:pPr lvl="0" algn="ctr">
+                        <a:buNone/>
+                      </a:pPr>
+                      <a:r>
+                        <a:rPr lang="en-US" sz="2000" dirty="0"/>
+                        <a:t>Public IP</a:t>
+                      </a:r>
+                    </a:p>
+                  </a:txBody>
+                  <a:tcPr anchor="ctr">
+                    <a:lnL w="12700" cap="flat" cmpd="sng" algn="ctr">
+                      <a:solidFill>
+                        <a:schemeClr val="bg1"/>
+                      </a:solidFill>
+                      <a:prstDash val="solid"/>
+                      <a:round/>
+                      <a:headEnd type="none" w="med" len="med"/>
+                      <a:tailEnd type="none" w="med" len="med"/>
+                    </a:lnL>
+                    <a:lnR w="12700" cap="flat" cmpd="sng" algn="ctr">
+                      <a:solidFill>
+                        <a:schemeClr val="bg1"/>
+                      </a:solidFill>
+                      <a:prstDash val="solid"/>
+                      <a:round/>
+                      <a:headEnd type="none" w="med" len="med"/>
+                      <a:tailEnd type="none" w="med" len="med"/>
+                    </a:lnR>
+                    <a:lnT w="12700" cap="flat" cmpd="sng" algn="ctr">
+                      <a:solidFill>
+                        <a:schemeClr val="bg1"/>
+                      </a:solidFill>
+                      <a:prstDash val="solid"/>
+                      <a:round/>
+                      <a:headEnd type="none" w="med" len="med"/>
+                      <a:tailEnd type="none" w="med" len="med"/>
+                    </a:lnT>
+                    <a:lnB w="12700" cap="flat" cmpd="sng" algn="ctr">
+                      <a:solidFill>
+                        <a:schemeClr val="bg1"/>
+                      </a:solidFill>
+                      <a:prstDash val="solid"/>
+                      <a:round/>
+                      <a:headEnd type="none" w="med" len="med"/>
+                      <a:tailEnd type="none" w="med" len="med"/>
+                    </a:lnB>
+                  </a:tcPr>
+                </a:tc>
+                <a:tc>
+                  <a:txBody>
+                    <a:bodyPr/>
+                    <a:lstStyle/>
+                    <a:p>
+                      <a:pPr lvl="0" algn="ctr">
+                        <a:buNone/>
+                      </a:pPr>
+                      <a:r>
+                        <a:rPr lang="en-US" sz="2000" dirty="0"/>
+                        <a:t>Remarks</a:t>
+                      </a:r>
+                    </a:p>
+                  </a:txBody>
+                  <a:tcPr anchor="ctr">
+                    <a:lnL w="12700" cap="flat" cmpd="sng" algn="ctr">
+                      <a:solidFill>
+                        <a:schemeClr val="bg1"/>
+                      </a:solidFill>
+                      <a:prstDash val="solid"/>
+                      <a:round/>
+                      <a:headEnd type="none" w="med" len="med"/>
+                      <a:tailEnd type="none" w="med" len="med"/>
+                    </a:lnL>
+                    <a:lnR w="12700" cap="flat" cmpd="sng" algn="ctr">
+                      <a:solidFill>
+                        <a:schemeClr val="bg1"/>
+                      </a:solidFill>
+                      <a:prstDash val="solid"/>
+                      <a:round/>
+                      <a:headEnd type="none" w="med" len="med"/>
+                      <a:tailEnd type="none" w="med" len="med"/>
+                    </a:lnR>
+                    <a:lnT w="12700" cap="flat" cmpd="sng" algn="ctr">
+                      <a:solidFill>
+                        <a:schemeClr val="bg1"/>
+                      </a:solidFill>
+                      <a:prstDash val="solid"/>
+                      <a:round/>
+                      <a:headEnd type="none" w="med" len="med"/>
+                      <a:tailEnd type="none" w="med" len="med"/>
+                    </a:lnT>
+                    <a:lnB w="12700" cap="flat" cmpd="sng" algn="ctr">
+                      <a:solidFill>
+                        <a:schemeClr val="bg1"/>
+                      </a:solidFill>
+                      <a:prstDash val="solid"/>
+                      <a:round/>
+                      <a:headEnd type="none" w="med" len="med"/>
+                      <a:tailEnd type="none" w="med" len="med"/>
+                    </a:lnB>
+                  </a:tcPr>
+                </a:tc>
+                <a:extLst>
+                  <a:ext uri="{0D108BD9-81ED-4DB2-BD59-A6C34878D82A}">
+                    <a16:rowId xmlns:a16="http://schemas.microsoft.com/office/drawing/2014/main" val="937925018"/>
+                  </a:ext>
+                </a:extLst>
+              </a:tr>
+              <a:tr h="395113">
+                <a:tc gridSpan="4">
+                  <a:txBody>
+                    <a:bodyPr/>
+                    <a:lstStyle/>
+                    <a:p>
+                      <a:pPr lvl="0" algn="ctr">
+                        <a:buNone/>
+                      </a:pPr>
+                      <a:r>
+                        <a:rPr lang="en-US" sz="2000" b="1" i="0" u="none" strike="noStrike" baseline="0" noProof="0" dirty="0">
+                          <a:solidFill>
+                            <a:srgbClr val="FFFFFF"/>
+                          </a:solidFill>
+                          <a:latin typeface="Tahoma"/>
+                          <a:ea typeface="Tahoma"/>
+                          <a:cs typeface="Tahoma"/>
+                        </a:rPr>
+                        <a:t>NON-PROD</a:t>
+                      </a:r>
+                    </a:p>
+                  </a:txBody>
+                  <a:tcPr anchor="ctr">
+                    <a:lnT w="12700" cap="flat" cmpd="sng" algn="ctr">
+                      <a:solidFill>
+                        <a:schemeClr val="bg1"/>
+                      </a:solidFill>
+                      <a:prstDash val="solid"/>
+                      <a:round/>
+                      <a:headEnd type="none" w="med" len="med"/>
+                      <a:tailEnd type="none" w="med" len="med"/>
+                    </a:lnT>
+                    <a:solidFill>
+                      <a:schemeClr val="accent1"/>
+                    </a:solidFill>
+                  </a:tcPr>
+                </a:tc>
+                <a:tc hMerge="1">
+                  <a:txBody>
+                    <a:bodyPr/>
+                    <a:lstStyle/>
+                    <a:p>
+                      <a:endParaRPr lang="en-US"/>
+                    </a:p>
+                  </a:txBody>
+                  <a:tcPr/>
+                </a:tc>
+                <a:tc hMerge="1">
+                  <a:txBody>
+                    <a:bodyPr/>
+                    <a:lstStyle/>
+                    <a:p>
+                      <a:endParaRPr lang="en-US"/>
+                    </a:p>
+                  </a:txBody>
+                  <a:tcPr/>
+                </a:tc>
+                <a:tc hMerge="1">
+                  <a:txBody>
+                    <a:bodyPr/>
+                    <a:lstStyle/>
+                    <a:p>
+                      <a:endParaRPr lang="en-US"/>
+                    </a:p>
+                  </a:txBody>
+                  <a:tcPr/>
+                </a:tc>
+                <a:extLst>
+                  <a:ext uri="{0D108BD9-81ED-4DB2-BD59-A6C34878D82A}">
+                    <a16:rowId xmlns:a16="http://schemas.microsoft.com/office/drawing/2014/main" val="4088001797"/>
+                  </a:ext>
+                </a:extLst>
+              </a:tr>
+              <a:tr h="364720">
+                <a:tc>
+                  <a:txBody>
+                    <a:bodyPr/>
+                    <a:lstStyle/>
+                    <a:p>
+                      <a:pPr lvl="0" algn="ctr">
+                        <a:buNone/>
+                      </a:pPr>
+                      <a:r>
+                        <a:rPr lang="en-US" sz="1800" b="0" i="0" u="none" strike="noStrike" noProof="0" dirty="0">
+                          <a:solidFill>
+                            <a:schemeClr val="tx1">
+                              <a:lumMod val="49000"/>
+                            </a:schemeClr>
+                          </a:solidFill>
+                          <a:latin typeface="Tahoma"/>
+                          <a:ea typeface="Tahoma"/>
+                          <a:cs typeface="Tahoma"/>
+                        </a:rPr>
+                        <a:t>COSYS-SEA-PRD-NAT2</a:t>
+                      </a:r>
+                      <a:endParaRPr lang="en-US" sz="1800" dirty="0">
+                        <a:solidFill>
+                          <a:schemeClr val="tx1">
+                            <a:lumMod val="49000"/>
+                          </a:schemeClr>
+                        </a:solidFill>
+                      </a:endParaRPr>
+                    </a:p>
+                  </a:txBody>
+                  <a:tcPr anchor="ctr"/>
+                </a:tc>
+                <a:tc>
+                  <a:txBody>
+                    <a:bodyPr/>
+                    <a:lstStyle/>
+                    <a:p>
+                      <a:pPr lvl="0" algn="ctr">
+                        <a:buNone/>
+                      </a:pPr>
+                      <a:r>
+                        <a:rPr lang="en-US" sz="1800" b="0" i="0" u="none" strike="noStrike" noProof="0" dirty="0">
+                          <a:solidFill>
+                            <a:schemeClr val="tx1">
+                              <a:lumMod val="49000"/>
+                            </a:schemeClr>
+                          </a:solidFill>
+                          <a:latin typeface="Tahoma"/>
+                          <a:ea typeface="Tahoma"/>
+                          <a:cs typeface="Tahoma"/>
+                        </a:rPr>
+                        <a:t>10.130.6.4</a:t>
+                      </a:r>
+                      <a:endParaRPr lang="en-US" sz="1800" dirty="0">
+                        <a:solidFill>
+                          <a:schemeClr val="tx1">
+                            <a:lumMod val="49000"/>
+                          </a:schemeClr>
+                        </a:solidFill>
+                      </a:endParaRPr>
+                    </a:p>
+                  </a:txBody>
+                  <a:tcPr anchor="ctr"/>
+                </a:tc>
+                <a:tc>
+                  <a:txBody>
+                    <a:bodyPr/>
+                    <a:lstStyle/>
+                    <a:p>
+                      <a:pPr lvl="0" algn="ctr">
+                        <a:buNone/>
+                      </a:pPr>
+                      <a:r>
+                        <a:rPr lang="en-US" sz="1800">
+                          <a:solidFill>
+                            <a:schemeClr val="tx1">
+                              <a:lumMod val="49000"/>
+                            </a:schemeClr>
+                          </a:solidFill>
+                        </a:rPr>
+                        <a:t>13.76.195.224</a:t>
+                      </a:r>
+                      <a:endParaRPr lang="en-US" sz="1800" dirty="0">
+                        <a:solidFill>
+                          <a:schemeClr val="tx1">
+                            <a:lumMod val="49000"/>
+                          </a:schemeClr>
+                        </a:solidFill>
+                      </a:endParaRPr>
+                    </a:p>
+                  </a:txBody>
+                  <a:tcPr anchor="ctr"/>
+                </a:tc>
+                <a:tc>
+                  <a:txBody>
+                    <a:bodyPr/>
+                    <a:lstStyle/>
+                    <a:p>
+                      <a:pPr lvl="0" algn="ctr">
+                        <a:buNone/>
+                      </a:pPr>
+                      <a:r>
+                        <a:rPr lang="en-US" sz="1800">
+                          <a:solidFill>
+                            <a:schemeClr val="tx1">
+                              <a:lumMod val="49000"/>
+                            </a:schemeClr>
+                          </a:solidFill>
+                        </a:rPr>
+                        <a:t>Can be decommissioned after Phase-4.</a:t>
+                      </a:r>
+                      <a:endParaRPr lang="en-US" sz="1800" dirty="0">
+                        <a:solidFill>
+                          <a:schemeClr val="tx1">
+                            <a:lumMod val="49000"/>
+                          </a:schemeClr>
+                        </a:solidFill>
+                      </a:endParaRPr>
+                    </a:p>
+                  </a:txBody>
+                  <a:tcPr anchor="ctr"/>
+                </a:tc>
+                <a:extLst>
+                  <a:ext uri="{0D108BD9-81ED-4DB2-BD59-A6C34878D82A}">
+                    <a16:rowId xmlns:a16="http://schemas.microsoft.com/office/drawing/2014/main" val="1029488199"/>
+                  </a:ext>
+                </a:extLst>
+              </a:tr>
+              <a:tr h="371220">
+                <a:tc>
+                  <a:txBody>
+                    <a:bodyPr/>
+                    <a:lstStyle/>
+                    <a:p>
+                      <a:pPr lvl="0" algn="ctr">
+                        <a:buNone/>
+                      </a:pPr>
+                      <a:r>
+                        <a:rPr lang="en-US" sz="1800" b="0" i="0" u="none" strike="noStrike" noProof="0" dirty="0">
+                          <a:solidFill>
+                            <a:schemeClr val="tx1">
+                              <a:lumMod val="49000"/>
+                            </a:schemeClr>
+                          </a:solidFill>
+                          <a:latin typeface="+mn-lt"/>
+                          <a:ea typeface="Tahoma"/>
+                          <a:cs typeface="Tahoma"/>
+                        </a:rPr>
+                        <a:t>COSYS-SEA-PRD-NAT1</a:t>
+                      </a:r>
+                      <a:endParaRPr lang="en-US" sz="1800" dirty="0">
+                        <a:solidFill>
+                          <a:schemeClr val="tx1">
+                            <a:lumMod val="49000"/>
+                          </a:schemeClr>
+                        </a:solidFill>
+                      </a:endParaRPr>
+                    </a:p>
+                  </a:txBody>
+                  <a:tcPr anchor="ctr"/>
+                </a:tc>
+                <a:tc>
+                  <a:txBody>
+                    <a:bodyPr/>
+                    <a:lstStyle/>
+                    <a:p>
+                      <a:pPr lvl="0" algn="ctr">
+                        <a:buNone/>
+                      </a:pPr>
+                      <a:r>
+                        <a:rPr lang="en-US" sz="1800" b="0" i="0" u="none" strike="noStrike" noProof="0" dirty="0">
+                          <a:solidFill>
+                            <a:schemeClr val="tx1">
+                              <a:lumMod val="49000"/>
+                            </a:schemeClr>
+                          </a:solidFill>
+                          <a:latin typeface="Tahoma"/>
+                          <a:ea typeface="Tahoma"/>
+                          <a:cs typeface="Tahoma"/>
+                        </a:rPr>
+                        <a:t>10.130.6.10</a:t>
+                      </a:r>
+                      <a:endParaRPr lang="en-US" sz="1800" dirty="0">
+                        <a:solidFill>
+                          <a:schemeClr val="tx1">
+                            <a:lumMod val="49000"/>
+                          </a:schemeClr>
+                        </a:solidFill>
+                      </a:endParaRPr>
+                    </a:p>
+                  </a:txBody>
+                  <a:tcPr anchor="ctr"/>
+                </a:tc>
+                <a:tc>
+                  <a:txBody>
+                    <a:bodyPr/>
+                    <a:lstStyle/>
+                    <a:p>
+                      <a:pPr lvl="0" algn="ctr">
+                        <a:buNone/>
+                      </a:pPr>
+                      <a:r>
+                        <a:rPr lang="en-US" sz="1800" dirty="0">
+                          <a:solidFill>
+                            <a:schemeClr val="tx1">
+                              <a:lumMod val="49000"/>
+                            </a:schemeClr>
+                          </a:solidFill>
+                        </a:rPr>
+                        <a:t>NA</a:t>
+                      </a:r>
+                    </a:p>
+                  </a:txBody>
+                  <a:tcPr anchor="ctr"/>
+                </a:tc>
+                <a:tc>
+                  <a:txBody>
+                    <a:bodyPr/>
+                    <a:lstStyle/>
+                    <a:p>
+                      <a:pPr lvl="0" algn="ctr">
+                        <a:buNone/>
+                      </a:pPr>
+                      <a:r>
+                        <a:rPr lang="en-US" sz="1800" dirty="0">
+                          <a:solidFill>
+                            <a:schemeClr val="tx1">
+                              <a:lumMod val="49000"/>
+                            </a:schemeClr>
+                          </a:solidFill>
+                        </a:rPr>
+                        <a:t>Standby VM.</a:t>
+                      </a:r>
+                    </a:p>
+                  </a:txBody>
+                  <a:tcPr anchor="ctr"/>
+                </a:tc>
+                <a:extLst>
+                  <a:ext uri="{0D108BD9-81ED-4DB2-BD59-A6C34878D82A}">
+                    <a16:rowId xmlns:a16="http://schemas.microsoft.com/office/drawing/2014/main" val="1354505340"/>
+                  </a:ext>
+                </a:extLst>
+              </a:tr>
+              <a:tr h="395113">
+                <a:tc gridSpan="4">
+                  <a:txBody>
+                    <a:bodyPr/>
+                    <a:lstStyle/>
+                    <a:p>
+                      <a:pPr lvl="0" algn="ctr">
+                        <a:buNone/>
+                      </a:pPr>
+                      <a:r>
+                        <a:rPr lang="en-US" sz="2000" b="1" dirty="0">
+                          <a:solidFill>
+                            <a:schemeClr val="bg1"/>
+                          </a:solidFill>
+                        </a:rPr>
+                        <a:t>PROD</a:t>
+                      </a:r>
+                      <a:endParaRPr lang="en-US" sz="2000" b="1" dirty="0"/>
+                    </a:p>
+                  </a:txBody>
+                  <a:tcPr anchor="ctr">
+                    <a:solidFill>
+                      <a:schemeClr val="accent1"/>
+                    </a:solidFill>
+                  </a:tcPr>
+                </a:tc>
+                <a:tc hMerge="1">
+                  <a:txBody>
+                    <a:bodyPr/>
+                    <a:lstStyle/>
+                    <a:p>
+                      <a:endParaRPr lang="en-US"/>
+                    </a:p>
+                  </a:txBody>
+                  <a:tcPr/>
+                </a:tc>
+                <a:tc hMerge="1">
+                  <a:txBody>
+                    <a:bodyPr/>
+                    <a:lstStyle/>
+                    <a:p>
+                      <a:endParaRPr lang="en-US"/>
+                    </a:p>
+                  </a:txBody>
+                  <a:tcPr/>
+                </a:tc>
+                <a:tc hMerge="1">
+                  <a:txBody>
+                    <a:bodyPr/>
+                    <a:lstStyle/>
+                    <a:p>
+                      <a:endParaRPr lang="en-US"/>
+                    </a:p>
+                  </a:txBody>
+                  <a:tcPr/>
+                </a:tc>
+                <a:extLst>
+                  <a:ext uri="{0D108BD9-81ED-4DB2-BD59-A6C34878D82A}">
+                    <a16:rowId xmlns:a16="http://schemas.microsoft.com/office/drawing/2014/main" val="4017062290"/>
+                  </a:ext>
+                </a:extLst>
+              </a:tr>
+              <a:tr h="364720">
+                <a:tc>
+                  <a:txBody>
+                    <a:bodyPr/>
+                    <a:lstStyle/>
+                    <a:p>
+                      <a:pPr lvl="0" algn="ctr">
+                        <a:buNone/>
+                      </a:pPr>
+                      <a:r>
+                        <a:rPr lang="en-US" sz="1800" b="0" i="0" u="none" strike="noStrike" noProof="0" dirty="0">
+                          <a:solidFill>
+                            <a:schemeClr val="tx1">
+                              <a:lumMod val="49000"/>
+                            </a:schemeClr>
+                          </a:solidFill>
+                          <a:latin typeface="Tahoma"/>
+                          <a:ea typeface="Tahoma"/>
+                          <a:cs typeface="Tahoma"/>
+                        </a:rPr>
+                        <a:t>COSYS-SEA-UAT-NAT1</a:t>
+                      </a:r>
+                      <a:endParaRPr lang="en-US" sz="1800" dirty="0">
+                        <a:solidFill>
+                          <a:schemeClr val="tx1">
+                            <a:lumMod val="49000"/>
+                          </a:schemeClr>
+                        </a:solidFill>
+                      </a:endParaRPr>
+                    </a:p>
+                  </a:txBody>
+                  <a:tcPr anchor="ctr"/>
+                </a:tc>
+                <a:tc>
+                  <a:txBody>
+                    <a:bodyPr/>
+                    <a:lstStyle/>
+                    <a:p>
+                      <a:pPr lvl="0" algn="ctr">
+                        <a:buNone/>
+                      </a:pPr>
+                      <a:r>
+                        <a:rPr lang="en-US" sz="1800" b="0" i="0" u="none" strike="noStrike" noProof="0" dirty="0">
+                          <a:solidFill>
+                            <a:schemeClr val="tx1">
+                              <a:lumMod val="49000"/>
+                            </a:schemeClr>
+                          </a:solidFill>
+                          <a:latin typeface="Tahoma"/>
+                          <a:ea typeface="Tahoma"/>
+                          <a:cs typeface="Tahoma"/>
+                        </a:rPr>
+                        <a:t>10.130.10.4</a:t>
+                      </a:r>
+                      <a:endParaRPr lang="en-US" sz="1800" dirty="0">
+                        <a:solidFill>
+                          <a:schemeClr val="tx1">
+                            <a:lumMod val="49000"/>
+                          </a:schemeClr>
+                        </a:solidFill>
+                      </a:endParaRPr>
+                    </a:p>
+                  </a:txBody>
+                  <a:tcPr anchor="ctr"/>
+                </a:tc>
+                <a:tc>
+                  <a:txBody>
+                    <a:bodyPr/>
+                    <a:lstStyle/>
+                    <a:p>
+                      <a:pPr lvl="0" algn="ctr">
+                        <a:buNone/>
+                      </a:pPr>
+                      <a:r>
+                        <a:rPr lang="en-US" sz="1800" dirty="0">
+                          <a:solidFill>
+                            <a:schemeClr val="tx1">
+                              <a:lumMod val="49000"/>
+                            </a:schemeClr>
+                          </a:solidFill>
+                        </a:rPr>
+                        <a:t>137.116.136.189</a:t>
+                      </a:r>
+                    </a:p>
+                  </a:txBody>
+                  <a:tcPr anchor="ctr"/>
+                </a:tc>
+                <a:tc>
+                  <a:txBody>
+                    <a:bodyPr/>
+                    <a:lstStyle/>
+                    <a:p>
+                      <a:pPr lvl="0" algn="ctr">
+                        <a:buNone/>
+                      </a:pPr>
+                      <a:r>
+                        <a:rPr lang="en-US" sz="1800" dirty="0">
+                          <a:solidFill>
+                            <a:schemeClr val="tx1">
+                              <a:lumMod val="49000"/>
+                            </a:schemeClr>
+                          </a:solidFill>
+                        </a:rPr>
+                        <a:t>Can be decommissioned after Phase-2.</a:t>
+                      </a:r>
+                    </a:p>
+                  </a:txBody>
+                  <a:tcPr anchor="ctr"/>
+                </a:tc>
+                <a:extLst>
+                  <a:ext uri="{0D108BD9-81ED-4DB2-BD59-A6C34878D82A}">
+                    <a16:rowId xmlns:a16="http://schemas.microsoft.com/office/drawing/2014/main" val="2936637337"/>
+                  </a:ext>
+                </a:extLst>
+              </a:tr>
+            </a:tbl>
+          </a:graphicData>
+        </a:graphic>
+      </p:graphicFrame>
+    </p:spTree>
+    <p:extLst>
+      <p:ext uri="{BB962C8B-B14F-4D97-AF65-F5344CB8AC3E}">
+        <p14:creationId xmlns:p14="http://schemas.microsoft.com/office/powerpoint/2010/main" val="1764847382"/>
+      </p:ext>
+    </p:extLst>
+  </p:cSld>
+  <p:clrMapOvr>
+    <a:masterClrMapping/>
+  </p:clrMapOvr>
+</p:sld>
+</file>
+
+<file path=ppt/slides/slide8.xml><?xml version="1.0" encoding="utf-8"?>
+<p:sld xmlns:a="http://schemas.openxmlformats.org/drawingml/2006/main" xmlns:r="http://schemas.openxmlformats.org/officeDocument/2006/relationships" xmlns:p="http://schemas.openxmlformats.org/presentationml/2006/main">
+  <p:cSld>
+    <p:spTree>
+      <p:nvGrpSpPr>
         <p:cNvPr id="1" name="">
           <a:extLst>
             <a:ext uri="{FF2B5EF4-FFF2-40B4-BE49-F238E27FC236}">
@@ -11549,7 +13559,9 @@
           </a:xfrm>
         </p:spPr>
         <p:txBody>
-          <a:bodyPr/>
+          <a:bodyPr>
+            <a:normAutofit/>
+          </a:bodyPr>
           <a:lstStyle/>
           <a:p>
             <a:r>
@@ -11557,19 +13569,8 @@
                 <a:ea typeface="Tahoma"/>
                 <a:cs typeface="Tahoma"/>
               </a:rPr>
-              <a:t>Enabli</a:t>
-            </a:r>
-            <a:r>
-              <a:rPr lang="en-US" sz="4250">
-                <a:ea typeface="Tahoma"/>
-                <a:cs typeface="Tahoma"/>
-              </a:rPr>
-              <a:t>ng HTTPS for SAUDI (All tenants)</a:t>
-            </a:r>
-            <a:endParaRPr lang="en-US" sz="4250" dirty="0">
-              <a:ea typeface="Tahoma"/>
-              <a:cs typeface="Tahoma"/>
-            </a:endParaRPr>
+              <a:t>COSYS+ PROD HTTPS FQDN URLs Rollout for SAUDI</a:t>
+            </a:r>
           </a:p>
         </p:txBody>
       </p:sp>
@@ -11588,7 +13589,7 @@
         <p:spPr>
           <a:xfrm>
             <a:off x="285025" y="1174816"/>
-            <a:ext cx="15496950" cy="5786199"/>
+            <a:ext cx="15496950" cy="6709529"/>
           </a:xfrm>
           <a:prstGeom prst="rect">
             <a:avLst/>
@@ -11613,17 +13614,17 @@
           </a:p>
           <a:p>
             <a:pPr marL="342900" indent="-342900">
-              <a:buFont typeface="Arial"/>
-              <a:buChar char="•"/>
-            </a:pPr>
-            <a:r>
-              <a:rPr lang="en-US" sz="2000" b="1">
+              <a:buFont typeface="Wingdings" panose="05000000000000000000" pitchFamily="2" charset="2"/>
+              <a:buChar char="q"/>
+            </a:pPr>
+            <a:r>
+              <a:rPr lang="en-US" sz="2000" b="1" dirty="0">
                 <a:ea typeface="+mn-lt"/>
                 <a:cs typeface="+mn-lt"/>
               </a:rPr>
               <a:t>Rollout Status &amp; Observations:</a:t>
             </a:r>
-            <a:endParaRPr lang="en-US">
+            <a:endParaRPr lang="en-US" dirty="0">
               <a:ea typeface="Tahoma"/>
               <a:cs typeface="Tahoma"/>
             </a:endParaRPr>
@@ -11634,16 +13635,12 @@
               <a:buChar char="•"/>
             </a:pPr>
             <a:r>
-              <a:rPr lang="en-US" sz="2000">
+              <a:rPr lang="en-US" sz="2000" dirty="0">
                 <a:ea typeface="Tahoma"/>
                 <a:cs typeface="Tahoma"/>
               </a:rPr>
               <a:t>During the earlier rollout, users experienced 4xx errors across multiple URLs.</a:t>
             </a:r>
-            <a:endParaRPr lang="en-US" sz="2000" dirty="0">
-              <a:ea typeface="Tahoma"/>
-              <a:cs typeface="Tahoma"/>
-            </a:endParaRPr>
           </a:p>
           <a:p>
             <a:pPr marL="800100" indent="-342900">
@@ -11655,16 +13652,9 @@
                 <a:ea typeface="Tahoma"/>
                 <a:cs typeface="Tahoma"/>
               </a:rPr>
-              <a:t>The issue has now been analyzed and addressed in coordination with Microsoft by adding IP-Based excep</a:t>
-            </a:r>
-            <a:r>
-              <a:rPr lang="en-US" sz="2000">
-                <a:ea typeface="Tahoma"/>
-                <a:cs typeface="Tahoma"/>
-              </a:rPr>
-              <a:t>tion in WAF.</a:t>
-            </a:r>
-            <a:endParaRPr lang="en-US"/>
+              <a:t>The issue has now been analyzed and addressed in coordination with Microsoft by adding IP-Based exception in WAF.</a:t>
+            </a:r>
+            <a:endParaRPr lang="en-US" dirty="0"/>
           </a:p>
           <a:p>
             <a:pPr marL="800100" indent="-342900">
@@ -11672,47 +13662,15 @@
               <a:buChar char="•"/>
             </a:pPr>
             <a:r>
-              <a:rPr lang="en-US" sz="2000">
+              <a:rPr lang="en-US" sz="2000" dirty="0">
                 <a:ea typeface="Tahoma"/>
                 <a:cs typeface="Tahoma"/>
               </a:rPr>
-              <a:t>Required fixes and validations have been completed.</a:t>
-            </a:r>
-            <a:endParaRPr lang="en-US"/>
+              <a:t>We can now proceed with the HTTPS rollout with improved confidence, as similar 4xx issues are not expected.</a:t>
+            </a:r>
           </a:p>
           <a:p>
             <a:pPr marL="800100" indent="-342900">
-              <a:buFont typeface="Arial"/>
-              <a:buChar char="•"/>
-            </a:pPr>
-            <a:r>
-              <a:rPr lang="en-US" sz="2000">
-                <a:ea typeface="Tahoma"/>
-                <a:cs typeface="Tahoma"/>
-              </a:rPr>
-              <a:t>We can now proceed with the HTTPS rollout with improved confidence, as similar 4xx issues are not expected.</a:t>
-            </a:r>
-            <a:endParaRPr lang="en-US"/>
-          </a:p>
-          <a:p>
-            <a:pPr marL="800100" indent="-342900">
-              <a:buFont typeface="Arial"/>
-              <a:buChar char="•"/>
-            </a:pPr>
-            <a:endParaRPr lang="en-US" sz="2000" dirty="0">
-              <a:ea typeface="Tahoma"/>
-              <a:cs typeface="Tahoma"/>
-            </a:endParaRPr>
-          </a:p>
-          <a:p>
-            <a:pPr marL="457200"/>
-            <a:endParaRPr lang="en-US" sz="2000" dirty="0">
-              <a:ea typeface="+mn-lt"/>
-              <a:cs typeface="+mn-lt"/>
-            </a:endParaRPr>
-          </a:p>
-          <a:p>
-            <a:pPr marL="800100" lvl="1" indent="-342900">
               <a:buFont typeface="Arial"/>
               <a:buChar char="•"/>
             </a:pPr>
@@ -11723,25 +13681,25 @@
           </a:p>
           <a:p>
             <a:pPr marL="342900" indent="-342900">
-              <a:buFont typeface="Arial"/>
-              <a:buChar char="•"/>
-            </a:pPr>
-            <a:r>
-              <a:rPr lang="en-US" sz="2000" b="1">
+              <a:buFont typeface="Wingdings" panose="05000000000000000000" pitchFamily="2" charset="2"/>
+              <a:buChar char="q"/>
+            </a:pPr>
+            <a:r>
+              <a:rPr lang="en-US" sz="2000" b="1" dirty="0">
                 <a:ea typeface="+mn-lt"/>
                 <a:cs typeface="+mn-lt"/>
               </a:rPr>
               <a:t>Current Observation</a:t>
             </a:r>
             <a:r>
-              <a:rPr lang="en-US" sz="2000" b="1">
+              <a:rPr lang="en-US" sz="2000" b="1" dirty="0">
                 <a:latin typeface="Tahoma"/>
                 <a:ea typeface="Tahoma"/>
                 <a:cs typeface="Tahoma"/>
               </a:rPr>
               <a:t>:</a:t>
             </a:r>
-            <a:endParaRPr lang="en-US" sz="2000" b="1">
+            <a:endParaRPr lang="en-US" sz="2000" b="1" dirty="0">
               <a:latin typeface="Tahoma" panose="020B0604030504040204" pitchFamily="34" charset="0"/>
               <a:ea typeface="Tahoma" panose="020B0604030504040204" pitchFamily="34" charset="0"/>
               <a:cs typeface="Tahoma" panose="020B0604030504040204" pitchFamily="34" charset="0"/>
@@ -11753,49 +13711,49 @@
               <a:buChar char="•"/>
             </a:pPr>
             <a:r>
-              <a:rPr lang="en-US" sz="2000">
+              <a:rPr lang="en-US" sz="2000" dirty="0">
                 <a:ea typeface="+mn-lt"/>
                 <a:cs typeface="+mn-lt"/>
               </a:rPr>
               <a:t>Some</a:t>
             </a:r>
             <a:r>
-              <a:rPr lang="en-US" sz="2000">
+              <a:rPr lang="en-US" sz="2000" dirty="0">
                 <a:ea typeface="Tahoma"/>
                 <a:cs typeface="Tahoma"/>
               </a:rPr>
               <a:t> intermittent 504 </a:t>
             </a:r>
             <a:r>
-              <a:rPr lang="en-US" sz="2000">
+              <a:rPr lang="en-US" sz="2000" dirty="0">
                 <a:ea typeface="+mn-lt"/>
                 <a:cs typeface="+mn-lt"/>
               </a:rPr>
               <a:t>(</a:t>
             </a:r>
             <a:r>
-              <a:rPr lang="en-US" sz="2000">
+              <a:rPr lang="en-US" sz="2000" dirty="0">
                 <a:ea typeface="Tahoma"/>
                 <a:cs typeface="Tahoma"/>
               </a:rPr>
               <a:t>timeout</a:t>
             </a:r>
             <a:r>
-              <a:rPr lang="en-US" sz="2000">
+              <a:rPr lang="en-US" sz="2000" dirty="0">
                 <a:ea typeface="+mn-lt"/>
                 <a:cs typeface="+mn-lt"/>
               </a:rPr>
               <a:t>) </a:t>
             </a:r>
             <a:r>
-              <a:rPr lang="en-US" sz="2000">
+              <a:rPr lang="en-US" sz="2000" dirty="0">
                 <a:ea typeface="Tahoma"/>
                 <a:cs typeface="Tahoma"/>
               </a:rPr>
               <a:t>errors are being observed</a:t>
             </a:r>
             <a:r>
-              <a:rPr lang="en-US" sz="2000">
+              <a:rPr lang="en-US" sz="2000" dirty="0">
                 <a:ea typeface="+mn-lt"/>
                 <a:cs typeface="+mn-lt"/>
               </a:rPr>
@@ -11808,13 +13766,13 @@
               <a:buChar char="•"/>
             </a:pPr>
             <a:r>
-              <a:rPr lang="en-US" sz="2000">
+              <a:rPr lang="en-US" sz="2000" dirty="0">
                 <a:ea typeface="+mn-lt"/>
                 <a:cs typeface="+mn-lt"/>
               </a:rPr>
               <a:t>These are mainly due to backend servers taking longer to respond than expected</a:t>
             </a:r>
-            <a:endParaRPr lang="en-US">
+            <a:endParaRPr lang="en-US" dirty="0">
               <a:ea typeface="Tahoma"/>
               <a:cs typeface="Tahoma"/>
             </a:endParaRPr>
@@ -11825,34 +13783,15 @@
               <a:buChar char="•"/>
             </a:pPr>
             <a:r>
-              <a:rPr lang="en-US" sz="2000">
+              <a:rPr lang="en-US" sz="2000" dirty="0">
                 <a:ea typeface="+mn-lt"/>
                 <a:cs typeface="+mn-lt"/>
               </a:rPr>
               <a:t>The current Application Gateway timeout is set to 20 seconds, which may not be sufficient for certain requests.</a:t>
             </a:r>
-            <a:endParaRPr lang="en-US"/>
           </a:p>
           <a:p>
             <a:pPr marL="800100" indent="-342900">
-              <a:buFont typeface="Arial"/>
-              <a:buChar char="•"/>
-            </a:pPr>
-            <a:endParaRPr lang="en-US" sz="2000" dirty="0">
-              <a:latin typeface="Tahoma" panose="020B0604030504040204" pitchFamily="34" charset="0"/>
-              <a:ea typeface="Tahoma" panose="020B0604030504040204" pitchFamily="34" charset="0"/>
-              <a:cs typeface="Tahoma" panose="020B0604030504040204" pitchFamily="34" charset="0"/>
-            </a:endParaRPr>
-          </a:p>
-          <a:p>
-            <a:pPr marL="457200"/>
-            <a:endParaRPr lang="en-US" sz="2000" dirty="0">
-              <a:ea typeface="+mn-lt"/>
-              <a:cs typeface="+mn-lt"/>
-            </a:endParaRPr>
-          </a:p>
-          <a:p>
-            <a:pPr marL="342900" indent="-342900">
               <a:buFont typeface="Arial"/>
               <a:buChar char="•"/>
             </a:pPr>
@@ -11864,18 +13803,18 @@
           </a:p>
           <a:p>
             <a:pPr marL="342900" indent="-342900">
-              <a:buFont typeface="Arial"/>
-              <a:buChar char="•"/>
-            </a:pPr>
-            <a:r>
-              <a:rPr lang="en-US" sz="2000" b="1">
+              <a:buFont typeface="Wingdings" panose="05000000000000000000" pitchFamily="2" charset="2"/>
+              <a:buChar char="q"/>
+            </a:pPr>
+            <a:r>
+              <a:rPr lang="en-US" sz="2000" b="1" dirty="0">
                 <a:ea typeface="+mn-lt"/>
                 <a:cs typeface="+mn-lt"/>
               </a:rPr>
               <a:t>Support Required from Application Team</a:t>
             </a:r>
             <a:r>
-              <a:rPr lang="en-US" sz="2000" b="1">
+              <a:rPr lang="en-US" sz="2000" b="1" dirty="0">
                 <a:latin typeface="Tahoma"/>
                 <a:ea typeface="Tahoma"/>
                 <a:cs typeface="Tahoma"/>
@@ -11894,7 +13833,7 @@
               <a:buChar char="•"/>
             </a:pPr>
             <a:r>
-              <a:rPr lang="en-US" sz="2000">
+              <a:rPr lang="en-US" sz="2000" dirty="0">
                 <a:latin typeface="Tahoma"/>
                 <a:ea typeface="Tahoma"/>
                 <a:cs typeface="Tahoma"/>
@@ -11909,14 +13848,14 @@
               <a:t> </a:t>
             </a:r>
             <a:r>
-              <a:rPr lang="en-US" sz="2000">
+              <a:rPr lang="en-US" sz="2000" dirty="0">
                 <a:latin typeface="Tahoma"/>
                 <a:ea typeface="Tahoma"/>
                 <a:cs typeface="Tahoma"/>
               </a:rPr>
               <a:t>and confirm the appropriate backend response time / timeout requirement.</a:t>
             </a:r>
-            <a:endParaRPr lang="en-US" sz="2000">
+            <a:endParaRPr lang="en-US" sz="2000" dirty="0">
               <a:latin typeface="Tahoma"/>
               <a:ea typeface="Tahoma" panose="020B0604030504040204" pitchFamily="34" charset="0"/>
               <a:cs typeface="Tahoma"/>
@@ -11928,7 +13867,7 @@
               <a:buChar char="•"/>
             </a:pPr>
             <a:r>
-              <a:rPr lang="en-US" sz="2000">
+              <a:rPr lang="en-US" sz="2000" dirty="0">
                 <a:latin typeface="Tahoma"/>
                 <a:ea typeface="Tahoma"/>
                 <a:cs typeface="Tahoma"/>
@@ -11943,24 +13882,193 @@
               <a:t> </a:t>
             </a:r>
             <a:r>
-              <a:rPr lang="en-US" sz="2000">
+              <a:rPr lang="en-US" sz="2000" dirty="0">
                 <a:latin typeface="Tahoma"/>
                 <a:ea typeface="Tahoma"/>
                 <a:cs typeface="Tahoma"/>
               </a:rPr>
               <a:t>to avoid 504 errors.</a:t>
             </a:r>
-            <a:endParaRPr lang="en-US"/>
+          </a:p>
+          <a:p>
+            <a:pPr marL="457200"/>
+            <a:endParaRPr lang="en-US" sz="2000" dirty="0">
+              <a:latin typeface="Tahoma"/>
+              <a:ea typeface="Tahoma"/>
+              <a:cs typeface="Tahoma"/>
+            </a:endParaRPr>
+          </a:p>
+          <a:p>
+            <a:pPr marL="342900" indent="-342900">
+              <a:buFont typeface="Wingdings" panose="05000000000000000000" pitchFamily="2" charset="2"/>
+              <a:buChar char="q"/>
+            </a:pPr>
+            <a:r>
+              <a:rPr lang="en-US" sz="2000" b="1" dirty="0">
+                <a:ea typeface="+mn-lt"/>
+                <a:cs typeface="+mn-lt"/>
+              </a:rPr>
+              <a:t>Testing &amp; Rollout Recommendation:</a:t>
+            </a:r>
+            <a:endParaRPr lang="en-US" dirty="0">
+              <a:ea typeface="Tahoma"/>
+              <a:cs typeface="Tahoma"/>
+            </a:endParaRPr>
           </a:p>
           <a:p>
             <a:pPr marL="800100" indent="-342900">
               <a:buFont typeface="Arial"/>
               <a:buChar char="•"/>
             </a:pPr>
+            <a:r>
+              <a:rPr lang="en-US" sz="2000" dirty="0">
+                <a:ea typeface="Tahoma"/>
+                <a:cs typeface="Tahoma"/>
+              </a:rPr>
+              <a:t>Conduct</a:t>
+            </a:r>
+            <a:r>
+              <a:rPr lang="en-US" sz="2000" dirty="0">
+                <a:ea typeface="+mn-lt"/>
+                <a:cs typeface="Tahoma"/>
+              </a:rPr>
+              <a:t> thorough testing before full </a:t>
+            </a:r>
+            <a:r>
+              <a:rPr lang="en-US" sz="2000" dirty="0">
+                <a:ea typeface="Tahoma"/>
+                <a:cs typeface="Tahoma"/>
+              </a:rPr>
+              <a:t>rollout, </a:t>
+            </a:r>
+            <a:r>
+              <a:rPr lang="en-US" sz="2000" dirty="0">
+                <a:ea typeface="+mn-lt"/>
+                <a:cs typeface="Tahoma"/>
+              </a:rPr>
+              <a:t>either: </a:t>
+            </a:r>
+          </a:p>
+          <a:p>
+            <a:pPr marL="1257300" lvl="1" indent="-342900">
+              <a:buFont typeface="Courier New" panose="02070309020205020404" pitchFamily="49" charset="0"/>
+              <a:buChar char="o"/>
+            </a:pPr>
+            <a:r>
+              <a:rPr lang="en-US" sz="2000" dirty="0">
+                <a:ea typeface="+mn-lt"/>
+                <a:cs typeface="Tahoma"/>
+              </a:rPr>
+              <a:t>By the application team (if full access is available), or</a:t>
+            </a:r>
             <a:endParaRPr lang="en-US" sz="2000" dirty="0">
               <a:ea typeface="Tahoma"/>
               <a:cs typeface="Tahoma"/>
             </a:endParaRPr>
+          </a:p>
+          <a:p>
+            <a:pPr marL="1257300" lvl="1" indent="-342900">
+              <a:buFont typeface="Courier New" panose="02070309020205020404" pitchFamily="49" charset="0"/>
+              <a:buChar char="o"/>
+            </a:pPr>
+            <a:r>
+              <a:rPr lang="en-US" sz="2000" dirty="0">
+                <a:ea typeface="+mn-lt"/>
+                <a:cs typeface="Tahoma"/>
+              </a:rPr>
+              <a:t>With a limited set of </a:t>
+            </a:r>
+            <a:r>
+              <a:rPr lang="en-US" sz="2000" dirty="0">
+                <a:ea typeface="Tahoma"/>
+                <a:cs typeface="Tahoma"/>
+              </a:rPr>
+              <a:t>users </a:t>
+            </a:r>
+            <a:r>
+              <a:rPr lang="en-US" sz="2000" dirty="0">
+                <a:ea typeface="+mn-lt"/>
+                <a:cs typeface="Tahoma"/>
+              </a:rPr>
+              <a:t>(phased approach)</a:t>
+            </a:r>
+            <a:endParaRPr lang="en-US" sz="2000" dirty="0">
+              <a:ea typeface="Tahoma"/>
+              <a:cs typeface="Tahoma"/>
+            </a:endParaRPr>
+          </a:p>
+          <a:p>
+            <a:pPr marL="800100" indent="-342900">
+              <a:buFont typeface="Arial"/>
+              <a:buChar char="•"/>
+            </a:pPr>
+            <a:r>
+              <a:rPr lang="en-US" sz="2000" dirty="0">
+                <a:ea typeface="+mn-lt"/>
+                <a:cs typeface="Tahoma"/>
+              </a:rPr>
+              <a:t>This will help </a:t>
+            </a:r>
+            <a:r>
+              <a:rPr lang="en-US" sz="2000" dirty="0">
+                <a:ea typeface="Tahoma"/>
+                <a:cs typeface="Tahoma"/>
+              </a:rPr>
+              <a:t>identify any remaining issues early and ensure a smooth rollout.</a:t>
+            </a:r>
+            <a:endParaRPr lang="en-US" dirty="0"/>
+          </a:p>
+          <a:p>
+            <a:pPr marL="800100" indent="-342900">
+              <a:buFont typeface="Arial"/>
+              <a:buChar char="•"/>
+            </a:pPr>
+            <a:r>
+              <a:rPr lang="en-US" sz="2000" dirty="0">
+                <a:ea typeface="Tahoma"/>
+                <a:cs typeface="Tahoma"/>
+              </a:rPr>
+              <a:t>Recommended approach: </a:t>
+            </a:r>
+            <a:endParaRPr lang="en-US" dirty="0"/>
+          </a:p>
+          <a:p>
+            <a:pPr marL="1257300" lvl="1" indent="-342900">
+              <a:buFont typeface="Courier New" panose="02070309020205020404" pitchFamily="49" charset="0"/>
+              <a:buChar char="o"/>
+            </a:pPr>
+            <a:r>
+              <a:rPr lang="en-US" sz="2000" dirty="0">
+                <a:ea typeface="Tahoma"/>
+                <a:cs typeface="Tahoma"/>
+              </a:rPr>
+              <a:t>Phased HTTPS rollout</a:t>
+            </a:r>
+            <a:r>
+              <a:rPr lang="en-US" sz="2000" dirty="0">
+                <a:ea typeface="+mn-lt"/>
+                <a:cs typeface="Tahoma"/>
+              </a:rPr>
+              <a:t>, or</a:t>
+            </a:r>
+            <a:endParaRPr lang="en-US" sz="2000" dirty="0">
+              <a:ea typeface="Tahoma"/>
+              <a:cs typeface="Tahoma"/>
+            </a:endParaRPr>
+          </a:p>
+          <a:p>
+            <a:pPr marL="1257300" lvl="1" indent="-342900">
+              <a:buFont typeface="Courier New" panose="02070309020205020404" pitchFamily="49" charset="0"/>
+              <a:buChar char="o"/>
+            </a:pPr>
+            <a:r>
+              <a:rPr lang="en-US" sz="2000" dirty="0">
+                <a:ea typeface="Tahoma"/>
+                <a:cs typeface="Tahoma"/>
+              </a:rPr>
+              <a:t>Run HTTP and HTTPS in parallel until HTTPS is fully stable</a:t>
+            </a:r>
+            <a:endParaRPr lang="en-US" dirty="0"/>
           </a:p>
         </p:txBody>
       </p:sp>
@@ -11968,347 +14076,6 @@
     <p:extLst>
       <p:ext uri="{BB962C8B-B14F-4D97-AF65-F5344CB8AC3E}">
         <p14:creationId xmlns:p14="http://schemas.microsoft.com/office/powerpoint/2010/main" val="266327205"/>
-      </p:ext>
-    </p:extLst>
-  </p:cSld>
-  <p:clrMapOvr>
-    <a:masterClrMapping/>
-  </p:clrMapOvr>
-</p:sld>
-</file>
-
-<file path=ppt/slides/slide8.xml><?xml version="1.0" encoding="utf-8"?>
-<p:sld xmlns:a="http://schemas.openxmlformats.org/drawingml/2006/main" xmlns:r="http://schemas.openxmlformats.org/officeDocument/2006/relationships" xmlns:p="http://schemas.openxmlformats.org/presentationml/2006/main">
-  <p:cSld>
-    <p:spTree>
-      <p:nvGrpSpPr>
-        <p:cNvPr id="1" name="">
-          <a:extLst>
-            <a:ext uri="{FF2B5EF4-FFF2-40B4-BE49-F238E27FC236}">
-              <a16:creationId xmlns:a16="http://schemas.microsoft.com/office/drawing/2014/main" id="{692A1550-6D0A-3EDF-B598-9DAF1F094E08}"/>
-            </a:ext>
-          </a:extLst>
-        </p:cNvPr>
-        <p:cNvGrpSpPr/>
-        <p:nvPr/>
-      </p:nvGrpSpPr>
-      <p:grpSpPr>
-        <a:xfrm>
-          <a:off x="0" y="0"/>
-          <a:ext cx="0" cy="0"/>
-          <a:chOff x="0" y="0"/>
-          <a:chExt cx="0" cy="0"/>
-        </a:xfrm>
-      </p:grpSpPr>
-      <p:sp>
-        <p:nvSpPr>
-          <p:cNvPr id="4" name="Title 3">
-            <a:extLst>
-              <a:ext uri="{FF2B5EF4-FFF2-40B4-BE49-F238E27FC236}">
-                <a16:creationId xmlns:a16="http://schemas.microsoft.com/office/drawing/2014/main" id="{3C05D624-B9BA-AD0B-DB91-BF19CD37635D}"/>
-              </a:ext>
-            </a:extLst>
-          </p:cNvPr>
-          <p:cNvSpPr>
-            <a:spLocks noGrp="1"/>
-          </p:cNvSpPr>
-          <p:nvPr>
-            <p:ph type="title"/>
-          </p:nvPr>
-        </p:nvSpPr>
-        <p:spPr>
-          <a:xfrm>
-            <a:off x="270825" y="245677"/>
-            <a:ext cx="15504000" cy="936096"/>
-          </a:xfrm>
-        </p:spPr>
-        <p:txBody>
-          <a:bodyPr/>
-          <a:lstStyle/>
-          <a:p>
-            <a:r>
-              <a:rPr lang="en-US" sz="4250" dirty="0">
-                <a:ea typeface="Tahoma"/>
-                <a:cs typeface="Tahoma"/>
-              </a:rPr>
-              <a:t>Enabli</a:t>
-            </a:r>
-            <a:r>
-              <a:rPr lang="en-US" sz="4250">
-                <a:ea typeface="Tahoma"/>
-                <a:cs typeface="Tahoma"/>
-              </a:rPr>
-              <a:t>ng HTTPS for SAUDI (All tenants)</a:t>
-            </a:r>
-            <a:endParaRPr lang="en-US" sz="4250" dirty="0">
-              <a:ea typeface="Tahoma"/>
-              <a:cs typeface="Tahoma"/>
-            </a:endParaRPr>
-          </a:p>
-        </p:txBody>
-      </p:sp>
-      <p:sp>
-        <p:nvSpPr>
-          <p:cNvPr id="2" name="TextBox 1">
-            <a:extLst>
-              <a:ext uri="{FF2B5EF4-FFF2-40B4-BE49-F238E27FC236}">
-                <a16:creationId xmlns:a16="http://schemas.microsoft.com/office/drawing/2014/main" id="{4B1C1D84-D206-11A7-ABFD-E85B366D04E3}"/>
-              </a:ext>
-            </a:extLst>
-          </p:cNvPr>
-          <p:cNvSpPr txBox="1"/>
-          <p:nvPr/>
-        </p:nvSpPr>
-        <p:spPr>
-          <a:xfrm>
-            <a:off x="285025" y="1174816"/>
-            <a:ext cx="15496950" cy="2985433"/>
-          </a:xfrm>
-          <a:prstGeom prst="rect">
-            <a:avLst/>
-          </a:prstGeom>
-          <a:noFill/>
-          <a:ln w="12700" cmpd="dbl">
-            <a:solidFill>
-              <a:schemeClr val="tx1"/>
-            </a:solidFill>
-          </a:ln>
-        </p:spPr>
-        <p:txBody>
-          <a:bodyPr wrap="square" lIns="91440" tIns="45720" rIns="91440" bIns="45720" rtlCol="0" anchor="t">
-            <a:spAutoFit/>
-          </a:bodyPr>
-          <a:lstStyle/>
-          <a:p>
-            <a:endParaRPr lang="en-US" sz="800" b="1" u="sng" dirty="0">
-              <a:ea typeface="+mn-lt"/>
-              <a:cs typeface="+mn-lt"/>
-            </a:endParaRPr>
-          </a:p>
-          <a:p>
-            <a:pPr marL="342900" indent="-342900">
-              <a:buFont typeface="Arial"/>
-              <a:buChar char="•"/>
-            </a:pPr>
-            <a:r>
-              <a:rPr lang="en-US" sz="2000" b="1">
-                <a:ea typeface="+mn-lt"/>
-                <a:cs typeface="+mn-lt"/>
-              </a:rPr>
-              <a:t>Testing &amp; Rollout Recommendation:</a:t>
-            </a:r>
-            <a:endParaRPr lang="en-US">
-              <a:ea typeface="Tahoma"/>
-              <a:cs typeface="Tahoma"/>
-            </a:endParaRPr>
-          </a:p>
-          <a:p>
-            <a:pPr marL="800100" indent="-342900">
-              <a:buFont typeface="Arial"/>
-              <a:buChar char="•"/>
-            </a:pPr>
-            <a:r>
-              <a:rPr lang="en-US" sz="2000">
-                <a:latin typeface="Tahoma"/>
-                <a:ea typeface="Tahoma"/>
-                <a:cs typeface="Tahoma"/>
-              </a:rPr>
-              <a:t>Conduct</a:t>
-            </a:r>
-            <a:r>
-              <a:rPr lang="en-US" sz="2000">
-                <a:latin typeface="Tahoma"/>
-                <a:ea typeface="+mn-lt"/>
-                <a:cs typeface="Tahoma"/>
-              </a:rPr>
-              <a:t> thorough testing before full </a:t>
-            </a:r>
-            <a:r>
-              <a:rPr lang="en-US" sz="2000">
-                <a:latin typeface="Tahoma"/>
-                <a:ea typeface="Tahoma"/>
-                <a:cs typeface="Tahoma"/>
-              </a:rPr>
-              <a:t>rollout, </a:t>
-            </a:r>
-            <a:r>
-              <a:rPr lang="en-US" sz="2000">
-                <a:latin typeface="Tahoma"/>
-                <a:ea typeface="+mn-lt"/>
-                <a:cs typeface="Tahoma"/>
-              </a:rPr>
-              <a:t>either: </a:t>
-            </a:r>
-            <a:endParaRPr lang="en-US" sz="2000" dirty="0">
-              <a:latin typeface="Tahoma"/>
-              <a:ea typeface="+mn-lt"/>
-              <a:cs typeface="Tahoma"/>
-            </a:endParaRPr>
-          </a:p>
-          <a:p>
-            <a:pPr marL="1257300" lvl="1" indent="-342900">
-              <a:buFont typeface="Arial"/>
-              <a:buChar char="•"/>
-            </a:pPr>
-            <a:r>
-              <a:rPr lang="en-US" sz="2000">
-                <a:latin typeface="Tahoma"/>
-                <a:ea typeface="+mn-lt"/>
-                <a:cs typeface="Tahoma"/>
-              </a:rPr>
-              <a:t>By the application team (if full access is available), or</a:t>
-            </a:r>
-            <a:endParaRPr lang="en-US" sz="2000">
-              <a:ea typeface="Tahoma"/>
-              <a:cs typeface="Tahoma"/>
-            </a:endParaRPr>
-          </a:p>
-          <a:p>
-            <a:pPr marL="1257300" lvl="1" indent="-342900">
-              <a:buFont typeface="Arial"/>
-              <a:buChar char="•"/>
-            </a:pPr>
-            <a:r>
-              <a:rPr lang="en-US" sz="2000">
-                <a:latin typeface="Tahoma"/>
-                <a:ea typeface="+mn-lt"/>
-                <a:cs typeface="Tahoma"/>
-              </a:rPr>
-              <a:t>With a limited set of </a:t>
-            </a:r>
-            <a:r>
-              <a:rPr lang="en-US" sz="2000">
-                <a:latin typeface="Tahoma"/>
-                <a:ea typeface="Tahoma"/>
-                <a:cs typeface="Tahoma"/>
-              </a:rPr>
-              <a:t>users </a:t>
-            </a:r>
-            <a:r>
-              <a:rPr lang="en-US" sz="2000">
-                <a:latin typeface="Tahoma"/>
-                <a:ea typeface="+mn-lt"/>
-                <a:cs typeface="Tahoma"/>
-              </a:rPr>
-              <a:t>(phased approach)</a:t>
-            </a:r>
-            <a:endParaRPr lang="en-US" sz="2000">
-              <a:ea typeface="Tahoma"/>
-              <a:cs typeface="Tahoma"/>
-            </a:endParaRPr>
-          </a:p>
-          <a:p>
-            <a:pPr marL="800100" indent="-342900">
-              <a:buFont typeface="Arial"/>
-              <a:buChar char="•"/>
-            </a:pPr>
-            <a:r>
-              <a:rPr lang="en-US" sz="2000">
-                <a:latin typeface="Tahoma"/>
-                <a:ea typeface="+mn-lt"/>
-                <a:cs typeface="Tahoma"/>
-              </a:rPr>
-              <a:t>This will help </a:t>
-            </a:r>
-            <a:r>
-              <a:rPr lang="en-US" sz="2000">
-                <a:latin typeface="Tahoma"/>
-                <a:ea typeface="Tahoma"/>
-                <a:cs typeface="Tahoma"/>
-              </a:rPr>
-              <a:t>identify any remaining issues early and ensure a smooth rollout.</a:t>
-            </a:r>
-            <a:endParaRPr lang="en-US"/>
-          </a:p>
-          <a:p>
-            <a:pPr marL="800100" indent="-342900">
-              <a:buFont typeface="Arial"/>
-              <a:buChar char="•"/>
-            </a:pPr>
-            <a:r>
-              <a:rPr lang="en-US" sz="2000">
-                <a:latin typeface="Tahoma"/>
-                <a:ea typeface="Tahoma"/>
-                <a:cs typeface="Tahoma"/>
-              </a:rPr>
-              <a:t>Recommended </a:t>
-            </a:r>
-            <a:r>
-              <a:rPr lang="en-US" sz="2000">
-                <a:ea typeface="Tahoma"/>
-                <a:cs typeface="Tahoma"/>
-              </a:rPr>
-              <a:t>approach: </a:t>
-            </a:r>
-            <a:endParaRPr lang="en-US"/>
-          </a:p>
-          <a:p>
-            <a:pPr marL="1257300" lvl="1" indent="-342900">
-              <a:buFont typeface="Arial"/>
-              <a:buChar char="•"/>
-            </a:pPr>
-            <a:r>
-              <a:rPr lang="en-US" sz="2000">
-                <a:ea typeface="Tahoma"/>
-                <a:cs typeface="Tahoma"/>
-              </a:rPr>
-              <a:t>Phased </a:t>
-            </a:r>
-            <a:r>
-              <a:rPr lang="en-US" sz="2000">
-                <a:latin typeface="Tahoma"/>
-                <a:ea typeface="Tahoma"/>
-                <a:cs typeface="Tahoma"/>
-              </a:rPr>
-              <a:t>HTTPS rollout</a:t>
-            </a:r>
-            <a:r>
-              <a:rPr lang="en-US" sz="2000">
-                <a:latin typeface="Tahoma"/>
-                <a:ea typeface="+mn-lt"/>
-                <a:cs typeface="Tahoma"/>
-              </a:rPr>
-              <a:t>, or</a:t>
-            </a:r>
-            <a:endParaRPr lang="en-US" sz="2000">
-              <a:ea typeface="Tahoma"/>
-              <a:cs typeface="Tahoma"/>
-            </a:endParaRPr>
-          </a:p>
-          <a:p>
-            <a:pPr marL="1257300" lvl="1" indent="-342900">
-              <a:buFont typeface="Arial"/>
-              <a:buChar char="•"/>
-            </a:pPr>
-            <a:r>
-              <a:rPr lang="en-US" sz="2000">
-                <a:latin typeface="Tahoma"/>
-                <a:ea typeface="Tahoma"/>
-                <a:cs typeface="Tahoma"/>
-              </a:rPr>
-              <a:t>Run HTTP and HTTPS in parallel until HTTPS is fully stable</a:t>
-            </a:r>
-            <a:endParaRPr lang="en-US" sz="2000">
-              <a:ea typeface="Tahoma"/>
-              <a:cs typeface="Tahoma"/>
-            </a:endParaRPr>
-          </a:p>
-          <a:p>
-            <a:pPr marL="800100" indent="-342900">
-              <a:buFont typeface="Arial"/>
-              <a:buChar char="•"/>
-            </a:pPr>
-            <a:endParaRPr lang="en-US" sz="2000" dirty="0">
-              <a:ea typeface="Tahoma"/>
-              <a:cs typeface="Tahoma"/>
-            </a:endParaRPr>
-          </a:p>
-        </p:txBody>
-      </p:sp>
-    </p:spTree>
-    <p:extLst>
-      <p:ext uri="{BB962C8B-B14F-4D97-AF65-F5344CB8AC3E}">
-        <p14:creationId xmlns:p14="http://schemas.microsoft.com/office/powerpoint/2010/main" val="2407802651"/>
       </p:ext>
     </p:extLst>
   </p:cSld>
@@ -12372,19 +14139,8 @@
                 <a:ea typeface="Tahoma"/>
                 <a:cs typeface="Tahoma"/>
               </a:rPr>
-              <a:t>Enabli</a:t>
-            </a:r>
-            <a:r>
-              <a:rPr lang="en-US" sz="4250">
-                <a:ea typeface="Tahoma"/>
-                <a:cs typeface="Tahoma"/>
-              </a:rPr>
-              <a:t>ng HTTPS for AAT-HKG</a:t>
-            </a:r>
-            <a:endParaRPr lang="en-US" sz="4250" dirty="0">
-              <a:ea typeface="Tahoma"/>
-              <a:cs typeface="Tahoma"/>
-            </a:endParaRPr>
+              <a:t>COSYS+ PROD HTTPS FQDN URLs Rollout for AAT</a:t>
+            </a:r>
           </a:p>
         </p:txBody>
       </p:sp>
@@ -12432,13 +14188,13 @@
               <a:buChar char="•"/>
             </a:pPr>
             <a:r>
-              <a:rPr lang="en-US" sz="2000" b="1">
+              <a:rPr lang="en-US" sz="2000" b="1" dirty="0">
                 <a:ea typeface="+mn-lt"/>
                 <a:cs typeface="+mn-lt"/>
               </a:rPr>
               <a:t>Issue Overview:</a:t>
             </a:r>
-            <a:endParaRPr lang="en-US">
+            <a:endParaRPr lang="en-US" dirty="0">
               <a:ea typeface="Tahoma"/>
               <a:cs typeface="Tahoma"/>
             </a:endParaRPr>
@@ -12449,12 +14205,12 @@
               <a:buChar char="•"/>
             </a:pPr>
             <a:r>
-              <a:rPr lang="en-US" sz="2000">
+              <a:rPr lang="en-US" sz="2000" dirty="0">
                 <a:latin typeface="Tahoma"/>
                 <a:ea typeface="+mn-lt"/>
                 <a:cs typeface="Tahoma"/>
               </a:rPr>
-              <a:t>Users encountered 403 (Access Denied) errors while accessing certain application URLs.</a:t>
+              <a:t>Users encountered 403 (Forbidden) errors while accessing certain application URLs.</a:t>
             </a:r>
           </a:p>
           <a:p>
@@ -12463,14 +14219,14 @@
               <a:buChar char="•"/>
             </a:pPr>
             <a:r>
-              <a:rPr lang="en-US" sz="2000">
+              <a:rPr lang="en-US" sz="2000" dirty="0">
                 <a:latin typeface="Tahoma"/>
                 <a:ea typeface="+mn-lt"/>
                 <a:cs typeface="Tahoma"/>
               </a:rPr>
               <a:t>The issue occurred after HTTPS was rolled out to all AAT users at once.</a:t>
             </a:r>
-            <a:endParaRPr lang="en-US" sz="2000">
+            <a:endParaRPr lang="en-US" sz="2000" dirty="0">
               <a:ea typeface="Tahoma"/>
               <a:cs typeface="Tahoma"/>
             </a:endParaRPr>
@@ -12481,14 +14237,14 @@
               <a:buChar char="•"/>
             </a:pPr>
             <a:r>
-              <a:rPr lang="en-US" sz="2000">
+              <a:rPr lang="en-US" sz="2000" dirty="0">
                 <a:latin typeface="Tahoma"/>
                 <a:ea typeface="+mn-lt"/>
                 <a:cs typeface="Tahoma"/>
               </a:rPr>
               <a:t>The Application Gateway’s Web Application Firewall (WAF) started blocking multiple requests considering them unsafe.</a:t>
             </a:r>
-            <a:endParaRPr lang="en-US"/>
+            <a:endParaRPr lang="en-US" dirty="0"/>
           </a:p>
           <a:p>
             <a:pPr marL="800100" lvl="1" indent="-342900">
@@ -12507,14 +14263,14 @@
               <a:buChar char="•"/>
             </a:pPr>
             <a:r>
-              <a:rPr lang="en-US" sz="2000" b="1">
+              <a:rPr lang="en-US" sz="2000" b="1" dirty="0">
                 <a:latin typeface="Tahoma"/>
                 <a:ea typeface="Tahoma"/>
                 <a:cs typeface="Tahoma"/>
               </a:rPr>
               <a:t>Root Cause:</a:t>
             </a:r>
-            <a:endParaRPr lang="en-US" sz="2000" b="1">
+            <a:endParaRPr lang="en-US" sz="2000" b="1" dirty="0">
               <a:latin typeface="Tahoma" panose="020B0604030504040204" pitchFamily="34" charset="0"/>
               <a:ea typeface="Tahoma" panose="020B0604030504040204" pitchFamily="34" charset="0"/>
               <a:cs typeface="Tahoma" panose="020B0604030504040204" pitchFamily="34" charset="0"/>
@@ -12526,14 +14282,14 @@
               <a:buChar char="•"/>
             </a:pPr>
             <a:r>
-              <a:rPr lang="en-US" sz="2000">
+              <a:rPr lang="en-US" sz="2000" dirty="0">
                 <a:latin typeface="Tahoma"/>
                 <a:ea typeface="Tahoma"/>
                 <a:cs typeface="Tahoma"/>
               </a:rPr>
               <a:t>The WAF (security layer) identified certain requests as potentially harmful and blocked them.</a:t>
             </a:r>
-            <a:endParaRPr lang="en-US" sz="2000">
+            <a:endParaRPr lang="en-US" sz="2000" dirty="0">
               <a:latin typeface="Tahoma" panose="020B0604030504040204" pitchFamily="34" charset="0"/>
               <a:ea typeface="Tahoma" panose="020B0604030504040204" pitchFamily="34" charset="0"/>
               <a:cs typeface="Tahoma" panose="020B0604030504040204" pitchFamily="34" charset="0"/>
@@ -12579,14 +14335,14 @@
               <a:buChar char="•"/>
             </a:pPr>
             <a:r>
-              <a:rPr lang="en-US" sz="2000">
+              <a:rPr lang="en-US" sz="2000" dirty="0">
                 <a:latin typeface="Tahoma"/>
                 <a:ea typeface="Tahoma"/>
                 <a:cs typeface="Tahoma"/>
               </a:rPr>
               <a:t>In UAT, the issue was not seen because WAF was in detection mode, but in production it was in prevention mode.</a:t>
             </a:r>
-            <a:endParaRPr lang="en-US" sz="2000">
+            <a:endParaRPr lang="en-US" sz="2000" dirty="0">
               <a:ea typeface="Tahoma"/>
               <a:cs typeface="Tahoma"/>
             </a:endParaRPr>
@@ -12597,14 +14353,14 @@
               <a:buChar char="•"/>
             </a:pPr>
             <a:r>
-              <a:rPr lang="en-US" sz="2000">
+              <a:rPr lang="en-US" sz="2000" dirty="0">
                 <a:latin typeface="Tahoma"/>
                 <a:ea typeface="Tahoma"/>
                 <a:cs typeface="Tahoma"/>
               </a:rPr>
               <a:t>The full rollout (big-bang approach) increased impact instead of limiting it.</a:t>
             </a:r>
-            <a:endParaRPr lang="en-US" sz="2000">
+            <a:endParaRPr lang="en-US" sz="2000" dirty="0">
               <a:ea typeface="Tahoma"/>
               <a:cs typeface="Tahoma"/>
             </a:endParaRPr>
@@ -12615,14 +14371,14 @@
               <a:buChar char="•"/>
             </a:pPr>
             <a:r>
-              <a:rPr lang="en-US" sz="2000">
+              <a:rPr lang="en-US" sz="2000" dirty="0">
                 <a:latin typeface="Tahoma"/>
                 <a:ea typeface="Tahoma"/>
                 <a:cs typeface="Tahoma"/>
               </a:rPr>
               <a:t>There was no advance communication to the support team, leading to delayed preparedness.</a:t>
             </a:r>
-            <a:endParaRPr lang="en-US"/>
+            <a:endParaRPr lang="en-US" dirty="0"/>
           </a:p>
           <a:p>
             <a:pPr marL="342900" indent="-342900">
@@ -12641,7 +14397,7 @@
               <a:buChar char="•"/>
             </a:pPr>
             <a:r>
-              <a:rPr lang="en-US" sz="2000" b="1">
+              <a:rPr lang="en-US" sz="2000" b="1" dirty="0">
                 <a:latin typeface="Tahoma"/>
                 <a:ea typeface="Tahoma"/>
                 <a:cs typeface="Tahoma"/>
@@ -12660,14 +14416,14 @@
               <a:buChar char="•"/>
             </a:pPr>
             <a:r>
-              <a:rPr lang="en-US" sz="2000">
+              <a:rPr lang="en-US" sz="2000" dirty="0">
                 <a:latin typeface="Tahoma"/>
                 <a:ea typeface="Tahoma"/>
                 <a:cs typeface="Tahoma"/>
               </a:rPr>
               <a:t>Logs from Application Gateway were analyzed to identify blocked requests.</a:t>
             </a:r>
-            <a:endParaRPr lang="en-US" sz="2000">
+            <a:endParaRPr lang="en-US" sz="2000" dirty="0">
               <a:latin typeface="Tahoma" panose="020B0604030504040204" pitchFamily="34" charset="0"/>
               <a:ea typeface="Tahoma" panose="020B0604030504040204" pitchFamily="34" charset="0"/>
               <a:cs typeface="Tahoma" panose="020B0604030504040204" pitchFamily="34" charset="0"/>
@@ -12679,14 +14435,14 @@
               <a:buChar char="•"/>
             </a:pPr>
             <a:r>
-              <a:rPr lang="en-US" sz="2000">
+              <a:rPr lang="en-US" sz="2000" dirty="0">
                 <a:latin typeface="Tahoma"/>
                 <a:ea typeface="Tahoma"/>
                 <a:cs typeface="Tahoma"/>
               </a:rPr>
               <a:t>Problematic URLs were identified and temporary exceptions were added.</a:t>
             </a:r>
-            <a:endParaRPr lang="en-US" sz="2000">
+            <a:endParaRPr lang="en-US" sz="2000" dirty="0">
               <a:ea typeface="Tahoma"/>
               <a:cs typeface="Tahoma"/>
             </a:endParaRPr>
@@ -12697,68 +14453,68 @@
               <a:buChar char="•"/>
             </a:pPr>
             <a:r>
-              <a:rPr lang="en-US" sz="2000">
+              <a:rPr lang="en-US" sz="2000" dirty="0">
                 <a:latin typeface="Tahoma"/>
                 <a:ea typeface="Tahoma"/>
                 <a:cs typeface="Tahoma"/>
               </a:rPr>
               <a:t>Multiple fixes were tried: </a:t>
             </a:r>
-            <a:endParaRPr lang="en-US" sz="2000">
+            <a:endParaRPr lang="en-US" sz="2000" dirty="0">
               <a:ea typeface="Tahoma"/>
               <a:cs typeface="Tahoma"/>
             </a:endParaRPr>
           </a:p>
           <a:p>
             <a:pPr marL="1257300" lvl="2" indent="-342900">
-              <a:buFont typeface="Wingdings"/>
-              <a:buChar char="§"/>
-            </a:pPr>
-            <a:r>
-              <a:rPr lang="en-US" sz="2000">
+              <a:buFont typeface="Courier New" panose="02070309020205020404" pitchFamily="49" charset="0"/>
+              <a:buChar char="o"/>
+            </a:pPr>
+            <a:r>
+              <a:rPr lang="en-US" sz="2000" dirty="0">
                 <a:latin typeface="Tahoma"/>
                 <a:ea typeface="Tahoma"/>
                 <a:cs typeface="Tahoma"/>
               </a:rPr>
               <a:t>Allowing specific blocked URLs</a:t>
             </a:r>
-            <a:endParaRPr lang="en-US" sz="2000">
+            <a:endParaRPr lang="en-US" sz="2000" dirty="0">
               <a:ea typeface="Tahoma"/>
               <a:cs typeface="Tahoma"/>
             </a:endParaRPr>
           </a:p>
           <a:p>
             <a:pPr marL="1257300" lvl="2" indent="-342900">
-              <a:buFont typeface="Wingdings"/>
-              <a:buChar char="§"/>
-            </a:pPr>
-            <a:r>
-              <a:rPr lang="en-US" sz="2000">
+              <a:buFont typeface="Courier New" panose="02070309020205020404" pitchFamily="49" charset="0"/>
+              <a:buChar char="o"/>
+            </a:pPr>
+            <a:r>
+              <a:rPr lang="en-US" sz="2000" dirty="0">
                 <a:latin typeface="Tahoma"/>
                 <a:ea typeface="Tahoma"/>
                 <a:cs typeface="Tahoma"/>
               </a:rPr>
               <a:t>Adding wildcard rules to reduce repeated blocking</a:t>
             </a:r>
-            <a:endParaRPr lang="en-US" sz="2000">
+            <a:endParaRPr lang="en-US" sz="2000" dirty="0">
               <a:ea typeface="Tahoma"/>
               <a:cs typeface="Tahoma"/>
             </a:endParaRPr>
           </a:p>
           <a:p>
             <a:pPr marL="1257300" lvl="2" indent="-342900">
-              <a:buFont typeface="Wingdings"/>
-              <a:buChar char="§"/>
-            </a:pPr>
-            <a:r>
-              <a:rPr lang="en-US" sz="2000">
+              <a:buFont typeface="Courier New" panose="02070309020205020404" pitchFamily="49" charset="0"/>
+              <a:buChar char="o"/>
+            </a:pPr>
+            <a:r>
+              <a:rPr lang="en-US" sz="2000" dirty="0">
                 <a:latin typeface="Tahoma"/>
                 <a:ea typeface="Tahoma"/>
                 <a:cs typeface="Tahoma"/>
               </a:rPr>
               <a:t>Since issue persisted, a high-priority case was raised with Microsoft.</a:t>
             </a:r>
-            <a:endParaRPr lang="en-US" sz="2000">
+            <a:endParaRPr lang="en-US" sz="2000" dirty="0">
               <a:ea typeface="Tahoma"/>
               <a:cs typeface="Tahoma"/>
             </a:endParaRPr>
@@ -12769,50 +14525,50 @@
               <a:buChar char="•"/>
             </a:pPr>
             <a:r>
-              <a:rPr lang="en-US" sz="2000">
+              <a:rPr lang="en-US" sz="2000" dirty="0">
                 <a:latin typeface="Tahoma"/>
                 <a:ea typeface="Tahoma"/>
                 <a:cs typeface="Tahoma"/>
               </a:rPr>
               <a:t>Microsoft suggested: </a:t>
             </a:r>
-            <a:endParaRPr lang="en-US" sz="2000">
+            <a:endParaRPr lang="en-US" sz="2000" dirty="0">
               <a:ea typeface="Tahoma"/>
               <a:cs typeface="Tahoma"/>
             </a:endParaRPr>
           </a:p>
           <a:p>
             <a:pPr marL="1257300" lvl="2" indent="-342900">
-              <a:buFont typeface="Wingdings"/>
-              <a:buChar char="§"/>
-            </a:pPr>
-            <a:r>
-              <a:rPr lang="en-US" sz="2000">
+              <a:buFont typeface="Courier New" panose="02070309020205020404" pitchFamily="49" charset="0"/>
+              <a:buChar char="o"/>
+            </a:pPr>
+            <a:r>
+              <a:rPr lang="en-US" sz="2000" dirty="0">
                 <a:latin typeface="Tahoma"/>
                 <a:ea typeface="Tahoma"/>
                 <a:cs typeface="Tahoma"/>
               </a:rPr>
               <a:t>Separating IP and URL rules instead of combining them</a:t>
             </a:r>
-            <a:endParaRPr lang="en-US" sz="2000">
+            <a:endParaRPr lang="en-US" sz="2000" dirty="0">
               <a:ea typeface="Tahoma"/>
               <a:cs typeface="Tahoma"/>
             </a:endParaRPr>
           </a:p>
           <a:p>
             <a:pPr marL="1257300" lvl="2" indent="-342900">
-              <a:buFont typeface="Wingdings"/>
-              <a:buChar char="§"/>
-            </a:pPr>
-            <a:r>
-              <a:rPr lang="en-US" sz="2000">
+              <a:buFont typeface="Courier New" panose="02070309020205020404" pitchFamily="49" charset="0"/>
+              <a:buChar char="o"/>
+            </a:pPr>
+            <a:r>
+              <a:rPr lang="en-US" sz="2000" dirty="0">
                 <a:latin typeface="Tahoma"/>
                 <a:ea typeface="Tahoma"/>
                 <a:cs typeface="Tahoma"/>
               </a:rPr>
               <a:t>Assigning higher priority to IP-based rules</a:t>
             </a:r>
-            <a:endParaRPr lang="en-US" sz="2000">
+            <a:endParaRPr lang="en-US" sz="2000" dirty="0">
               <a:ea typeface="Tahoma"/>
               <a:cs typeface="Tahoma"/>
             </a:endParaRPr>
@@ -12823,14 +14579,14 @@
               <a:buChar char="•"/>
             </a:pPr>
             <a:r>
-              <a:rPr lang="en-US" sz="2000">
+              <a:rPr lang="en-US" sz="2000" dirty="0">
                 <a:latin typeface="Tahoma"/>
                 <a:ea typeface="Tahoma"/>
                 <a:cs typeface="Tahoma"/>
               </a:rPr>
               <a:t>Changes were implemented accordingly and validated.</a:t>
             </a:r>
-            <a:endParaRPr lang="en-US"/>
+            <a:endParaRPr lang="en-US" dirty="0"/>
           </a:p>
         </p:txBody>
       </p:sp>
@@ -13443,6 +15199,15 @@
 </file>
 
 <file path=customXml/item2.xml><?xml version="1.0" encoding="utf-8"?>
+<?mso-contentType ?>
+<FormTemplates xmlns="http://schemas.microsoft.com/sharepoint/v3/contenttype/forms">
+  <Display>DocumentLibraryForm</Display>
+  <Edit>DocumentLibraryForm</Edit>
+  <New>DocumentLibraryForm</New>
+</FormTemplates>
+</file>
+
+<file path=customXml/item3.xml><?xml version="1.0" encoding="utf-8"?>
 <ct:contentTypeSchema xmlns:ct="http://schemas.microsoft.com/office/2006/metadata/contentType" xmlns:ma="http://schemas.microsoft.com/office/2006/metadata/properties/metaAttributes" ct:_="" ma:_="" ma:contentTypeName="Document" ma:contentTypeID="0x01010036C64E25F9797549919A8E031138355A" ma:contentTypeVersion="8" ma:contentTypeDescription="Create a new document." ma:contentTypeScope="" ma:versionID="72b7cec4a755fb3a385616e8db944c6e">
   <xsd:schema xmlns:xsd="http://www.w3.org/2001/XMLSchema" xmlns:xs="http://www.w3.org/2001/XMLSchema" xmlns:p="http://schemas.microsoft.com/office/2006/metadata/properties" xmlns:ns2="4acd531c-e828-4752-b185-1e2017944dbd" targetNamespace="http://schemas.microsoft.com/office/2006/metadata/properties" ma:root="true" ma:fieldsID="83ebd531a0f214de602a1ce31ec994ab" ns2:_="">
     <xsd:import namespace="4acd531c-e828-4752-b185-1e2017944dbd"/>
@@ -13612,15 +15377,6 @@
 </ct:contentTypeSchema>
 </file>
 
-<file path=customXml/item3.xml><?xml version="1.0" encoding="utf-8"?>
-<?mso-contentType ?>
-<FormTemplates xmlns="http://schemas.microsoft.com/sharepoint/v3/contenttype/forms">
-  <Display>DocumentLibraryForm</Display>
-  <Edit>DocumentLibraryForm</Edit>
-  <New>DocumentLibraryForm</New>
-</FormTemplates>
-</file>
-
 <file path=customXml/itemProps1.xml><?xml version="1.0" encoding="utf-8"?>
 <ds:datastoreItem xmlns:ds="http://schemas.openxmlformats.org/officeDocument/2006/customXml" ds:itemID="{343551DC-D8B8-4723-A84D-FBA130B461A1}">
   <ds:schemaRefs>
@@ -13638,6 +15394,14 @@
 </file>
 
 <file path=customXml/itemProps2.xml><?xml version="1.0" encoding="utf-8"?>
+<ds:datastoreItem xmlns:ds="http://schemas.openxmlformats.org/officeDocument/2006/customXml" ds:itemID="{FFB644F2-B1AE-4DE5-AC4C-0BB87F69DF6E}">
+  <ds:schemaRefs>
+    <ds:schemaRef ds:uri="http://schemas.microsoft.com/sharepoint/v3/contenttype/forms"/>
+  </ds:schemaRefs>
+</ds:datastoreItem>
+</file>
+
+<file path=customXml/itemProps3.xml><?xml version="1.0" encoding="utf-8"?>
 <ds:datastoreItem xmlns:ds="http://schemas.openxmlformats.org/officeDocument/2006/customXml" ds:itemID="{1E26330B-C722-4071-9D62-A086F2487C20}">
   <ds:schemaRefs>
     <ds:schemaRef ds:uri="4acd531c-e828-4752-b185-1e2017944dbd"/>
@@ -13653,12 +15417,4 @@
     <ds:schemaRef ds:uri="http://www.w3.org/2001/XMLSchema"/>
   </ds:schemaRefs>
 </ds:datastoreItem>
-</file>
-
-<file path=customXml/itemProps3.xml><?xml version="1.0" encoding="utf-8"?>
-<ds:datastoreItem xmlns:ds="http://schemas.openxmlformats.org/officeDocument/2006/customXml" ds:itemID="{FFB644F2-B1AE-4DE5-AC4C-0BB87F69DF6E}">
-  <ds:schemaRefs>
-    <ds:schemaRef ds:uri="http://schemas.microsoft.com/sharepoint/v3/contenttype/forms"/>
-  </ds:schemaRefs>
-</ds:datastoreItem>
 </file>